--- a/backend/static/test.pptx
+++ b/backend/static/test.pptx
@@ -14,7 +14,6 @@
     <p:sldId id="259" r:id="rId8"/>
     <p:sldId id="260" r:id="rId9"/>
     <p:sldId id="261" r:id="rId10"/>
-    <p:sldId id="262" r:id="rId11"/>
   </p:sldIdLst>
   <p:sldSz cy="6858000" cx="12192000"/>
   <p:notesSz cx="6858000" cy="9144000"/>
@@ -249,7 +248,7 @@
   </p:defaultTextStyle>
   <p:extLst>
     <p:ext uri="GoogleSlidesCustomDataVersion2">
-      <go:slidesCustomData xmlns:go="http://customooxmlschemas.google.com/" r:id="rId12" roundtripDataSignature="AMtx7miYQecwjo9Jgm2ImHJprM0cF4iRjg=="/>
+      <go:slidesCustomData xmlns:go="http://customooxmlschemas.google.com/" r:id="rId11" roundtripDataSignature="AMtx7miXo7JiX/0VKo67iqy6RlfjyL74Gw=="/>
     </p:ext>
   </p:extLst>
 </p:presentation>
@@ -835,7 +834,7 @@
       </p:grpSpPr>
       <p:sp>
         <p:nvSpPr>
-          <p:cNvPr id="81" name="Google Shape;81;p8:notes"/>
+          <p:cNvPr id="81" name="Google Shape;81;p3:notes"/>
           <p:cNvSpPr txBox="1"/>
           <p:nvPr>
             <p:ph idx="1" type="body"/>
@@ -882,7 +881,7 @@
       </p:sp>
       <p:sp>
         <p:nvSpPr>
-          <p:cNvPr id="82" name="Google Shape;82;p8:notes"/>
+          <p:cNvPr id="82" name="Google Shape;82;p3:notes"/>
           <p:cNvSpPr/>
           <p:nvPr>
             <p:ph idx="2" type="sldImg"/>
@@ -938,7 +937,7 @@
   <p:cSld>
     <p:spTree>
       <p:nvGrpSpPr>
-        <p:cNvPr id="88" name="Shape 88"/>
+        <p:cNvPr id="89" name="Shape 89"/>
         <p:cNvGrpSpPr/>
         <p:nvPr/>
       </p:nvGrpSpPr>
@@ -952,7 +951,7 @@
       </p:grpSpPr>
       <p:sp>
         <p:nvSpPr>
-          <p:cNvPr id="89" name="Google Shape;89;p7:notes"/>
+          <p:cNvPr id="90" name="Google Shape;90;p4:notes"/>
           <p:cNvSpPr txBox="1"/>
           <p:nvPr>
             <p:ph idx="1" type="body"/>
@@ -999,7 +998,7 @@
       </p:sp>
       <p:sp>
         <p:nvSpPr>
-          <p:cNvPr id="90" name="Google Shape;90;p7:notes"/>
+          <p:cNvPr id="91" name="Google Shape;91;p4:notes"/>
           <p:cNvSpPr/>
           <p:nvPr>
             <p:ph idx="2" type="sldImg"/>
@@ -1069,7 +1068,7 @@
       </p:grpSpPr>
       <p:sp>
         <p:nvSpPr>
-          <p:cNvPr id="98" name="Google Shape;98;p6:notes"/>
+          <p:cNvPr id="98" name="Google Shape;98;p5:notes"/>
           <p:cNvSpPr txBox="1"/>
           <p:nvPr>
             <p:ph idx="1" type="body"/>
@@ -1116,7 +1115,7 @@
       </p:sp>
       <p:sp>
         <p:nvSpPr>
-          <p:cNvPr id="99" name="Google Shape;99;p6:notes"/>
+          <p:cNvPr id="99" name="Google Shape;99;p5:notes"/>
           <p:cNvSpPr/>
           <p:nvPr>
             <p:ph idx="2" type="sldImg"/>
@@ -1186,7 +1185,7 @@
       </p:grpSpPr>
       <p:sp>
         <p:nvSpPr>
-          <p:cNvPr id="106" name="Google Shape;106;p5:notes"/>
+          <p:cNvPr id="106" name="Google Shape;106;p6:notes"/>
           <p:cNvSpPr txBox="1"/>
           <p:nvPr>
             <p:ph idx="1" type="body"/>
@@ -1233,7 +1232,7 @@
       </p:sp>
       <p:sp>
         <p:nvSpPr>
-          <p:cNvPr id="107" name="Google Shape;107;p5:notes"/>
+          <p:cNvPr id="107" name="Google Shape;107;p6:notes"/>
           <p:cNvSpPr/>
           <p:nvPr>
             <p:ph idx="2" type="sldImg"/>
@@ -1303,7 +1302,7 @@
       </p:grpSpPr>
       <p:sp>
         <p:nvSpPr>
-          <p:cNvPr id="114" name="Google Shape;114;p4:notes"/>
+          <p:cNvPr id="114" name="Google Shape;114;p7:notes"/>
           <p:cNvSpPr txBox="1"/>
           <p:nvPr>
             <p:ph idx="1" type="body"/>
@@ -1350,7 +1349,7 @@
       </p:sp>
       <p:sp>
         <p:nvSpPr>
-          <p:cNvPr id="115" name="Google Shape;115;p4:notes"/>
+          <p:cNvPr id="115" name="Google Shape;115;p7:notes"/>
           <p:cNvSpPr/>
           <p:nvPr>
             <p:ph idx="2" type="sldImg"/>
@@ -1406,7 +1405,7 @@
   <p:cSld>
     <p:spTree>
       <p:nvGrpSpPr>
-        <p:cNvPr id="121" name="Shape 121"/>
+        <p:cNvPr id="122" name="Shape 122"/>
         <p:cNvGrpSpPr/>
         <p:nvPr/>
       </p:nvGrpSpPr>
@@ -1420,7 +1419,7 @@
       </p:grpSpPr>
       <p:sp>
         <p:nvSpPr>
-          <p:cNvPr id="122" name="Google Shape;122;p3:notes"/>
+          <p:cNvPr id="123" name="Google Shape;123;p8:notes"/>
           <p:cNvSpPr txBox="1"/>
           <p:nvPr>
             <p:ph idx="1" type="body"/>
@@ -1467,124 +1466,7 @@
       </p:sp>
       <p:sp>
         <p:nvSpPr>
-          <p:cNvPr id="123" name="Google Shape;123;p3:notes"/>
-          <p:cNvSpPr/>
-          <p:nvPr>
-            <p:ph idx="2" type="sldImg"/>
-          </p:nvPr>
-        </p:nvSpPr>
-        <p:spPr>
-          <a:xfrm>
-            <a:off x="1143225" y="685800"/>
-            <a:ext cx="4572225" cy="3429000"/>
-          </a:xfrm>
-          <a:custGeom>
-            <a:rect b="b" l="l" r="r" t="t"/>
-            <a:pathLst>
-              <a:path extrusionOk="0" h="120000" w="120000">
-                <a:moveTo>
-                  <a:pt x="0" y="0"/>
-                </a:moveTo>
-                <a:lnTo>
-                  <a:pt x="120000" y="0"/>
-                </a:lnTo>
-                <a:lnTo>
-                  <a:pt x="120000" y="120000"/>
-                </a:lnTo>
-                <a:lnTo>
-                  <a:pt x="0" y="120000"/>
-                </a:lnTo>
-                <a:close/>
-              </a:path>
-            </a:pathLst>
-          </a:custGeom>
-          <a:noFill/>
-          <a:ln cap="flat" cmpd="sng" w="9525">
-            <a:solidFill>
-              <a:srgbClr val="000000"/>
-            </a:solidFill>
-            <a:prstDash val="solid"/>
-            <a:round/>
-            <a:headEnd len="sm" w="sm" type="none"/>
-            <a:tailEnd len="sm" w="sm" type="none"/>
-          </a:ln>
-        </p:spPr>
-      </p:sp>
-    </p:spTree>
-  </p:cSld>
-  <p:clrMapOvr>
-    <a:masterClrMapping/>
-  </p:clrMapOvr>
-</p:notes>
-</file>
-
-<file path=ppt/notesSlides/notesSlide7.xml><?xml version="1.0" encoding="utf-8"?>
-<p:notes xmlns:a="http://schemas.openxmlformats.org/drawingml/2006/main" xmlns:r="http://schemas.openxmlformats.org/officeDocument/2006/relationships" xmlns:mc="http://schemas.openxmlformats.org/markup-compatibility/2006" xmlns:mv="urn:schemas-microsoft-com:mac:vml" xmlns:p="http://schemas.openxmlformats.org/presentationml/2006/main" xmlns:c="http://schemas.openxmlformats.org/drawingml/2006/chart" xmlns:dgm="http://schemas.openxmlformats.org/drawingml/2006/diagram" xmlns:o="urn:schemas-microsoft-com:office:office" xmlns:v="urn:schemas-microsoft-com:vml" xmlns:pvml="urn:schemas-microsoft-com:office:powerpoint" xmlns:com="http://schemas.openxmlformats.org/drawingml/2006/compatibility" xmlns:p14="http://schemas.microsoft.com/office/powerpoint/2010/main" xmlns:p15="http://schemas.microsoft.com/office/powerpoint/2012/main" xmlns:ahyp="http://schemas.microsoft.com/office/drawing/2018/hyperlinkcolor" showMasterPhAnim="0" showMasterSp="0">
-  <p:cSld>
-    <p:spTree>
-      <p:nvGrpSpPr>
-        <p:cNvPr id="130" name="Shape 130"/>
-        <p:cNvGrpSpPr/>
-        <p:nvPr/>
-      </p:nvGrpSpPr>
-      <p:grpSpPr>
-        <a:xfrm>
-          <a:off x="0" y="0"/>
-          <a:ext cx="0" cy="0"/>
-          <a:chOff x="0" y="0"/>
-          <a:chExt cx="0" cy="0"/>
-        </a:xfrm>
-      </p:grpSpPr>
-      <p:sp>
-        <p:nvSpPr>
-          <p:cNvPr id="131" name="Google Shape;131;p2:notes"/>
-          <p:cNvSpPr txBox="1"/>
-          <p:nvPr>
-            <p:ph idx="1" type="body"/>
-          </p:nvPr>
-        </p:nvSpPr>
-        <p:spPr>
-          <a:xfrm>
-            <a:off x="685800" y="4343400"/>
-            <a:ext cx="5486400" cy="4114800"/>
-          </a:xfrm>
-          <a:prstGeom prst="rect">
-            <a:avLst/>
-          </a:prstGeom>
-          <a:noFill/>
-          <a:ln>
-            <a:noFill/>
-          </a:ln>
-        </p:spPr>
-        <p:txBody>
-          <a:bodyPr anchorCtr="0" anchor="t" bIns="91425" lIns="91425" spcFirstLastPara="1" rIns="91425" wrap="square" tIns="91425">
-            <a:noAutofit/>
-          </a:bodyPr>
-          <a:lstStyle/>
-          <a:p>
-            <a:pPr indent="0" lvl="0" marL="0" rtl="0" algn="l">
-              <a:lnSpc>
-                <a:spcPct val="100000"/>
-              </a:lnSpc>
-              <a:spcBef>
-                <a:spcPts val="0"/>
-              </a:spcBef>
-              <a:spcAft>
-                <a:spcPts val="0"/>
-              </a:spcAft>
-              <a:buSzPts val="1100"/>
-              <a:buNone/>
-            </a:pPr>
-            <a:r>
-              <a:t/>
-            </a:r>
-            <a:endParaRPr/>
-          </a:p>
-        </p:txBody>
-      </p:sp>
-      <p:sp>
-        <p:nvSpPr>
-          <p:cNvPr id="132" name="Google Shape;132;p2:notes"/>
+          <p:cNvPr id="124" name="Google Shape;124;p8:notes"/>
           <p:cNvSpPr/>
           <p:nvPr>
             <p:ph idx="2" type="sldImg"/>
@@ -14710,16 +14592,23 @@
           <a:chExt cx="0" cy="0"/>
         </a:xfrm>
       </p:grpSpPr>
-      <p:sp>
-        <p:nvSpPr>
-          <p:cNvPr id="84" name="Google Shape;84;p8"/>
-          <p:cNvSpPr/>
+      <p:pic>
+        <p:nvPicPr>
+          <p:cNvPr id="84" name="Google Shape;84;p3"/>
+          <p:cNvPicPr preferRelativeResize="0"/>
           <p:nvPr/>
-        </p:nvSpPr>
+        </p:nvPicPr>
+        <p:blipFill rotWithShape="1">
+          <a:blip r:embed="rId3">
+            <a:alphaModFix/>
+          </a:blip>
+          <a:srcRect b="0" l="0" r="0" t="0"/>
+          <a:stretch/>
+        </p:blipFill>
         <p:spPr>
           <a:xfrm>
-            <a:off x="1934778" y="2017113"/>
-            <a:ext cx="7903044" cy="1754326"/>
+            <a:off x="1520640" y="0"/>
+            <a:ext cx="9150719" cy="6858000"/>
           </a:xfrm>
           <a:prstGeom prst="rect">
             <a:avLst/>
@@ -14729,188 +14618,16 @@
             <a:noFill/>
           </a:ln>
         </p:spPr>
-        <p:txBody>
-          <a:bodyPr anchorCtr="0" anchor="t" bIns="45700" lIns="91425" spcFirstLastPara="1" rIns="91425" wrap="square" tIns="45700">
-            <a:spAutoFit/>
-          </a:bodyPr>
-          <a:lstStyle/>
-          <a:p>
-            <a:pPr indent="0" lvl="0" marL="0" marR="0" rtl="0" algn="l">
-              <a:lnSpc>
-                <a:spcPct val="100000"/>
-              </a:lnSpc>
-              <a:spcBef>
-                <a:spcPts val="0"/>
-              </a:spcBef>
-              <a:spcAft>
-                <a:spcPts val="0"/>
-              </a:spcAft>
-              <a:buClr>
-                <a:srgbClr val="000000"/>
-              </a:buClr>
-              <a:buSzPts val="1800"/>
-              <a:buFont typeface="Arial"/>
-              <a:buNone/>
-            </a:pPr>
-            <a:r>
-              <a:rPr b="0" i="0" lang="en-US" sz="1800" u="sng" cap="none" strike="noStrike">
-                <a:solidFill>
-                  <a:schemeClr val="dk1"/>
-                </a:solidFill>
-                <a:latin typeface="Calibri"/>
-                <a:ea typeface="Calibri"/>
-                <a:cs typeface="Calibri"/>
-                <a:sym typeface="Calibri"/>
-              </a:rPr>
-              <a:t>Question. </a:t>
-            </a:r>
-            <a:r>
-              <a:rPr b="0" i="0" lang="en-US" sz="1800" u="none" cap="none" strike="noStrike">
-                <a:solidFill>
-                  <a:schemeClr val="dk1"/>
-                </a:solidFill>
-                <a:latin typeface="Calibri"/>
-                <a:ea typeface="Calibri"/>
-                <a:cs typeface="Calibri"/>
-                <a:sym typeface="Calibri"/>
-              </a:rPr>
-              <a:t>Is this class difficult or easy?</a:t>
-            </a:r>
-            <a:endParaRPr b="0" i="0" sz="1400" u="none" cap="none" strike="noStrike">
-              <a:solidFill>
-                <a:srgbClr val="000000"/>
-              </a:solidFill>
-              <a:latin typeface="Arial"/>
-              <a:ea typeface="Arial"/>
-              <a:cs typeface="Arial"/>
-              <a:sym typeface="Arial"/>
-            </a:endParaRPr>
-          </a:p>
-          <a:p>
-            <a:pPr indent="0" lvl="0" marL="0" marR="0" rtl="0" algn="l">
-              <a:lnSpc>
-                <a:spcPct val="100000"/>
-              </a:lnSpc>
-              <a:spcBef>
-                <a:spcPts val="0"/>
-              </a:spcBef>
-              <a:spcAft>
-                <a:spcPts val="0"/>
-              </a:spcAft>
-              <a:buClr>
-                <a:srgbClr val="000000"/>
-              </a:buClr>
-              <a:buSzPts val="1800"/>
-              <a:buFont typeface="Arial"/>
-              <a:buNone/>
-            </a:pPr>
-            <a:r>
-              <a:t/>
-            </a:r>
-            <a:endParaRPr b="0" i="0" sz="1800" u="none" cap="none" strike="noStrike">
-              <a:solidFill>
-                <a:schemeClr val="dk1"/>
-              </a:solidFill>
-              <a:latin typeface="Calibri"/>
-              <a:ea typeface="Calibri"/>
-              <a:cs typeface="Calibri"/>
-              <a:sym typeface="Calibri"/>
-            </a:endParaRPr>
-          </a:p>
-          <a:p>
-            <a:pPr indent="0" lvl="0" marL="0" marR="0" rtl="0" algn="l">
-              <a:lnSpc>
-                <a:spcPct val="100000"/>
-              </a:lnSpc>
-              <a:spcBef>
-                <a:spcPts val="0"/>
-              </a:spcBef>
-              <a:spcAft>
-                <a:spcPts val="0"/>
-              </a:spcAft>
-              <a:buClr>
-                <a:srgbClr val="000000"/>
-              </a:buClr>
-              <a:buSzPts val="1800"/>
-              <a:buFont typeface="Arial"/>
-              <a:buNone/>
-            </a:pPr>
-            <a:r>
-              <a:t/>
-            </a:r>
-            <a:endParaRPr b="0" i="0" sz="1800" u="none" cap="none" strike="noStrike">
-              <a:solidFill>
-                <a:schemeClr val="dk1"/>
-              </a:solidFill>
-              <a:latin typeface="Calibri"/>
-              <a:ea typeface="Calibri"/>
-              <a:cs typeface="Calibri"/>
-              <a:sym typeface="Calibri"/>
-            </a:endParaRPr>
-          </a:p>
-          <a:p>
-            <a:pPr indent="0" lvl="0" marL="0" marR="0" rtl="0" algn="l">
-              <a:lnSpc>
-                <a:spcPct val="100000"/>
-              </a:lnSpc>
-              <a:spcBef>
-                <a:spcPts val="0"/>
-              </a:spcBef>
-              <a:spcAft>
-                <a:spcPts val="0"/>
-              </a:spcAft>
-              <a:buClr>
-                <a:srgbClr val="000000"/>
-              </a:buClr>
-              <a:buSzPts val="1800"/>
-              <a:buFont typeface="Arial"/>
-              <a:buNone/>
-            </a:pPr>
-            <a:r>
-              <a:rPr b="0" i="0" lang="en-US" sz="1800" u="sng" cap="none" strike="noStrike">
-                <a:solidFill>
-                  <a:schemeClr val="dk1"/>
-                </a:solidFill>
-                <a:latin typeface="Calibri"/>
-                <a:ea typeface="Calibri"/>
-                <a:cs typeface="Calibri"/>
-                <a:sym typeface="Calibri"/>
-              </a:rPr>
-              <a:t>Answer. </a:t>
-            </a:r>
-            <a:r>
-              <a:rPr b="0" i="0" lang="en-US" sz="1800" u="none" cap="none" strike="noStrike">
-                <a:solidFill>
-                  <a:schemeClr val="dk1"/>
-                </a:solidFill>
-                <a:latin typeface="Calibri"/>
-                <a:ea typeface="Calibri"/>
-                <a:cs typeface="Calibri"/>
-                <a:sym typeface="Calibri"/>
-              </a:rPr>
-              <a:t>The class covers multiple topics. It is rewarding for a student to learn new material and be able to apply it. Six modules include over a thousand pages of course notes, quizzes, assignments, final exam, term project.</a:t>
-            </a:r>
-            <a:endParaRPr b="0" i="0" sz="1400" u="none" cap="none" strike="noStrike">
-              <a:solidFill>
-                <a:srgbClr val="000000"/>
-              </a:solidFill>
-              <a:latin typeface="Arial"/>
-              <a:ea typeface="Arial"/>
-              <a:cs typeface="Arial"/>
-              <a:sym typeface="Arial"/>
-            </a:endParaRPr>
-          </a:p>
-        </p:txBody>
-      </p:sp>
+      </p:pic>
       <p:grpSp>
         <p:nvGrpSpPr>
-          <p:cNvPr id="85" name="Google Shape;85;p8"/>
+          <p:cNvPr id="85" name="Google Shape;85;p3"/>
           <p:cNvGrpSpPr/>
           <p:nvPr/>
         </p:nvGrpSpPr>
         <p:grpSpPr>
           <a:xfrm>
-            <a:off x="174604" y="147180"/>
+            <a:off x="169800" y="91156"/>
             <a:ext cx="335559" cy="369332"/>
             <a:chOff x="369116" y="375299"/>
             <a:chExt cx="335559" cy="369332"/>
@@ -14918,7 +14635,7 @@
         </p:grpSpPr>
         <p:sp>
           <p:nvSpPr>
-            <p:cNvPr id="86" name="Google Shape;86;p8"/>
+            <p:cNvPr id="86" name="Google Shape;86;p3"/>
             <p:cNvSpPr/>
             <p:nvPr/>
           </p:nvSpPr>
@@ -14983,7 +14700,7 @@
         </p:sp>
         <p:sp>
           <p:nvSpPr>
-            <p:cNvPr id="87" name="Google Shape;87;p8"/>
+            <p:cNvPr id="87" name="Google Shape;87;p3"/>
             <p:cNvSpPr txBox="1"/>
             <p:nvPr/>
           </p:nvSpPr>
@@ -15033,7 +14750,7 @@
                   <a:cs typeface="Calibri"/>
                   <a:sym typeface="Calibri"/>
                 </a:rPr>
-                <a:t>6</a:t>
+                <a:t>1</a:t>
               </a:r>
               <a:endParaRPr b="0" i="0" sz="1400" u="none" cap="none" strike="noStrike">
                 <a:solidFill>
@@ -15048,41 +14765,16 @@
           </p:txBody>
         </p:sp>
       </p:grpSp>
-    </p:spTree>
-  </p:cSld>
-  <p:clrMapOvr>
-    <a:masterClrMapping/>
-  </p:clrMapOvr>
-</p:sld>
-</file>
-
-<file path=ppt/slides/slide2.xml><?xml version="1.0" encoding="utf-8"?>
-<p:sld xmlns:a="http://schemas.openxmlformats.org/drawingml/2006/main" xmlns:r="http://schemas.openxmlformats.org/officeDocument/2006/relationships" xmlns:mc="http://schemas.openxmlformats.org/markup-compatibility/2006" xmlns:mv="urn:schemas-microsoft-com:mac:vml" xmlns:p="http://schemas.openxmlformats.org/presentationml/2006/main" xmlns:c="http://schemas.openxmlformats.org/drawingml/2006/chart" xmlns:dgm="http://schemas.openxmlformats.org/drawingml/2006/diagram" xmlns:o="urn:schemas-microsoft-com:office:office" xmlns:v="urn:schemas-microsoft-com:vml" xmlns:pvml="urn:schemas-microsoft-com:office:powerpoint" xmlns:com="http://schemas.openxmlformats.org/drawingml/2006/compatibility" xmlns:p14="http://schemas.microsoft.com/office/powerpoint/2010/main" xmlns:p15="http://schemas.microsoft.com/office/powerpoint/2012/main" xmlns:ahyp="http://schemas.microsoft.com/office/drawing/2018/hyperlinkcolor">
-  <p:cSld>
-    <p:spTree>
-      <p:nvGrpSpPr>
-        <p:cNvPr id="91" name="Shape 91"/>
-        <p:cNvGrpSpPr/>
-        <p:nvPr/>
-      </p:nvGrpSpPr>
-      <p:grpSpPr>
-        <a:xfrm>
-          <a:off x="0" y="0"/>
-          <a:ext cx="0" cy="0"/>
-          <a:chOff x="0" y="0"/>
-          <a:chExt cx="0" cy="0"/>
-        </a:xfrm>
-      </p:grpSpPr>
       <p:sp>
         <p:nvSpPr>
-          <p:cNvPr id="92" name="Google Shape;92;p7"/>
+          <p:cNvPr id="88" name="Google Shape;88;p3"/>
           <p:cNvSpPr txBox="1"/>
           <p:nvPr/>
         </p:nvSpPr>
         <p:spPr>
           <a:xfrm>
-            <a:off x="1260094" y="1196436"/>
-            <a:ext cx="8413019" cy="2092881"/>
+            <a:off x="5647498" y="350375"/>
+            <a:ext cx="5784481" cy="923330"/>
           </a:xfrm>
           <a:prstGeom prst="rect">
             <a:avLst/>
@@ -15111,92 +14803,21 @@
               <a:buClr>
                 <a:srgbClr val="000000"/>
               </a:buClr>
-              <a:buSzPts val="2600"/>
+              <a:buSzPts val="1800"/>
               <a:buFont typeface="Arial"/>
               <a:buNone/>
             </a:pPr>
             <a:r>
-              <a:rPr b="0" i="0" lang="en-US" sz="2600" u="none" cap="none" strike="noStrike">
-                <a:solidFill>
-                  <a:srgbClr val="7F7F7F"/>
+              <a:rPr b="0" i="0" lang="en-US" sz="1800" u="none" cap="none" strike="noStrike">
+                <a:solidFill>
+                  <a:srgbClr val="2F5496"/>
                 </a:solidFill>
                 <a:latin typeface="Calibri"/>
                 <a:ea typeface="Calibri"/>
                 <a:cs typeface="Calibri"/>
                 <a:sym typeface="Calibri"/>
               </a:rPr>
-              <a:t>When defining personas for a project, we should do it in a most clear and unambiguous manner. Consider three options to define personas. </a:t>
-            </a:r>
-            <a:endParaRPr b="0" i="0" sz="1400" u="none" cap="none" strike="noStrike">
-              <a:solidFill>
-                <a:srgbClr val="000000"/>
-              </a:solidFill>
-              <a:latin typeface="Arial"/>
-              <a:ea typeface="Arial"/>
-              <a:cs typeface="Arial"/>
-              <a:sym typeface="Arial"/>
-            </a:endParaRPr>
-          </a:p>
-          <a:p>
-            <a:pPr indent="0" lvl="0" marL="0" marR="0" rtl="0" algn="l">
-              <a:lnSpc>
-                <a:spcPct val="100000"/>
-              </a:lnSpc>
-              <a:spcBef>
-                <a:spcPts val="0"/>
-              </a:spcBef>
-              <a:spcAft>
-                <a:spcPts val="0"/>
-              </a:spcAft>
-              <a:buClr>
-                <a:srgbClr val="000000"/>
-              </a:buClr>
-              <a:buSzPts val="2600"/>
-              <a:buFont typeface="Arial"/>
-              <a:buNone/>
-            </a:pPr>
-            <a:r>
-              <a:t/>
-            </a:r>
-            <a:endParaRPr b="0" i="0" sz="2600" u="none" cap="none" strike="noStrike">
-              <a:solidFill>
-                <a:srgbClr val="7F7F7F"/>
-              </a:solidFill>
-              <a:latin typeface="Calibri"/>
-              <a:ea typeface="Calibri"/>
-              <a:cs typeface="Calibri"/>
-              <a:sym typeface="Calibri"/>
-            </a:endParaRPr>
-          </a:p>
-          <a:p>
-            <a:pPr indent="0" lvl="0" marL="0" marR="0" rtl="0" algn="l">
-              <a:lnSpc>
-                <a:spcPct val="100000"/>
-              </a:lnSpc>
-              <a:spcBef>
-                <a:spcPts val="0"/>
-              </a:spcBef>
-              <a:spcAft>
-                <a:spcPts val="0"/>
-              </a:spcAft>
-              <a:buClr>
-                <a:srgbClr val="000000"/>
-              </a:buClr>
-              <a:buSzPts val="2600"/>
-              <a:buFont typeface="Arial"/>
-              <a:buNone/>
-            </a:pPr>
-            <a:r>
-              <a:rPr b="0" i="0" lang="en-US" sz="2600" u="none" cap="none" strike="noStrike">
-                <a:solidFill>
-                  <a:srgbClr val="7F7F7F"/>
-                </a:solidFill>
-                <a:latin typeface="Calibri"/>
-                <a:ea typeface="Calibri"/>
-                <a:cs typeface="Calibri"/>
-                <a:sym typeface="Calibri"/>
-              </a:rPr>
-              <a:t>Which one definition is ambiguous?</a:t>
+              <a:t>Taxonomy tree for the requirements space shows how various terms relate to each other. This in turn offers an insight into each term.</a:t>
             </a:r>
             <a:endParaRPr b="0" i="0" sz="1400" u="none" cap="none" strike="noStrike">
               <a:solidFill>
@@ -15210,23 +14831,41 @@
           </a:p>
         </p:txBody>
       </p:sp>
-      <p:pic>
-        <p:nvPicPr>
-          <p:cNvPr id="93" name="Google Shape;93;p7"/>
-          <p:cNvPicPr preferRelativeResize="0"/>
+    </p:spTree>
+  </p:cSld>
+  <p:clrMapOvr>
+    <a:masterClrMapping/>
+  </p:clrMapOvr>
+</p:sld>
+</file>
+
+<file path=ppt/slides/slide2.xml><?xml version="1.0" encoding="utf-8"?>
+<p:sld xmlns:a="http://schemas.openxmlformats.org/drawingml/2006/main" xmlns:r="http://schemas.openxmlformats.org/officeDocument/2006/relationships" xmlns:mc="http://schemas.openxmlformats.org/markup-compatibility/2006" xmlns:mv="urn:schemas-microsoft-com:mac:vml" xmlns:p="http://schemas.openxmlformats.org/presentationml/2006/main" xmlns:c="http://schemas.openxmlformats.org/drawingml/2006/chart" xmlns:dgm="http://schemas.openxmlformats.org/drawingml/2006/diagram" xmlns:o="urn:schemas-microsoft-com:office:office" xmlns:v="urn:schemas-microsoft-com:vml" xmlns:pvml="urn:schemas-microsoft-com:office:powerpoint" xmlns:com="http://schemas.openxmlformats.org/drawingml/2006/compatibility" xmlns:p14="http://schemas.microsoft.com/office/powerpoint/2010/main" xmlns:p15="http://schemas.microsoft.com/office/powerpoint/2012/main" xmlns:ahyp="http://schemas.microsoft.com/office/drawing/2018/hyperlinkcolor">
+  <p:cSld>
+    <p:spTree>
+      <p:nvGrpSpPr>
+        <p:cNvPr id="92" name="Shape 92"/>
+        <p:cNvGrpSpPr/>
+        <p:nvPr/>
+      </p:nvGrpSpPr>
+      <p:grpSpPr>
+        <a:xfrm>
+          <a:off x="0" y="0"/>
+          <a:ext cx="0" cy="0"/>
+          <a:chOff x="0" y="0"/>
+          <a:chExt cx="0" cy="0"/>
+        </a:xfrm>
+      </p:grpSpPr>
+      <p:sp>
+        <p:nvSpPr>
+          <p:cNvPr id="93" name="Google Shape;93;p4"/>
+          <p:cNvSpPr/>
           <p:nvPr/>
-        </p:nvPicPr>
-        <p:blipFill rotWithShape="1">
-          <a:blip r:embed="rId3">
-            <a:alphaModFix/>
-          </a:blip>
-          <a:srcRect b="0" l="0" r="0" t="0"/>
-          <a:stretch/>
-        </p:blipFill>
+        </p:nvSpPr>
         <p:spPr>
           <a:xfrm>
-            <a:off x="1260094" y="3634836"/>
-            <a:ext cx="8153400" cy="2880092"/>
+            <a:off x="3439886" y="1178580"/>
+            <a:ext cx="6096000" cy="3693319"/>
           </a:xfrm>
           <a:prstGeom prst="rect">
             <a:avLst/>
@@ -15236,16 +14875,542 @@
             <a:noFill/>
           </a:ln>
         </p:spPr>
-      </p:pic>
+        <p:txBody>
+          <a:bodyPr anchorCtr="0" anchor="t" bIns="45700" lIns="91425" spcFirstLastPara="1" rIns="91425" wrap="square" tIns="45700">
+            <a:spAutoFit/>
+          </a:bodyPr>
+          <a:lstStyle/>
+          <a:p>
+            <a:pPr indent="0" lvl="0" marL="0" marR="0" rtl="0" algn="l">
+              <a:lnSpc>
+                <a:spcPct val="100000"/>
+              </a:lnSpc>
+              <a:spcBef>
+                <a:spcPts val="0"/>
+              </a:spcBef>
+              <a:spcAft>
+                <a:spcPts val="0"/>
+              </a:spcAft>
+              <a:buClr>
+                <a:srgbClr val="000000"/>
+              </a:buClr>
+              <a:buSzPts val="1800"/>
+              <a:buFont typeface="Arial"/>
+              <a:buNone/>
+            </a:pPr>
+            <a:r>
+              <a:rPr b="0" i="0" lang="en-US" sz="1800" u="none" cap="none" strike="noStrike">
+                <a:solidFill>
+                  <a:srgbClr val="2F5496"/>
+                </a:solidFill>
+                <a:latin typeface="Calibri"/>
+                <a:ea typeface="Calibri"/>
+                <a:cs typeface="Calibri"/>
+                <a:sym typeface="Calibri"/>
+              </a:rPr>
+              <a:t>Attributes of a solid requirement are comprised below.</a:t>
+            </a:r>
+            <a:endParaRPr b="0" i="0" sz="1400" u="none" cap="none" strike="noStrike">
+              <a:solidFill>
+                <a:srgbClr val="000000"/>
+              </a:solidFill>
+              <a:latin typeface="Arial"/>
+              <a:ea typeface="Arial"/>
+              <a:cs typeface="Arial"/>
+              <a:sym typeface="Arial"/>
+            </a:endParaRPr>
+          </a:p>
+          <a:p>
+            <a:pPr indent="-233363" lvl="0" marL="466726" marR="0" rtl="0" algn="l">
+              <a:lnSpc>
+                <a:spcPct val="100000"/>
+              </a:lnSpc>
+              <a:spcBef>
+                <a:spcPts val="0"/>
+              </a:spcBef>
+              <a:spcAft>
+                <a:spcPts val="0"/>
+              </a:spcAft>
+              <a:buClr>
+                <a:srgbClr val="2F5496"/>
+              </a:buClr>
+              <a:buSzPts val="1800"/>
+              <a:buFont typeface="Calibri"/>
+              <a:buChar char="•"/>
+            </a:pPr>
+            <a:r>
+              <a:rPr b="0" i="0" lang="en-US" sz="1800" u="none" cap="none" strike="noStrike">
+                <a:solidFill>
+                  <a:srgbClr val="2F5496"/>
+                </a:solidFill>
+                <a:latin typeface="Calibri"/>
+                <a:ea typeface="Calibri"/>
+                <a:cs typeface="Calibri"/>
+                <a:sym typeface="Calibri"/>
+              </a:rPr>
+              <a:t>Unambiguous</a:t>
+            </a:r>
+            <a:endParaRPr b="0" i="0" sz="1400" u="none" cap="none" strike="noStrike">
+              <a:solidFill>
+                <a:srgbClr val="000000"/>
+              </a:solidFill>
+              <a:latin typeface="Arial"/>
+              <a:ea typeface="Arial"/>
+              <a:cs typeface="Arial"/>
+              <a:sym typeface="Arial"/>
+            </a:endParaRPr>
+          </a:p>
+          <a:p>
+            <a:pPr indent="-233363" lvl="0" marL="466726" marR="0" rtl="0" algn="l">
+              <a:lnSpc>
+                <a:spcPct val="100000"/>
+              </a:lnSpc>
+              <a:spcBef>
+                <a:spcPts val="0"/>
+              </a:spcBef>
+              <a:spcAft>
+                <a:spcPts val="0"/>
+              </a:spcAft>
+              <a:buClr>
+                <a:srgbClr val="2F5496"/>
+              </a:buClr>
+              <a:buSzPts val="1800"/>
+              <a:buFont typeface="Calibri"/>
+              <a:buChar char="•"/>
+            </a:pPr>
+            <a:r>
+              <a:rPr b="0" i="0" lang="en-US" sz="1800" u="none" cap="none" strike="noStrike">
+                <a:solidFill>
+                  <a:srgbClr val="2F5496"/>
+                </a:solidFill>
+                <a:latin typeface="Calibri"/>
+                <a:ea typeface="Calibri"/>
+                <a:cs typeface="Calibri"/>
+                <a:sym typeface="Calibri"/>
+              </a:rPr>
+              <a:t> Non-overlapping</a:t>
+            </a:r>
+            <a:endParaRPr b="0" i="0" sz="1400" u="none" cap="none" strike="noStrike">
+              <a:solidFill>
+                <a:srgbClr val="000000"/>
+              </a:solidFill>
+              <a:latin typeface="Arial"/>
+              <a:ea typeface="Arial"/>
+              <a:cs typeface="Arial"/>
+              <a:sym typeface="Arial"/>
+            </a:endParaRPr>
+          </a:p>
+          <a:p>
+            <a:pPr indent="-233363" lvl="0" marL="466726" marR="0" rtl="0" algn="l">
+              <a:lnSpc>
+                <a:spcPct val="100000"/>
+              </a:lnSpc>
+              <a:spcBef>
+                <a:spcPts val="0"/>
+              </a:spcBef>
+              <a:spcAft>
+                <a:spcPts val="0"/>
+              </a:spcAft>
+              <a:buClr>
+                <a:srgbClr val="2F5496"/>
+              </a:buClr>
+              <a:buSzPts val="1800"/>
+              <a:buFont typeface="Calibri"/>
+              <a:buChar char="•"/>
+            </a:pPr>
+            <a:r>
+              <a:rPr b="0" i="0" lang="en-US" sz="1800" u="none" cap="none" strike="noStrike">
+                <a:solidFill>
+                  <a:srgbClr val="2F5496"/>
+                </a:solidFill>
+                <a:latin typeface="Calibri"/>
+                <a:ea typeface="Calibri"/>
+                <a:cs typeface="Calibri"/>
+                <a:sym typeface="Calibri"/>
+              </a:rPr>
+              <a:t> Complete</a:t>
+            </a:r>
+            <a:endParaRPr b="0" i="0" sz="1400" u="none" cap="none" strike="noStrike">
+              <a:solidFill>
+                <a:srgbClr val="000000"/>
+              </a:solidFill>
+              <a:latin typeface="Arial"/>
+              <a:ea typeface="Arial"/>
+              <a:cs typeface="Arial"/>
+              <a:sym typeface="Arial"/>
+            </a:endParaRPr>
+          </a:p>
+          <a:p>
+            <a:pPr indent="-233363" lvl="0" marL="466726" marR="0" rtl="0" algn="l">
+              <a:lnSpc>
+                <a:spcPct val="100000"/>
+              </a:lnSpc>
+              <a:spcBef>
+                <a:spcPts val="0"/>
+              </a:spcBef>
+              <a:spcAft>
+                <a:spcPts val="0"/>
+              </a:spcAft>
+              <a:buClr>
+                <a:srgbClr val="2F5496"/>
+              </a:buClr>
+              <a:buSzPts val="1800"/>
+              <a:buFont typeface="Calibri"/>
+              <a:buChar char="•"/>
+            </a:pPr>
+            <a:r>
+              <a:rPr b="0" i="0" lang="en-US" sz="1800" u="none" cap="none" strike="noStrike">
+                <a:solidFill>
+                  <a:srgbClr val="2F5496"/>
+                </a:solidFill>
+                <a:latin typeface="Calibri"/>
+                <a:ea typeface="Calibri"/>
+                <a:cs typeface="Calibri"/>
+                <a:sym typeface="Calibri"/>
+              </a:rPr>
+              <a:t> Testable</a:t>
+            </a:r>
+            <a:endParaRPr b="0" i="0" sz="1400" u="none" cap="none" strike="noStrike">
+              <a:solidFill>
+                <a:srgbClr val="000000"/>
+              </a:solidFill>
+              <a:latin typeface="Arial"/>
+              <a:ea typeface="Arial"/>
+              <a:cs typeface="Arial"/>
+              <a:sym typeface="Arial"/>
+            </a:endParaRPr>
+          </a:p>
+          <a:p>
+            <a:pPr indent="-233363" lvl="0" marL="466726" marR="0" rtl="0" algn="l">
+              <a:lnSpc>
+                <a:spcPct val="100000"/>
+              </a:lnSpc>
+              <a:spcBef>
+                <a:spcPts val="0"/>
+              </a:spcBef>
+              <a:spcAft>
+                <a:spcPts val="0"/>
+              </a:spcAft>
+              <a:buClr>
+                <a:srgbClr val="2F5496"/>
+              </a:buClr>
+              <a:buSzPts val="1800"/>
+              <a:buFont typeface="Calibri"/>
+              <a:buChar char="•"/>
+            </a:pPr>
+            <a:r>
+              <a:rPr b="0" i="0" lang="en-US" sz="1800" u="none" cap="none" strike="noStrike">
+                <a:solidFill>
+                  <a:srgbClr val="2F5496"/>
+                </a:solidFill>
+                <a:latin typeface="Calibri"/>
+                <a:ea typeface="Calibri"/>
+                <a:cs typeface="Calibri"/>
+                <a:sym typeface="Calibri"/>
+              </a:rPr>
+              <a:t> Clearly stated</a:t>
+            </a:r>
+            <a:endParaRPr b="0" i="0" sz="1400" u="none" cap="none" strike="noStrike">
+              <a:solidFill>
+                <a:srgbClr val="000000"/>
+              </a:solidFill>
+              <a:latin typeface="Arial"/>
+              <a:ea typeface="Arial"/>
+              <a:cs typeface="Arial"/>
+              <a:sym typeface="Arial"/>
+            </a:endParaRPr>
+          </a:p>
+          <a:p>
+            <a:pPr indent="-233363" lvl="0" marL="466726" marR="0" rtl="0" algn="l">
+              <a:lnSpc>
+                <a:spcPct val="100000"/>
+              </a:lnSpc>
+              <a:spcBef>
+                <a:spcPts val="0"/>
+              </a:spcBef>
+              <a:spcAft>
+                <a:spcPts val="0"/>
+              </a:spcAft>
+              <a:buClr>
+                <a:srgbClr val="2F5496"/>
+              </a:buClr>
+              <a:buSzPts val="1800"/>
+              <a:buFont typeface="Calibri"/>
+              <a:buChar char="•"/>
+            </a:pPr>
+            <a:r>
+              <a:rPr b="0" i="0" lang="en-US" sz="1800" u="none" cap="none" strike="noStrike">
+                <a:solidFill>
+                  <a:srgbClr val="2F5496"/>
+                </a:solidFill>
+                <a:latin typeface="Calibri"/>
+                <a:ea typeface="Calibri"/>
+                <a:cs typeface="Calibri"/>
+                <a:sym typeface="Calibri"/>
+              </a:rPr>
+              <a:t> Consistent</a:t>
+            </a:r>
+            <a:endParaRPr b="0" i="0" sz="1400" u="none" cap="none" strike="noStrike">
+              <a:solidFill>
+                <a:srgbClr val="000000"/>
+              </a:solidFill>
+              <a:latin typeface="Arial"/>
+              <a:ea typeface="Arial"/>
+              <a:cs typeface="Arial"/>
+              <a:sym typeface="Arial"/>
+            </a:endParaRPr>
+          </a:p>
+          <a:p>
+            <a:pPr indent="-233363" lvl="0" marL="466726" marR="0" rtl="0" algn="l">
+              <a:lnSpc>
+                <a:spcPct val="100000"/>
+              </a:lnSpc>
+              <a:spcBef>
+                <a:spcPts val="0"/>
+              </a:spcBef>
+              <a:spcAft>
+                <a:spcPts val="0"/>
+              </a:spcAft>
+              <a:buClr>
+                <a:srgbClr val="2F5496"/>
+              </a:buClr>
+              <a:buSzPts val="1800"/>
+              <a:buFont typeface="Calibri"/>
+              <a:buChar char="•"/>
+            </a:pPr>
+            <a:r>
+              <a:rPr b="0" i="0" lang="en-US" sz="1800" u="none" cap="none" strike="noStrike">
+                <a:solidFill>
+                  <a:srgbClr val="2F5496"/>
+                </a:solidFill>
+                <a:latin typeface="Calibri"/>
+                <a:ea typeface="Calibri"/>
+                <a:cs typeface="Calibri"/>
+                <a:sym typeface="Calibri"/>
+              </a:rPr>
+              <a:t> Correct</a:t>
+            </a:r>
+            <a:endParaRPr b="0" i="0" sz="1400" u="none" cap="none" strike="noStrike">
+              <a:solidFill>
+                <a:srgbClr val="000000"/>
+              </a:solidFill>
+              <a:latin typeface="Arial"/>
+              <a:ea typeface="Arial"/>
+              <a:cs typeface="Arial"/>
+              <a:sym typeface="Arial"/>
+            </a:endParaRPr>
+          </a:p>
+          <a:p>
+            <a:pPr indent="-233363" lvl="0" marL="466726" marR="0" rtl="0" algn="l">
+              <a:lnSpc>
+                <a:spcPct val="100000"/>
+              </a:lnSpc>
+              <a:spcBef>
+                <a:spcPts val="0"/>
+              </a:spcBef>
+              <a:spcAft>
+                <a:spcPts val="0"/>
+              </a:spcAft>
+              <a:buClr>
+                <a:srgbClr val="2F5496"/>
+              </a:buClr>
+              <a:buSzPts val="1800"/>
+              <a:buFont typeface="Calibri"/>
+              <a:buChar char="•"/>
+            </a:pPr>
+            <a:r>
+              <a:rPr b="0" i="0" lang="en-US" sz="1800" u="none" cap="none" strike="noStrike">
+                <a:solidFill>
+                  <a:srgbClr val="2F5496"/>
+                </a:solidFill>
+                <a:latin typeface="Calibri"/>
+                <a:ea typeface="Calibri"/>
+                <a:cs typeface="Calibri"/>
+                <a:sym typeface="Calibri"/>
+              </a:rPr>
+              <a:t> Modifiable</a:t>
+            </a:r>
+            <a:endParaRPr b="0" i="0" sz="1400" u="none" cap="none" strike="noStrike">
+              <a:solidFill>
+                <a:srgbClr val="000000"/>
+              </a:solidFill>
+              <a:latin typeface="Arial"/>
+              <a:ea typeface="Arial"/>
+              <a:cs typeface="Arial"/>
+              <a:sym typeface="Arial"/>
+            </a:endParaRPr>
+          </a:p>
+          <a:p>
+            <a:pPr indent="-233363" lvl="0" marL="466726" marR="0" rtl="0" algn="l">
+              <a:lnSpc>
+                <a:spcPct val="100000"/>
+              </a:lnSpc>
+              <a:spcBef>
+                <a:spcPts val="0"/>
+              </a:spcBef>
+              <a:spcAft>
+                <a:spcPts val="0"/>
+              </a:spcAft>
+              <a:buClr>
+                <a:srgbClr val="2F5496"/>
+              </a:buClr>
+              <a:buSzPts val="1800"/>
+              <a:buFont typeface="Calibri"/>
+              <a:buChar char="•"/>
+            </a:pPr>
+            <a:r>
+              <a:rPr b="0" i="0" lang="en-US" sz="1800" u="none" cap="none" strike="noStrike">
+                <a:solidFill>
+                  <a:srgbClr val="2F5496"/>
+                </a:solidFill>
+                <a:latin typeface="Calibri"/>
+                <a:ea typeface="Calibri"/>
+                <a:cs typeface="Calibri"/>
+                <a:sym typeface="Calibri"/>
+              </a:rPr>
+              <a:t> Prioritized</a:t>
+            </a:r>
+            <a:endParaRPr b="0" i="0" sz="1400" u="none" cap="none" strike="noStrike">
+              <a:solidFill>
+                <a:srgbClr val="000000"/>
+              </a:solidFill>
+              <a:latin typeface="Arial"/>
+              <a:ea typeface="Arial"/>
+              <a:cs typeface="Arial"/>
+              <a:sym typeface="Arial"/>
+            </a:endParaRPr>
+          </a:p>
+          <a:p>
+            <a:pPr indent="-233363" lvl="0" marL="466726" marR="0" rtl="0" algn="l">
+              <a:lnSpc>
+                <a:spcPct val="100000"/>
+              </a:lnSpc>
+              <a:spcBef>
+                <a:spcPts val="0"/>
+              </a:spcBef>
+              <a:spcAft>
+                <a:spcPts val="0"/>
+              </a:spcAft>
+              <a:buClr>
+                <a:srgbClr val="2F5496"/>
+              </a:buClr>
+              <a:buSzPts val="1800"/>
+              <a:buFont typeface="Calibri"/>
+              <a:buChar char="•"/>
+            </a:pPr>
+            <a:r>
+              <a:rPr b="0" i="0" lang="en-US" sz="1800" u="none" cap="none" strike="noStrike">
+                <a:solidFill>
+                  <a:srgbClr val="2F5496"/>
+                </a:solidFill>
+                <a:latin typeface="Calibri"/>
+                <a:ea typeface="Calibri"/>
+                <a:cs typeface="Calibri"/>
+                <a:sym typeface="Calibri"/>
+              </a:rPr>
+              <a:t> Traceable &amp; Traced</a:t>
+            </a:r>
+            <a:endParaRPr b="0" i="0" sz="1400" u="none" cap="none" strike="noStrike">
+              <a:solidFill>
+                <a:srgbClr val="000000"/>
+              </a:solidFill>
+              <a:latin typeface="Arial"/>
+              <a:ea typeface="Arial"/>
+              <a:cs typeface="Arial"/>
+              <a:sym typeface="Arial"/>
+            </a:endParaRPr>
+          </a:p>
+          <a:p>
+            <a:pPr indent="-233363" lvl="0" marL="466726" marR="0" rtl="0" algn="l">
+              <a:lnSpc>
+                <a:spcPct val="100000"/>
+              </a:lnSpc>
+              <a:spcBef>
+                <a:spcPts val="0"/>
+              </a:spcBef>
+              <a:spcAft>
+                <a:spcPts val="0"/>
+              </a:spcAft>
+              <a:buClr>
+                <a:srgbClr val="2F5496"/>
+              </a:buClr>
+              <a:buSzPts val="1800"/>
+              <a:buFont typeface="Calibri"/>
+              <a:buChar char="•"/>
+            </a:pPr>
+            <a:r>
+              <a:rPr b="0" i="0" lang="en-US" sz="1800" u="none" cap="none" strike="noStrike">
+                <a:solidFill>
+                  <a:srgbClr val="2F5496"/>
+                </a:solidFill>
+                <a:latin typeface="Calibri"/>
+                <a:ea typeface="Calibri"/>
+                <a:cs typeface="Calibri"/>
+                <a:sym typeface="Calibri"/>
+              </a:rPr>
+              <a:t> Uniquely identified</a:t>
+            </a:r>
+            <a:endParaRPr b="0" i="0" sz="1400" u="none" cap="none" strike="noStrike">
+              <a:solidFill>
+                <a:srgbClr val="000000"/>
+              </a:solidFill>
+              <a:latin typeface="Arial"/>
+              <a:ea typeface="Arial"/>
+              <a:cs typeface="Arial"/>
+              <a:sym typeface="Arial"/>
+            </a:endParaRPr>
+          </a:p>
+          <a:p>
+            <a:pPr indent="-233363" lvl="0" marL="466726" marR="0" rtl="0" algn="l">
+              <a:lnSpc>
+                <a:spcPct val="100000"/>
+              </a:lnSpc>
+              <a:spcBef>
+                <a:spcPts val="0"/>
+              </a:spcBef>
+              <a:spcAft>
+                <a:spcPts val="0"/>
+              </a:spcAft>
+              <a:buClr>
+                <a:srgbClr val="2F5496"/>
+              </a:buClr>
+              <a:buSzPts val="1800"/>
+              <a:buFont typeface="Calibri"/>
+              <a:buChar char="•"/>
+            </a:pPr>
+            <a:r>
+              <a:rPr b="0" i="0" lang="en-US" sz="1800" u="none" cap="none" strike="noStrike">
+                <a:solidFill>
+                  <a:srgbClr val="2F5496"/>
+                </a:solidFill>
+                <a:latin typeface="Calibri"/>
+                <a:ea typeface="Calibri"/>
+                <a:cs typeface="Calibri"/>
+                <a:sym typeface="Calibri"/>
+              </a:rPr>
+              <a:t> Design-Free</a:t>
+            </a:r>
+            <a:endParaRPr b="0" i="0" sz="1400" u="none" cap="none" strike="noStrike">
+              <a:solidFill>
+                <a:srgbClr val="000000"/>
+              </a:solidFill>
+              <a:latin typeface="Arial"/>
+              <a:ea typeface="Arial"/>
+              <a:cs typeface="Arial"/>
+              <a:sym typeface="Arial"/>
+            </a:endParaRPr>
+          </a:p>
+        </p:txBody>
+      </p:sp>
       <p:grpSp>
         <p:nvGrpSpPr>
-          <p:cNvPr id="94" name="Google Shape;94;p7"/>
+          <p:cNvPr id="94" name="Google Shape;94;p4"/>
           <p:cNvGrpSpPr/>
           <p:nvPr/>
         </p:nvGrpSpPr>
         <p:grpSpPr>
           <a:xfrm>
-            <a:off x="143745" y="98148"/>
+            <a:off x="164814" y="92935"/>
             <a:ext cx="335559" cy="369332"/>
             <a:chOff x="369116" y="375299"/>
             <a:chExt cx="335559" cy="369332"/>
@@ -15253,7 +15418,7 @@
         </p:grpSpPr>
         <p:sp>
           <p:nvSpPr>
-            <p:cNvPr id="95" name="Google Shape;95;p7"/>
+            <p:cNvPr id="95" name="Google Shape;95;p4"/>
             <p:cNvSpPr/>
             <p:nvPr/>
           </p:nvSpPr>
@@ -15318,7 +15483,738 @@
         </p:sp>
         <p:sp>
           <p:nvSpPr>
-            <p:cNvPr id="96" name="Google Shape;96;p7"/>
+            <p:cNvPr id="96" name="Google Shape;96;p4"/>
+            <p:cNvSpPr txBox="1"/>
+            <p:nvPr/>
+          </p:nvSpPr>
+          <p:spPr>
+            <a:xfrm>
+              <a:off x="394601" y="375299"/>
+              <a:ext cx="301686" cy="369332"/>
+            </a:xfrm>
+            <a:prstGeom prst="rect">
+              <a:avLst/>
+            </a:prstGeom>
+            <a:noFill/>
+            <a:ln>
+              <a:noFill/>
+            </a:ln>
+          </p:spPr>
+          <p:txBody>
+            <a:bodyPr anchorCtr="0" anchor="t" bIns="45700" lIns="91425" spcFirstLastPara="1" rIns="91425" wrap="square" tIns="45700">
+              <a:spAutoFit/>
+            </a:bodyPr>
+            <a:lstStyle/>
+            <a:p>
+              <a:pPr indent="0" lvl="0" marL="0" marR="0" rtl="0" algn="l">
+                <a:lnSpc>
+                  <a:spcPct val="100000"/>
+                </a:lnSpc>
+                <a:spcBef>
+                  <a:spcPts val="0"/>
+                </a:spcBef>
+                <a:spcAft>
+                  <a:spcPts val="0"/>
+                </a:spcAft>
+                <a:buClr>
+                  <a:srgbClr val="000000"/>
+                </a:buClr>
+                <a:buSzPts val="1800"/>
+                <a:buFont typeface="Arial"/>
+                <a:buNone/>
+              </a:pPr>
+              <a:r>
+                <a:rPr b="0" i="0" lang="en-US" sz="1800" u="none" cap="none" strike="noStrike">
+                  <a:solidFill>
+                    <a:schemeClr val="dk1"/>
+                  </a:solidFill>
+                  <a:latin typeface="Calibri"/>
+                  <a:ea typeface="Calibri"/>
+                  <a:cs typeface="Calibri"/>
+                  <a:sym typeface="Calibri"/>
+                </a:rPr>
+                <a:t>2</a:t>
+              </a:r>
+              <a:endParaRPr b="0" i="0" sz="1400" u="none" cap="none" strike="noStrike">
+                <a:solidFill>
+                  <a:srgbClr val="000000"/>
+                </a:solidFill>
+                <a:latin typeface="Arial"/>
+                <a:ea typeface="Arial"/>
+                <a:cs typeface="Arial"/>
+                <a:sym typeface="Arial"/>
+              </a:endParaRPr>
+            </a:p>
+          </p:txBody>
+        </p:sp>
+      </p:grpSp>
+    </p:spTree>
+  </p:cSld>
+  <p:clrMapOvr>
+    <a:masterClrMapping/>
+  </p:clrMapOvr>
+</p:sld>
+</file>
+
+<file path=ppt/slides/slide3.xml><?xml version="1.0" encoding="utf-8"?>
+<p:sld xmlns:a="http://schemas.openxmlformats.org/drawingml/2006/main" xmlns:r="http://schemas.openxmlformats.org/officeDocument/2006/relationships" xmlns:mc="http://schemas.openxmlformats.org/markup-compatibility/2006" xmlns:mv="urn:schemas-microsoft-com:mac:vml" xmlns:p="http://schemas.openxmlformats.org/presentationml/2006/main" xmlns:c="http://schemas.openxmlformats.org/drawingml/2006/chart" xmlns:dgm="http://schemas.openxmlformats.org/drawingml/2006/diagram" xmlns:o="urn:schemas-microsoft-com:office:office" xmlns:v="urn:schemas-microsoft-com:vml" xmlns:pvml="urn:schemas-microsoft-com:office:powerpoint" xmlns:com="http://schemas.openxmlformats.org/drawingml/2006/compatibility" xmlns:p14="http://schemas.microsoft.com/office/powerpoint/2010/main" xmlns:p15="http://schemas.microsoft.com/office/powerpoint/2012/main" xmlns:ahyp="http://schemas.microsoft.com/office/drawing/2018/hyperlinkcolor">
+  <p:cSld>
+    <p:spTree>
+      <p:nvGrpSpPr>
+        <p:cNvPr id="100" name="Shape 100"/>
+        <p:cNvGrpSpPr/>
+        <p:nvPr/>
+      </p:nvGrpSpPr>
+      <p:grpSpPr>
+        <a:xfrm>
+          <a:off x="0" y="0"/>
+          <a:ext cx="0" cy="0"/>
+          <a:chOff x="0" y="0"/>
+          <a:chExt cx="0" cy="0"/>
+        </a:xfrm>
+      </p:grpSpPr>
+      <p:pic>
+        <p:nvPicPr>
+          <p:cNvPr id="101" name="Google Shape;101;p5"/>
+          <p:cNvPicPr preferRelativeResize="0"/>
+          <p:nvPr/>
+        </p:nvPicPr>
+        <p:blipFill rotWithShape="1">
+          <a:blip r:embed="rId3">
+            <a:alphaModFix/>
+          </a:blip>
+          <a:srcRect b="0" l="0" r="0" t="0"/>
+          <a:stretch/>
+        </p:blipFill>
+        <p:spPr>
+          <a:xfrm>
+            <a:off x="3205767" y="2125401"/>
+            <a:ext cx="5780465" cy="2607197"/>
+          </a:xfrm>
+          <a:prstGeom prst="rect">
+            <a:avLst/>
+          </a:prstGeom>
+          <a:noFill/>
+          <a:ln>
+            <a:noFill/>
+          </a:ln>
+        </p:spPr>
+      </p:pic>
+      <p:grpSp>
+        <p:nvGrpSpPr>
+          <p:cNvPr id="102" name="Google Shape;102;p5"/>
+          <p:cNvGrpSpPr/>
+          <p:nvPr/>
+        </p:nvGrpSpPr>
+        <p:grpSpPr>
+          <a:xfrm>
+            <a:off x="153605" y="145106"/>
+            <a:ext cx="335559" cy="369332"/>
+            <a:chOff x="369116" y="375299"/>
+            <a:chExt cx="335559" cy="369332"/>
+          </a:xfrm>
+        </p:grpSpPr>
+        <p:sp>
+          <p:nvSpPr>
+            <p:cNvPr id="103" name="Google Shape;103;p5"/>
+            <p:cNvSpPr/>
+            <p:nvPr/>
+          </p:nvSpPr>
+          <p:spPr>
+            <a:xfrm>
+              <a:off x="369116" y="411061"/>
+              <a:ext cx="335559" cy="297809"/>
+            </a:xfrm>
+            <a:prstGeom prst="ellipse">
+              <a:avLst/>
+            </a:prstGeom>
+            <a:solidFill>
+              <a:schemeClr val="lt1"/>
+            </a:solidFill>
+            <a:ln cap="flat" cmpd="sng" w="12700">
+              <a:solidFill>
+                <a:srgbClr val="31538F"/>
+              </a:solidFill>
+              <a:prstDash val="solid"/>
+              <a:miter lim="800000"/>
+              <a:headEnd len="sm" w="sm" type="none"/>
+              <a:tailEnd len="sm" w="sm" type="none"/>
+            </a:ln>
+          </p:spPr>
+          <p:txBody>
+            <a:bodyPr anchorCtr="0" anchor="ctr" bIns="45700" lIns="91425" spcFirstLastPara="1" rIns="91425" wrap="square" tIns="45700">
+              <a:noAutofit/>
+            </a:bodyPr>
+            <a:lstStyle/>
+            <a:p>
+              <a:pPr indent="0" lvl="0" marL="0" marR="0" rtl="0" algn="ctr">
+                <a:lnSpc>
+                  <a:spcPct val="100000"/>
+                </a:lnSpc>
+                <a:spcBef>
+                  <a:spcPts val="0"/>
+                </a:spcBef>
+                <a:spcAft>
+                  <a:spcPts val="0"/>
+                </a:spcAft>
+                <a:buClr>
+                  <a:srgbClr val="000000"/>
+                </a:buClr>
+                <a:buSzPts val="1800"/>
+                <a:buFont typeface="Arial"/>
+                <a:buNone/>
+              </a:pPr>
+              <a:r>
+                <a:t/>
+              </a:r>
+              <a:endParaRPr b="0" i="0" sz="1800" u="none" cap="none" strike="noStrike">
+                <a:solidFill>
+                  <a:schemeClr val="lt1"/>
+                </a:solidFill>
+                <a:latin typeface="Calibri"/>
+                <a:ea typeface="Calibri"/>
+                <a:cs typeface="Calibri"/>
+                <a:sym typeface="Calibri"/>
+              </a:endParaRPr>
+            </a:p>
+          </p:txBody>
+        </p:sp>
+        <p:sp>
+          <p:nvSpPr>
+            <p:cNvPr id="104" name="Google Shape;104;p5"/>
+            <p:cNvSpPr txBox="1"/>
+            <p:nvPr/>
+          </p:nvSpPr>
+          <p:spPr>
+            <a:xfrm>
+              <a:off x="394601" y="375299"/>
+              <a:ext cx="301686" cy="369332"/>
+            </a:xfrm>
+            <a:prstGeom prst="rect">
+              <a:avLst/>
+            </a:prstGeom>
+            <a:noFill/>
+            <a:ln>
+              <a:noFill/>
+            </a:ln>
+          </p:spPr>
+          <p:txBody>
+            <a:bodyPr anchorCtr="0" anchor="t" bIns="45700" lIns="91425" spcFirstLastPara="1" rIns="91425" wrap="square" tIns="45700">
+              <a:spAutoFit/>
+            </a:bodyPr>
+            <a:lstStyle/>
+            <a:p>
+              <a:pPr indent="0" lvl="0" marL="0" marR="0" rtl="0" algn="l">
+                <a:lnSpc>
+                  <a:spcPct val="100000"/>
+                </a:lnSpc>
+                <a:spcBef>
+                  <a:spcPts val="0"/>
+                </a:spcBef>
+                <a:spcAft>
+                  <a:spcPts val="0"/>
+                </a:spcAft>
+                <a:buClr>
+                  <a:srgbClr val="000000"/>
+                </a:buClr>
+                <a:buSzPts val="1800"/>
+                <a:buFont typeface="Arial"/>
+                <a:buNone/>
+              </a:pPr>
+              <a:r>
+                <a:rPr b="0" i="0" lang="en-US" sz="1800" u="none" cap="none" strike="noStrike">
+                  <a:solidFill>
+                    <a:schemeClr val="dk1"/>
+                  </a:solidFill>
+                  <a:latin typeface="Calibri"/>
+                  <a:ea typeface="Calibri"/>
+                  <a:cs typeface="Calibri"/>
+                  <a:sym typeface="Calibri"/>
+                </a:rPr>
+                <a:t>3</a:t>
+              </a:r>
+              <a:endParaRPr b="0" i="0" sz="1400" u="none" cap="none" strike="noStrike">
+                <a:solidFill>
+                  <a:srgbClr val="000000"/>
+                </a:solidFill>
+                <a:latin typeface="Arial"/>
+                <a:ea typeface="Arial"/>
+                <a:cs typeface="Arial"/>
+                <a:sym typeface="Arial"/>
+              </a:endParaRPr>
+            </a:p>
+          </p:txBody>
+        </p:sp>
+      </p:grpSp>
+    </p:spTree>
+  </p:cSld>
+  <p:clrMapOvr>
+    <a:masterClrMapping/>
+  </p:clrMapOvr>
+</p:sld>
+</file>
+
+<file path=ppt/slides/slide4.xml><?xml version="1.0" encoding="utf-8"?>
+<p:sld xmlns:a="http://schemas.openxmlformats.org/drawingml/2006/main" xmlns:r="http://schemas.openxmlformats.org/officeDocument/2006/relationships" xmlns:mc="http://schemas.openxmlformats.org/markup-compatibility/2006" xmlns:mv="urn:schemas-microsoft-com:mac:vml" xmlns:p="http://schemas.openxmlformats.org/presentationml/2006/main" xmlns:c="http://schemas.openxmlformats.org/drawingml/2006/chart" xmlns:dgm="http://schemas.openxmlformats.org/drawingml/2006/diagram" xmlns:o="urn:schemas-microsoft-com:office:office" xmlns:v="urn:schemas-microsoft-com:vml" xmlns:pvml="urn:schemas-microsoft-com:office:powerpoint" xmlns:com="http://schemas.openxmlformats.org/drawingml/2006/compatibility" xmlns:p14="http://schemas.microsoft.com/office/powerpoint/2010/main" xmlns:p15="http://schemas.microsoft.com/office/powerpoint/2012/main" xmlns:ahyp="http://schemas.microsoft.com/office/drawing/2018/hyperlinkcolor">
+  <p:cSld>
+    <p:spTree>
+      <p:nvGrpSpPr>
+        <p:cNvPr id="108" name="Shape 108"/>
+        <p:cNvGrpSpPr/>
+        <p:nvPr/>
+      </p:nvGrpSpPr>
+      <p:grpSpPr>
+        <a:xfrm>
+          <a:off x="0" y="0"/>
+          <a:ext cx="0" cy="0"/>
+          <a:chOff x="0" y="0"/>
+          <a:chExt cx="0" cy="0"/>
+        </a:xfrm>
+      </p:grpSpPr>
+      <p:pic>
+        <p:nvPicPr>
+          <p:cNvPr id="109" name="Google Shape;109;p6"/>
+          <p:cNvPicPr preferRelativeResize="0"/>
+          <p:nvPr/>
+        </p:nvPicPr>
+        <p:blipFill rotWithShape="1">
+          <a:blip r:embed="rId3">
+            <a:alphaModFix/>
+          </a:blip>
+          <a:srcRect b="0" l="0" r="0" t="0"/>
+          <a:stretch/>
+        </p:blipFill>
+        <p:spPr>
+          <a:xfrm>
+            <a:off x="3034313" y="2125401"/>
+            <a:ext cx="6123374" cy="2607197"/>
+          </a:xfrm>
+          <a:prstGeom prst="rect">
+            <a:avLst/>
+          </a:prstGeom>
+          <a:noFill/>
+          <a:ln>
+            <a:noFill/>
+          </a:ln>
+        </p:spPr>
+      </p:pic>
+      <p:grpSp>
+        <p:nvGrpSpPr>
+          <p:cNvPr id="110" name="Google Shape;110;p6"/>
+          <p:cNvGrpSpPr/>
+          <p:nvPr/>
+        </p:nvGrpSpPr>
+        <p:grpSpPr>
+          <a:xfrm>
+            <a:off x="220174" y="168646"/>
+            <a:ext cx="335559" cy="369332"/>
+            <a:chOff x="369116" y="375299"/>
+            <a:chExt cx="335559" cy="369332"/>
+          </a:xfrm>
+        </p:grpSpPr>
+        <p:sp>
+          <p:nvSpPr>
+            <p:cNvPr id="111" name="Google Shape;111;p6"/>
+            <p:cNvSpPr/>
+            <p:nvPr/>
+          </p:nvSpPr>
+          <p:spPr>
+            <a:xfrm>
+              <a:off x="369116" y="411061"/>
+              <a:ext cx="335559" cy="297809"/>
+            </a:xfrm>
+            <a:prstGeom prst="ellipse">
+              <a:avLst/>
+            </a:prstGeom>
+            <a:solidFill>
+              <a:schemeClr val="lt1"/>
+            </a:solidFill>
+            <a:ln cap="flat" cmpd="sng" w="12700">
+              <a:solidFill>
+                <a:srgbClr val="31538F"/>
+              </a:solidFill>
+              <a:prstDash val="solid"/>
+              <a:miter lim="800000"/>
+              <a:headEnd len="sm" w="sm" type="none"/>
+              <a:tailEnd len="sm" w="sm" type="none"/>
+            </a:ln>
+          </p:spPr>
+          <p:txBody>
+            <a:bodyPr anchorCtr="0" anchor="ctr" bIns="45700" lIns="91425" spcFirstLastPara="1" rIns="91425" wrap="square" tIns="45700">
+              <a:noAutofit/>
+            </a:bodyPr>
+            <a:lstStyle/>
+            <a:p>
+              <a:pPr indent="0" lvl="0" marL="0" marR="0" rtl="0" algn="ctr">
+                <a:lnSpc>
+                  <a:spcPct val="100000"/>
+                </a:lnSpc>
+                <a:spcBef>
+                  <a:spcPts val="0"/>
+                </a:spcBef>
+                <a:spcAft>
+                  <a:spcPts val="0"/>
+                </a:spcAft>
+                <a:buClr>
+                  <a:srgbClr val="000000"/>
+                </a:buClr>
+                <a:buSzPts val="1800"/>
+                <a:buFont typeface="Arial"/>
+                <a:buNone/>
+              </a:pPr>
+              <a:r>
+                <a:t/>
+              </a:r>
+              <a:endParaRPr b="0" i="0" sz="1800" u="none" cap="none" strike="noStrike">
+                <a:solidFill>
+                  <a:schemeClr val="lt1"/>
+                </a:solidFill>
+                <a:latin typeface="Calibri"/>
+                <a:ea typeface="Calibri"/>
+                <a:cs typeface="Calibri"/>
+                <a:sym typeface="Calibri"/>
+              </a:endParaRPr>
+            </a:p>
+          </p:txBody>
+        </p:sp>
+        <p:sp>
+          <p:nvSpPr>
+            <p:cNvPr id="112" name="Google Shape;112;p6"/>
+            <p:cNvSpPr txBox="1"/>
+            <p:nvPr/>
+          </p:nvSpPr>
+          <p:spPr>
+            <a:xfrm>
+              <a:off x="394601" y="375299"/>
+              <a:ext cx="301686" cy="369332"/>
+            </a:xfrm>
+            <a:prstGeom prst="rect">
+              <a:avLst/>
+            </a:prstGeom>
+            <a:noFill/>
+            <a:ln>
+              <a:noFill/>
+            </a:ln>
+          </p:spPr>
+          <p:txBody>
+            <a:bodyPr anchorCtr="0" anchor="t" bIns="45700" lIns="91425" spcFirstLastPara="1" rIns="91425" wrap="square" tIns="45700">
+              <a:spAutoFit/>
+            </a:bodyPr>
+            <a:lstStyle/>
+            <a:p>
+              <a:pPr indent="0" lvl="0" marL="0" marR="0" rtl="0" algn="l">
+                <a:lnSpc>
+                  <a:spcPct val="100000"/>
+                </a:lnSpc>
+                <a:spcBef>
+                  <a:spcPts val="0"/>
+                </a:spcBef>
+                <a:spcAft>
+                  <a:spcPts val="0"/>
+                </a:spcAft>
+                <a:buClr>
+                  <a:srgbClr val="000000"/>
+                </a:buClr>
+                <a:buSzPts val="1800"/>
+                <a:buFont typeface="Arial"/>
+                <a:buNone/>
+              </a:pPr>
+              <a:r>
+                <a:rPr b="0" i="0" lang="en-US" sz="1800" u="none" cap="none" strike="noStrike">
+                  <a:solidFill>
+                    <a:schemeClr val="dk1"/>
+                  </a:solidFill>
+                  <a:latin typeface="Calibri"/>
+                  <a:ea typeface="Calibri"/>
+                  <a:cs typeface="Calibri"/>
+                  <a:sym typeface="Calibri"/>
+                </a:rPr>
+                <a:t>4</a:t>
+              </a:r>
+              <a:endParaRPr b="0" i="0" sz="1400" u="none" cap="none" strike="noStrike">
+                <a:solidFill>
+                  <a:srgbClr val="000000"/>
+                </a:solidFill>
+                <a:latin typeface="Arial"/>
+                <a:ea typeface="Arial"/>
+                <a:cs typeface="Arial"/>
+                <a:sym typeface="Arial"/>
+              </a:endParaRPr>
+            </a:p>
+          </p:txBody>
+        </p:sp>
+      </p:grpSp>
+    </p:spTree>
+  </p:cSld>
+  <p:clrMapOvr>
+    <a:masterClrMapping/>
+  </p:clrMapOvr>
+</p:sld>
+</file>
+
+<file path=ppt/slides/slide5.xml><?xml version="1.0" encoding="utf-8"?>
+<p:sld xmlns:a="http://schemas.openxmlformats.org/drawingml/2006/main" xmlns:r="http://schemas.openxmlformats.org/officeDocument/2006/relationships" xmlns:mc="http://schemas.openxmlformats.org/markup-compatibility/2006" xmlns:mv="urn:schemas-microsoft-com:mac:vml" xmlns:p="http://schemas.openxmlformats.org/presentationml/2006/main" xmlns:c="http://schemas.openxmlformats.org/drawingml/2006/chart" xmlns:dgm="http://schemas.openxmlformats.org/drawingml/2006/diagram" xmlns:o="urn:schemas-microsoft-com:office:office" xmlns:v="urn:schemas-microsoft-com:vml" xmlns:pvml="urn:schemas-microsoft-com:office:powerpoint" xmlns:com="http://schemas.openxmlformats.org/drawingml/2006/compatibility" xmlns:p14="http://schemas.microsoft.com/office/powerpoint/2010/main" xmlns:p15="http://schemas.microsoft.com/office/powerpoint/2012/main" xmlns:ahyp="http://schemas.microsoft.com/office/drawing/2018/hyperlinkcolor">
+  <p:cSld>
+    <p:spTree>
+      <p:nvGrpSpPr>
+        <p:cNvPr id="116" name="Shape 116"/>
+        <p:cNvGrpSpPr/>
+        <p:nvPr/>
+      </p:nvGrpSpPr>
+      <p:grpSpPr>
+        <a:xfrm>
+          <a:off x="0" y="0"/>
+          <a:ext cx="0" cy="0"/>
+          <a:chOff x="0" y="0"/>
+          <a:chExt cx="0" cy="0"/>
+        </a:xfrm>
+      </p:grpSpPr>
+      <p:sp>
+        <p:nvSpPr>
+          <p:cNvPr id="117" name="Google Shape;117;p7"/>
+          <p:cNvSpPr txBox="1"/>
+          <p:nvPr/>
+        </p:nvSpPr>
+        <p:spPr>
+          <a:xfrm>
+            <a:off x="1260094" y="1196436"/>
+            <a:ext cx="8413019" cy="2092881"/>
+          </a:xfrm>
+          <a:prstGeom prst="rect">
+            <a:avLst/>
+          </a:prstGeom>
+          <a:noFill/>
+          <a:ln>
+            <a:noFill/>
+          </a:ln>
+        </p:spPr>
+        <p:txBody>
+          <a:bodyPr anchorCtr="0" anchor="t" bIns="45700" lIns="91425" spcFirstLastPara="1" rIns="91425" wrap="square" tIns="45700">
+            <a:spAutoFit/>
+          </a:bodyPr>
+          <a:lstStyle/>
+          <a:p>
+            <a:pPr indent="0" lvl="0" marL="0" marR="0" rtl="0" algn="l">
+              <a:lnSpc>
+                <a:spcPct val="100000"/>
+              </a:lnSpc>
+              <a:spcBef>
+                <a:spcPts val="0"/>
+              </a:spcBef>
+              <a:spcAft>
+                <a:spcPts val="0"/>
+              </a:spcAft>
+              <a:buClr>
+                <a:srgbClr val="000000"/>
+              </a:buClr>
+              <a:buSzPts val="2600"/>
+              <a:buFont typeface="Arial"/>
+              <a:buNone/>
+            </a:pPr>
+            <a:r>
+              <a:rPr b="0" i="0" lang="en-US" sz="2600" u="none" cap="none" strike="noStrike">
+                <a:solidFill>
+                  <a:srgbClr val="7F7F7F"/>
+                </a:solidFill>
+                <a:latin typeface="Calibri"/>
+                <a:ea typeface="Calibri"/>
+                <a:cs typeface="Calibri"/>
+                <a:sym typeface="Calibri"/>
+              </a:rPr>
+              <a:t>When defining personas for a project, we should do it in a most clear and unambiguous manner. Consider three options to define personas. </a:t>
+            </a:r>
+            <a:endParaRPr b="0" i="0" sz="1400" u="none" cap="none" strike="noStrike">
+              <a:solidFill>
+                <a:srgbClr val="000000"/>
+              </a:solidFill>
+              <a:latin typeface="Arial"/>
+              <a:ea typeface="Arial"/>
+              <a:cs typeface="Arial"/>
+              <a:sym typeface="Arial"/>
+            </a:endParaRPr>
+          </a:p>
+          <a:p>
+            <a:pPr indent="0" lvl="0" marL="0" marR="0" rtl="0" algn="l">
+              <a:lnSpc>
+                <a:spcPct val="100000"/>
+              </a:lnSpc>
+              <a:spcBef>
+                <a:spcPts val="0"/>
+              </a:spcBef>
+              <a:spcAft>
+                <a:spcPts val="0"/>
+              </a:spcAft>
+              <a:buClr>
+                <a:srgbClr val="000000"/>
+              </a:buClr>
+              <a:buSzPts val="2600"/>
+              <a:buFont typeface="Arial"/>
+              <a:buNone/>
+            </a:pPr>
+            <a:r>
+              <a:t/>
+            </a:r>
+            <a:endParaRPr b="0" i="0" sz="2600" u="none" cap="none" strike="noStrike">
+              <a:solidFill>
+                <a:srgbClr val="7F7F7F"/>
+              </a:solidFill>
+              <a:latin typeface="Calibri"/>
+              <a:ea typeface="Calibri"/>
+              <a:cs typeface="Calibri"/>
+              <a:sym typeface="Calibri"/>
+            </a:endParaRPr>
+          </a:p>
+          <a:p>
+            <a:pPr indent="0" lvl="0" marL="0" marR="0" rtl="0" algn="l">
+              <a:lnSpc>
+                <a:spcPct val="100000"/>
+              </a:lnSpc>
+              <a:spcBef>
+                <a:spcPts val="0"/>
+              </a:spcBef>
+              <a:spcAft>
+                <a:spcPts val="0"/>
+              </a:spcAft>
+              <a:buClr>
+                <a:srgbClr val="000000"/>
+              </a:buClr>
+              <a:buSzPts val="2600"/>
+              <a:buFont typeface="Arial"/>
+              <a:buNone/>
+            </a:pPr>
+            <a:r>
+              <a:rPr b="0" i="0" lang="en-US" sz="2600" u="none" cap="none" strike="noStrike">
+                <a:solidFill>
+                  <a:srgbClr val="7F7F7F"/>
+                </a:solidFill>
+                <a:latin typeface="Calibri"/>
+                <a:ea typeface="Calibri"/>
+                <a:cs typeface="Calibri"/>
+                <a:sym typeface="Calibri"/>
+              </a:rPr>
+              <a:t>Which one definition is ambiguous?</a:t>
+            </a:r>
+            <a:endParaRPr b="0" i="0" sz="1400" u="none" cap="none" strike="noStrike">
+              <a:solidFill>
+                <a:srgbClr val="000000"/>
+              </a:solidFill>
+              <a:latin typeface="Arial"/>
+              <a:ea typeface="Arial"/>
+              <a:cs typeface="Arial"/>
+              <a:sym typeface="Arial"/>
+            </a:endParaRPr>
+          </a:p>
+        </p:txBody>
+      </p:sp>
+      <p:pic>
+        <p:nvPicPr>
+          <p:cNvPr id="118" name="Google Shape;118;p7"/>
+          <p:cNvPicPr preferRelativeResize="0"/>
+          <p:nvPr/>
+        </p:nvPicPr>
+        <p:blipFill rotWithShape="1">
+          <a:blip r:embed="rId3">
+            <a:alphaModFix/>
+          </a:blip>
+          <a:srcRect b="0" l="0" r="0" t="0"/>
+          <a:stretch/>
+        </p:blipFill>
+        <p:spPr>
+          <a:xfrm>
+            <a:off x="1260094" y="3634836"/>
+            <a:ext cx="8153400" cy="2880092"/>
+          </a:xfrm>
+          <a:prstGeom prst="rect">
+            <a:avLst/>
+          </a:prstGeom>
+          <a:noFill/>
+          <a:ln>
+            <a:noFill/>
+          </a:ln>
+        </p:spPr>
+      </p:pic>
+      <p:grpSp>
+        <p:nvGrpSpPr>
+          <p:cNvPr id="119" name="Google Shape;119;p7"/>
+          <p:cNvGrpSpPr/>
+          <p:nvPr/>
+        </p:nvGrpSpPr>
+        <p:grpSpPr>
+          <a:xfrm>
+            <a:off x="143745" y="98148"/>
+            <a:ext cx="335559" cy="369332"/>
+            <a:chOff x="369116" y="375299"/>
+            <a:chExt cx="335559" cy="369332"/>
+          </a:xfrm>
+        </p:grpSpPr>
+        <p:sp>
+          <p:nvSpPr>
+            <p:cNvPr id="120" name="Google Shape;120;p7"/>
+            <p:cNvSpPr/>
+            <p:nvPr/>
+          </p:nvSpPr>
+          <p:spPr>
+            <a:xfrm>
+              <a:off x="369116" y="411061"/>
+              <a:ext cx="335559" cy="297809"/>
+            </a:xfrm>
+            <a:prstGeom prst="ellipse">
+              <a:avLst/>
+            </a:prstGeom>
+            <a:solidFill>
+              <a:schemeClr val="lt1"/>
+            </a:solidFill>
+            <a:ln cap="flat" cmpd="sng" w="12700">
+              <a:solidFill>
+                <a:srgbClr val="31538F"/>
+              </a:solidFill>
+              <a:prstDash val="solid"/>
+              <a:miter lim="800000"/>
+              <a:headEnd len="sm" w="sm" type="none"/>
+              <a:tailEnd len="sm" w="sm" type="none"/>
+            </a:ln>
+          </p:spPr>
+          <p:txBody>
+            <a:bodyPr anchorCtr="0" anchor="ctr" bIns="45700" lIns="91425" spcFirstLastPara="1" rIns="91425" wrap="square" tIns="45700">
+              <a:noAutofit/>
+            </a:bodyPr>
+            <a:lstStyle/>
+            <a:p>
+              <a:pPr indent="0" lvl="0" marL="0" marR="0" rtl="0" algn="ctr">
+                <a:lnSpc>
+                  <a:spcPct val="100000"/>
+                </a:lnSpc>
+                <a:spcBef>
+                  <a:spcPts val="0"/>
+                </a:spcBef>
+                <a:spcAft>
+                  <a:spcPts val="0"/>
+                </a:spcAft>
+                <a:buClr>
+                  <a:srgbClr val="000000"/>
+                </a:buClr>
+                <a:buSzPts val="1800"/>
+                <a:buFont typeface="Arial"/>
+                <a:buNone/>
+              </a:pPr>
+              <a:r>
+                <a:t/>
+              </a:r>
+              <a:endParaRPr b="0" i="0" sz="1800" u="none" cap="none" strike="noStrike">
+                <a:solidFill>
+                  <a:schemeClr val="lt1"/>
+                </a:solidFill>
+                <a:latin typeface="Calibri"/>
+                <a:ea typeface="Calibri"/>
+                <a:cs typeface="Calibri"/>
+                <a:sym typeface="Calibri"/>
+              </a:endParaRPr>
+            </a:p>
+          </p:txBody>
+        </p:sp>
+        <p:sp>
+          <p:nvSpPr>
+            <p:cNvPr id="121" name="Google Shape;121;p7"/>
             <p:cNvSpPr txBox="1"/>
             <p:nvPr/>
           </p:nvSpPr>
@@ -15391,12 +16287,12 @@
 </p:sld>
 </file>
 
-<file path=ppt/slides/slide3.xml><?xml version="1.0" encoding="utf-8"?>
+<file path=ppt/slides/slide6.xml><?xml version="1.0" encoding="utf-8"?>
 <p:sld xmlns:a="http://schemas.openxmlformats.org/drawingml/2006/main" xmlns:r="http://schemas.openxmlformats.org/officeDocument/2006/relationships" xmlns:mc="http://schemas.openxmlformats.org/markup-compatibility/2006" xmlns:mv="urn:schemas-microsoft-com:mac:vml" xmlns:p="http://schemas.openxmlformats.org/presentationml/2006/main" xmlns:c="http://schemas.openxmlformats.org/drawingml/2006/chart" xmlns:dgm="http://schemas.openxmlformats.org/drawingml/2006/diagram" xmlns:o="urn:schemas-microsoft-com:office:office" xmlns:v="urn:schemas-microsoft-com:vml" xmlns:pvml="urn:schemas-microsoft-com:office:powerpoint" xmlns:com="http://schemas.openxmlformats.org/drawingml/2006/compatibility" xmlns:p14="http://schemas.microsoft.com/office/powerpoint/2010/main" xmlns:p15="http://schemas.microsoft.com/office/powerpoint/2012/main" xmlns:ahyp="http://schemas.microsoft.com/office/drawing/2018/hyperlinkcolor">
   <p:cSld>
     <p:spTree>
       <p:nvGrpSpPr>
-        <p:cNvPr id="100" name="Shape 100"/>
+        <p:cNvPr id="125" name="Shape 125"/>
         <p:cNvGrpSpPr/>
         <p:nvPr/>
       </p:nvGrpSpPr>
@@ -15408,23 +16304,16 @@
           <a:chExt cx="0" cy="0"/>
         </a:xfrm>
       </p:grpSpPr>
-      <p:pic>
-        <p:nvPicPr>
-          <p:cNvPr id="101" name="Google Shape;101;p6"/>
-          <p:cNvPicPr preferRelativeResize="0"/>
+      <p:sp>
+        <p:nvSpPr>
+          <p:cNvPr id="126" name="Google Shape;126;p8"/>
+          <p:cNvSpPr/>
           <p:nvPr/>
-        </p:nvPicPr>
-        <p:blipFill rotWithShape="1">
-          <a:blip r:embed="rId3">
-            <a:alphaModFix/>
-          </a:blip>
-          <a:srcRect b="0" l="0" r="0" t="0"/>
-          <a:stretch/>
-        </p:blipFill>
+        </p:nvSpPr>
         <p:spPr>
           <a:xfrm>
-            <a:off x="3034313" y="2125401"/>
-            <a:ext cx="6123374" cy="2607197"/>
+            <a:off x="1934778" y="2017113"/>
+            <a:ext cx="7903044" cy="1754326"/>
           </a:xfrm>
           <a:prstGeom prst="rect">
             <a:avLst/>
@@ -15434,16 +16323,188 @@
             <a:noFill/>
           </a:ln>
         </p:spPr>
-      </p:pic>
+        <p:txBody>
+          <a:bodyPr anchorCtr="0" anchor="t" bIns="45700" lIns="91425" spcFirstLastPara="1" rIns="91425" wrap="square" tIns="45700">
+            <a:spAutoFit/>
+          </a:bodyPr>
+          <a:lstStyle/>
+          <a:p>
+            <a:pPr indent="0" lvl="0" marL="0" marR="0" rtl="0" algn="l">
+              <a:lnSpc>
+                <a:spcPct val="100000"/>
+              </a:lnSpc>
+              <a:spcBef>
+                <a:spcPts val="0"/>
+              </a:spcBef>
+              <a:spcAft>
+                <a:spcPts val="0"/>
+              </a:spcAft>
+              <a:buClr>
+                <a:srgbClr val="000000"/>
+              </a:buClr>
+              <a:buSzPts val="1800"/>
+              <a:buFont typeface="Arial"/>
+              <a:buNone/>
+            </a:pPr>
+            <a:r>
+              <a:rPr b="0" i="0" lang="en-US" sz="1800" u="sng" cap="none" strike="noStrike">
+                <a:solidFill>
+                  <a:schemeClr val="dk1"/>
+                </a:solidFill>
+                <a:latin typeface="Calibri"/>
+                <a:ea typeface="Calibri"/>
+                <a:cs typeface="Calibri"/>
+                <a:sym typeface="Calibri"/>
+              </a:rPr>
+              <a:t>Question. </a:t>
+            </a:r>
+            <a:r>
+              <a:rPr b="0" i="0" lang="en-US" sz="1800" u="none" cap="none" strike="noStrike">
+                <a:solidFill>
+                  <a:schemeClr val="dk1"/>
+                </a:solidFill>
+                <a:latin typeface="Calibri"/>
+                <a:ea typeface="Calibri"/>
+                <a:cs typeface="Calibri"/>
+                <a:sym typeface="Calibri"/>
+              </a:rPr>
+              <a:t>Is this class difficult or easy?</a:t>
+            </a:r>
+            <a:endParaRPr b="0" i="0" sz="1400" u="none" cap="none" strike="noStrike">
+              <a:solidFill>
+                <a:srgbClr val="000000"/>
+              </a:solidFill>
+              <a:latin typeface="Arial"/>
+              <a:ea typeface="Arial"/>
+              <a:cs typeface="Arial"/>
+              <a:sym typeface="Arial"/>
+            </a:endParaRPr>
+          </a:p>
+          <a:p>
+            <a:pPr indent="0" lvl="0" marL="0" marR="0" rtl="0" algn="l">
+              <a:lnSpc>
+                <a:spcPct val="100000"/>
+              </a:lnSpc>
+              <a:spcBef>
+                <a:spcPts val="0"/>
+              </a:spcBef>
+              <a:spcAft>
+                <a:spcPts val="0"/>
+              </a:spcAft>
+              <a:buClr>
+                <a:srgbClr val="000000"/>
+              </a:buClr>
+              <a:buSzPts val="1800"/>
+              <a:buFont typeface="Arial"/>
+              <a:buNone/>
+            </a:pPr>
+            <a:r>
+              <a:t/>
+            </a:r>
+            <a:endParaRPr b="0" i="0" sz="1800" u="none" cap="none" strike="noStrike">
+              <a:solidFill>
+                <a:schemeClr val="dk1"/>
+              </a:solidFill>
+              <a:latin typeface="Calibri"/>
+              <a:ea typeface="Calibri"/>
+              <a:cs typeface="Calibri"/>
+              <a:sym typeface="Calibri"/>
+            </a:endParaRPr>
+          </a:p>
+          <a:p>
+            <a:pPr indent="0" lvl="0" marL="0" marR="0" rtl="0" algn="l">
+              <a:lnSpc>
+                <a:spcPct val="100000"/>
+              </a:lnSpc>
+              <a:spcBef>
+                <a:spcPts val="0"/>
+              </a:spcBef>
+              <a:spcAft>
+                <a:spcPts val="0"/>
+              </a:spcAft>
+              <a:buClr>
+                <a:srgbClr val="000000"/>
+              </a:buClr>
+              <a:buSzPts val="1800"/>
+              <a:buFont typeface="Arial"/>
+              <a:buNone/>
+            </a:pPr>
+            <a:r>
+              <a:t/>
+            </a:r>
+            <a:endParaRPr b="0" i="0" sz="1800" u="none" cap="none" strike="noStrike">
+              <a:solidFill>
+                <a:schemeClr val="dk1"/>
+              </a:solidFill>
+              <a:latin typeface="Calibri"/>
+              <a:ea typeface="Calibri"/>
+              <a:cs typeface="Calibri"/>
+              <a:sym typeface="Calibri"/>
+            </a:endParaRPr>
+          </a:p>
+          <a:p>
+            <a:pPr indent="0" lvl="0" marL="0" marR="0" rtl="0" algn="l">
+              <a:lnSpc>
+                <a:spcPct val="100000"/>
+              </a:lnSpc>
+              <a:spcBef>
+                <a:spcPts val="0"/>
+              </a:spcBef>
+              <a:spcAft>
+                <a:spcPts val="0"/>
+              </a:spcAft>
+              <a:buClr>
+                <a:srgbClr val="000000"/>
+              </a:buClr>
+              <a:buSzPts val="1800"/>
+              <a:buFont typeface="Arial"/>
+              <a:buNone/>
+            </a:pPr>
+            <a:r>
+              <a:rPr b="0" i="0" lang="en-US" sz="1800" u="sng" cap="none" strike="noStrike">
+                <a:solidFill>
+                  <a:schemeClr val="dk1"/>
+                </a:solidFill>
+                <a:latin typeface="Calibri"/>
+                <a:ea typeface="Calibri"/>
+                <a:cs typeface="Calibri"/>
+                <a:sym typeface="Calibri"/>
+              </a:rPr>
+              <a:t>Answer. </a:t>
+            </a:r>
+            <a:r>
+              <a:rPr b="0" i="0" lang="en-US" sz="1800" u="none" cap="none" strike="noStrike">
+                <a:solidFill>
+                  <a:schemeClr val="dk1"/>
+                </a:solidFill>
+                <a:latin typeface="Calibri"/>
+                <a:ea typeface="Calibri"/>
+                <a:cs typeface="Calibri"/>
+                <a:sym typeface="Calibri"/>
+              </a:rPr>
+              <a:t>The class covers multiple topics. It is rewarding for a student to learn new material and be able to apply it. Six modules include over a thousand pages of course notes, quizzes, assignments, final exam, term project.</a:t>
+            </a:r>
+            <a:endParaRPr b="0" i="0" sz="1400" u="none" cap="none" strike="noStrike">
+              <a:solidFill>
+                <a:srgbClr val="000000"/>
+              </a:solidFill>
+              <a:latin typeface="Arial"/>
+              <a:ea typeface="Arial"/>
+              <a:cs typeface="Arial"/>
+              <a:sym typeface="Arial"/>
+            </a:endParaRPr>
+          </a:p>
+        </p:txBody>
+      </p:sp>
       <p:grpSp>
         <p:nvGrpSpPr>
-          <p:cNvPr id="102" name="Google Shape;102;p6"/>
+          <p:cNvPr id="127" name="Google Shape;127;p8"/>
           <p:cNvGrpSpPr/>
           <p:nvPr/>
         </p:nvGrpSpPr>
         <p:grpSpPr>
           <a:xfrm>
-            <a:off x="220174" y="168646"/>
+            <a:off x="174604" y="147180"/>
             <a:ext cx="335559" cy="369332"/>
             <a:chOff x="369116" y="375299"/>
             <a:chExt cx="335559" cy="369332"/>
@@ -15451,7 +16512,7 @@
         </p:grpSpPr>
         <p:sp>
           <p:nvSpPr>
-            <p:cNvPr id="103" name="Google Shape;103;p6"/>
+            <p:cNvPr id="128" name="Google Shape;128;p8"/>
             <p:cNvSpPr/>
             <p:nvPr/>
           </p:nvSpPr>
@@ -15516,3331 +16577,7 @@
         </p:sp>
         <p:sp>
           <p:nvSpPr>
-            <p:cNvPr id="104" name="Google Shape;104;p6"/>
-            <p:cNvSpPr txBox="1"/>
-            <p:nvPr/>
-          </p:nvSpPr>
-          <p:spPr>
-            <a:xfrm>
-              <a:off x="394601" y="375299"/>
-              <a:ext cx="301686" cy="369332"/>
-            </a:xfrm>
-            <a:prstGeom prst="rect">
-              <a:avLst/>
-            </a:prstGeom>
-            <a:noFill/>
-            <a:ln>
-              <a:noFill/>
-            </a:ln>
-          </p:spPr>
-          <p:txBody>
-            <a:bodyPr anchorCtr="0" anchor="t" bIns="45700" lIns="91425" spcFirstLastPara="1" rIns="91425" wrap="square" tIns="45700">
-              <a:spAutoFit/>
-            </a:bodyPr>
-            <a:lstStyle/>
-            <a:p>
-              <a:pPr indent="0" lvl="0" marL="0" marR="0" rtl="0" algn="l">
-                <a:lnSpc>
-                  <a:spcPct val="100000"/>
-                </a:lnSpc>
-                <a:spcBef>
-                  <a:spcPts val="0"/>
-                </a:spcBef>
-                <a:spcAft>
-                  <a:spcPts val="0"/>
-                </a:spcAft>
-                <a:buClr>
-                  <a:srgbClr val="000000"/>
-                </a:buClr>
-                <a:buSzPts val="1800"/>
-                <a:buFont typeface="Arial"/>
-                <a:buNone/>
-              </a:pPr>
-              <a:r>
-                <a:rPr b="0" i="0" lang="en-US" sz="1800" u="none" cap="none" strike="noStrike">
-                  <a:solidFill>
-                    <a:schemeClr val="dk1"/>
-                  </a:solidFill>
-                  <a:latin typeface="Calibri"/>
-                  <a:ea typeface="Calibri"/>
-                  <a:cs typeface="Calibri"/>
-                  <a:sym typeface="Calibri"/>
-                </a:rPr>
-                <a:t>4</a:t>
-              </a:r>
-              <a:endParaRPr b="0" i="0" sz="1400" u="none" cap="none" strike="noStrike">
-                <a:solidFill>
-                  <a:srgbClr val="000000"/>
-                </a:solidFill>
-                <a:latin typeface="Arial"/>
-                <a:ea typeface="Arial"/>
-                <a:cs typeface="Arial"/>
-                <a:sym typeface="Arial"/>
-              </a:endParaRPr>
-            </a:p>
-          </p:txBody>
-        </p:sp>
-      </p:grpSp>
-    </p:spTree>
-  </p:cSld>
-  <p:clrMapOvr>
-    <a:masterClrMapping/>
-  </p:clrMapOvr>
-</p:sld>
-</file>
-
-<file path=ppt/slides/slide4.xml><?xml version="1.0" encoding="utf-8"?>
-<p:sld xmlns:a="http://schemas.openxmlformats.org/drawingml/2006/main" xmlns:r="http://schemas.openxmlformats.org/officeDocument/2006/relationships" xmlns:mc="http://schemas.openxmlformats.org/markup-compatibility/2006" xmlns:mv="urn:schemas-microsoft-com:mac:vml" xmlns:p="http://schemas.openxmlformats.org/presentationml/2006/main" xmlns:c="http://schemas.openxmlformats.org/drawingml/2006/chart" xmlns:dgm="http://schemas.openxmlformats.org/drawingml/2006/diagram" xmlns:o="urn:schemas-microsoft-com:office:office" xmlns:v="urn:schemas-microsoft-com:vml" xmlns:pvml="urn:schemas-microsoft-com:office:powerpoint" xmlns:com="http://schemas.openxmlformats.org/drawingml/2006/compatibility" xmlns:p14="http://schemas.microsoft.com/office/powerpoint/2010/main" xmlns:p15="http://schemas.microsoft.com/office/powerpoint/2012/main" xmlns:ahyp="http://schemas.microsoft.com/office/drawing/2018/hyperlinkcolor">
-  <p:cSld>
-    <p:spTree>
-      <p:nvGrpSpPr>
-        <p:cNvPr id="108" name="Shape 108"/>
-        <p:cNvGrpSpPr/>
-        <p:nvPr/>
-      </p:nvGrpSpPr>
-      <p:grpSpPr>
-        <a:xfrm>
-          <a:off x="0" y="0"/>
-          <a:ext cx="0" cy="0"/>
-          <a:chOff x="0" y="0"/>
-          <a:chExt cx="0" cy="0"/>
-        </a:xfrm>
-      </p:grpSpPr>
-      <p:pic>
-        <p:nvPicPr>
-          <p:cNvPr id="109" name="Google Shape;109;p5"/>
-          <p:cNvPicPr preferRelativeResize="0"/>
-          <p:nvPr/>
-        </p:nvPicPr>
-        <p:blipFill rotWithShape="1">
-          <a:blip r:embed="rId3">
-            <a:alphaModFix/>
-          </a:blip>
-          <a:srcRect b="0" l="0" r="0" t="0"/>
-          <a:stretch/>
-        </p:blipFill>
-        <p:spPr>
-          <a:xfrm>
-            <a:off x="3205767" y="2125401"/>
-            <a:ext cx="5780465" cy="2607197"/>
-          </a:xfrm>
-          <a:prstGeom prst="rect">
-            <a:avLst/>
-          </a:prstGeom>
-          <a:noFill/>
-          <a:ln>
-            <a:noFill/>
-          </a:ln>
-        </p:spPr>
-      </p:pic>
-      <p:grpSp>
-        <p:nvGrpSpPr>
-          <p:cNvPr id="110" name="Google Shape;110;p5"/>
-          <p:cNvGrpSpPr/>
-          <p:nvPr/>
-        </p:nvGrpSpPr>
-        <p:grpSpPr>
-          <a:xfrm>
-            <a:off x="153605" y="145106"/>
-            <a:ext cx="335559" cy="369332"/>
-            <a:chOff x="369116" y="375299"/>
-            <a:chExt cx="335559" cy="369332"/>
-          </a:xfrm>
-        </p:grpSpPr>
-        <p:sp>
-          <p:nvSpPr>
-            <p:cNvPr id="111" name="Google Shape;111;p5"/>
-            <p:cNvSpPr/>
-            <p:nvPr/>
-          </p:nvSpPr>
-          <p:spPr>
-            <a:xfrm>
-              <a:off x="369116" y="411061"/>
-              <a:ext cx="335559" cy="297809"/>
-            </a:xfrm>
-            <a:prstGeom prst="ellipse">
-              <a:avLst/>
-            </a:prstGeom>
-            <a:solidFill>
-              <a:schemeClr val="lt1"/>
-            </a:solidFill>
-            <a:ln cap="flat" cmpd="sng" w="12700">
-              <a:solidFill>
-                <a:srgbClr val="31538F"/>
-              </a:solidFill>
-              <a:prstDash val="solid"/>
-              <a:miter lim="800000"/>
-              <a:headEnd len="sm" w="sm" type="none"/>
-              <a:tailEnd len="sm" w="sm" type="none"/>
-            </a:ln>
-          </p:spPr>
-          <p:txBody>
-            <a:bodyPr anchorCtr="0" anchor="ctr" bIns="45700" lIns="91425" spcFirstLastPara="1" rIns="91425" wrap="square" tIns="45700">
-              <a:noAutofit/>
-            </a:bodyPr>
-            <a:lstStyle/>
-            <a:p>
-              <a:pPr indent="0" lvl="0" marL="0" marR="0" rtl="0" algn="ctr">
-                <a:lnSpc>
-                  <a:spcPct val="100000"/>
-                </a:lnSpc>
-                <a:spcBef>
-                  <a:spcPts val="0"/>
-                </a:spcBef>
-                <a:spcAft>
-                  <a:spcPts val="0"/>
-                </a:spcAft>
-                <a:buClr>
-                  <a:srgbClr val="000000"/>
-                </a:buClr>
-                <a:buSzPts val="1800"/>
-                <a:buFont typeface="Arial"/>
-                <a:buNone/>
-              </a:pPr>
-              <a:r>
-                <a:t/>
-              </a:r>
-              <a:endParaRPr b="0" i="0" sz="1800" u="none" cap="none" strike="noStrike">
-                <a:solidFill>
-                  <a:schemeClr val="lt1"/>
-                </a:solidFill>
-                <a:latin typeface="Calibri"/>
-                <a:ea typeface="Calibri"/>
-                <a:cs typeface="Calibri"/>
-                <a:sym typeface="Calibri"/>
-              </a:endParaRPr>
-            </a:p>
-          </p:txBody>
-        </p:sp>
-        <p:sp>
-          <p:nvSpPr>
-            <p:cNvPr id="112" name="Google Shape;112;p5"/>
-            <p:cNvSpPr txBox="1"/>
-            <p:nvPr/>
-          </p:nvSpPr>
-          <p:spPr>
-            <a:xfrm>
-              <a:off x="394601" y="375299"/>
-              <a:ext cx="301686" cy="369332"/>
-            </a:xfrm>
-            <a:prstGeom prst="rect">
-              <a:avLst/>
-            </a:prstGeom>
-            <a:noFill/>
-            <a:ln>
-              <a:noFill/>
-            </a:ln>
-          </p:spPr>
-          <p:txBody>
-            <a:bodyPr anchorCtr="0" anchor="t" bIns="45700" lIns="91425" spcFirstLastPara="1" rIns="91425" wrap="square" tIns="45700">
-              <a:spAutoFit/>
-            </a:bodyPr>
-            <a:lstStyle/>
-            <a:p>
-              <a:pPr indent="0" lvl="0" marL="0" marR="0" rtl="0" algn="l">
-                <a:lnSpc>
-                  <a:spcPct val="100000"/>
-                </a:lnSpc>
-                <a:spcBef>
-                  <a:spcPts val="0"/>
-                </a:spcBef>
-                <a:spcAft>
-                  <a:spcPts val="0"/>
-                </a:spcAft>
-                <a:buClr>
-                  <a:srgbClr val="000000"/>
-                </a:buClr>
-                <a:buSzPts val="1800"/>
-                <a:buFont typeface="Arial"/>
-                <a:buNone/>
-              </a:pPr>
-              <a:r>
-                <a:rPr b="0" i="0" lang="en-US" sz="1800" u="none" cap="none" strike="noStrike">
-                  <a:solidFill>
-                    <a:schemeClr val="dk1"/>
-                  </a:solidFill>
-                  <a:latin typeface="Calibri"/>
-                  <a:ea typeface="Calibri"/>
-                  <a:cs typeface="Calibri"/>
-                  <a:sym typeface="Calibri"/>
-                </a:rPr>
-                <a:t>3</a:t>
-              </a:r>
-              <a:endParaRPr b="0" i="0" sz="1400" u="none" cap="none" strike="noStrike">
-                <a:solidFill>
-                  <a:srgbClr val="000000"/>
-                </a:solidFill>
-                <a:latin typeface="Arial"/>
-                <a:ea typeface="Arial"/>
-                <a:cs typeface="Arial"/>
-                <a:sym typeface="Arial"/>
-              </a:endParaRPr>
-            </a:p>
-          </p:txBody>
-        </p:sp>
-      </p:grpSp>
-    </p:spTree>
-  </p:cSld>
-  <p:clrMapOvr>
-    <a:masterClrMapping/>
-  </p:clrMapOvr>
-</p:sld>
-</file>
-
-<file path=ppt/slides/slide5.xml><?xml version="1.0" encoding="utf-8"?>
-<p:sld xmlns:a="http://schemas.openxmlformats.org/drawingml/2006/main" xmlns:r="http://schemas.openxmlformats.org/officeDocument/2006/relationships" xmlns:mc="http://schemas.openxmlformats.org/markup-compatibility/2006" xmlns:mv="urn:schemas-microsoft-com:mac:vml" xmlns:p="http://schemas.openxmlformats.org/presentationml/2006/main" xmlns:c="http://schemas.openxmlformats.org/drawingml/2006/chart" xmlns:dgm="http://schemas.openxmlformats.org/drawingml/2006/diagram" xmlns:o="urn:schemas-microsoft-com:office:office" xmlns:v="urn:schemas-microsoft-com:vml" xmlns:pvml="urn:schemas-microsoft-com:office:powerpoint" xmlns:com="http://schemas.openxmlformats.org/drawingml/2006/compatibility" xmlns:p14="http://schemas.microsoft.com/office/powerpoint/2010/main" xmlns:p15="http://schemas.microsoft.com/office/powerpoint/2012/main" xmlns:ahyp="http://schemas.microsoft.com/office/drawing/2018/hyperlinkcolor">
-  <p:cSld>
-    <p:spTree>
-      <p:nvGrpSpPr>
-        <p:cNvPr id="116" name="Shape 116"/>
-        <p:cNvGrpSpPr/>
-        <p:nvPr/>
-      </p:nvGrpSpPr>
-      <p:grpSpPr>
-        <a:xfrm>
-          <a:off x="0" y="0"/>
-          <a:ext cx="0" cy="0"/>
-          <a:chOff x="0" y="0"/>
-          <a:chExt cx="0" cy="0"/>
-        </a:xfrm>
-      </p:grpSpPr>
-      <p:sp>
-        <p:nvSpPr>
-          <p:cNvPr id="117" name="Google Shape;117;p4"/>
-          <p:cNvSpPr/>
-          <p:nvPr/>
-        </p:nvSpPr>
-        <p:spPr>
-          <a:xfrm>
-            <a:off x="3439886" y="1178580"/>
-            <a:ext cx="6096000" cy="3693319"/>
-          </a:xfrm>
-          <a:prstGeom prst="rect">
-            <a:avLst/>
-          </a:prstGeom>
-          <a:noFill/>
-          <a:ln>
-            <a:noFill/>
-          </a:ln>
-        </p:spPr>
-        <p:txBody>
-          <a:bodyPr anchorCtr="0" anchor="t" bIns="45700" lIns="91425" spcFirstLastPara="1" rIns="91425" wrap="square" tIns="45700">
-            <a:spAutoFit/>
-          </a:bodyPr>
-          <a:lstStyle/>
-          <a:p>
-            <a:pPr indent="0" lvl="0" marL="0" marR="0" rtl="0" algn="l">
-              <a:lnSpc>
-                <a:spcPct val="100000"/>
-              </a:lnSpc>
-              <a:spcBef>
-                <a:spcPts val="0"/>
-              </a:spcBef>
-              <a:spcAft>
-                <a:spcPts val="0"/>
-              </a:spcAft>
-              <a:buClr>
-                <a:srgbClr val="000000"/>
-              </a:buClr>
-              <a:buSzPts val="1800"/>
-              <a:buFont typeface="Arial"/>
-              <a:buNone/>
-            </a:pPr>
-            <a:r>
-              <a:rPr b="0" i="0" lang="en-US" sz="1800" u="none" cap="none" strike="noStrike">
-                <a:solidFill>
-                  <a:srgbClr val="2F5496"/>
-                </a:solidFill>
-                <a:latin typeface="Calibri"/>
-                <a:ea typeface="Calibri"/>
-                <a:cs typeface="Calibri"/>
-                <a:sym typeface="Calibri"/>
-              </a:rPr>
-              <a:t>Attributes of a solid requirement are comprised below.</a:t>
-            </a:r>
-            <a:endParaRPr b="0" i="0" sz="1400" u="none" cap="none" strike="noStrike">
-              <a:solidFill>
-                <a:srgbClr val="000000"/>
-              </a:solidFill>
-              <a:latin typeface="Arial"/>
-              <a:ea typeface="Arial"/>
-              <a:cs typeface="Arial"/>
-              <a:sym typeface="Arial"/>
-            </a:endParaRPr>
-          </a:p>
-          <a:p>
-            <a:pPr indent="-233363" lvl="0" marL="466726" marR="0" rtl="0" algn="l">
-              <a:lnSpc>
-                <a:spcPct val="100000"/>
-              </a:lnSpc>
-              <a:spcBef>
-                <a:spcPts val="0"/>
-              </a:spcBef>
-              <a:spcAft>
-                <a:spcPts val="0"/>
-              </a:spcAft>
-              <a:buClr>
-                <a:srgbClr val="2F5496"/>
-              </a:buClr>
-              <a:buSzPts val="1800"/>
-              <a:buFont typeface="Calibri"/>
-              <a:buChar char="•"/>
-            </a:pPr>
-            <a:r>
-              <a:rPr b="0" i="0" lang="en-US" sz="1800" u="none" cap="none" strike="noStrike">
-                <a:solidFill>
-                  <a:srgbClr val="2F5496"/>
-                </a:solidFill>
-                <a:latin typeface="Calibri"/>
-                <a:ea typeface="Calibri"/>
-                <a:cs typeface="Calibri"/>
-                <a:sym typeface="Calibri"/>
-              </a:rPr>
-              <a:t>Unambiguous</a:t>
-            </a:r>
-            <a:endParaRPr b="0" i="0" sz="1400" u="none" cap="none" strike="noStrike">
-              <a:solidFill>
-                <a:srgbClr val="000000"/>
-              </a:solidFill>
-              <a:latin typeface="Arial"/>
-              <a:ea typeface="Arial"/>
-              <a:cs typeface="Arial"/>
-              <a:sym typeface="Arial"/>
-            </a:endParaRPr>
-          </a:p>
-          <a:p>
-            <a:pPr indent="-233363" lvl="0" marL="466726" marR="0" rtl="0" algn="l">
-              <a:lnSpc>
-                <a:spcPct val="100000"/>
-              </a:lnSpc>
-              <a:spcBef>
-                <a:spcPts val="0"/>
-              </a:spcBef>
-              <a:spcAft>
-                <a:spcPts val="0"/>
-              </a:spcAft>
-              <a:buClr>
-                <a:srgbClr val="2F5496"/>
-              </a:buClr>
-              <a:buSzPts val="1800"/>
-              <a:buFont typeface="Calibri"/>
-              <a:buChar char="•"/>
-            </a:pPr>
-            <a:r>
-              <a:rPr b="0" i="0" lang="en-US" sz="1800" u="none" cap="none" strike="noStrike">
-                <a:solidFill>
-                  <a:srgbClr val="2F5496"/>
-                </a:solidFill>
-                <a:latin typeface="Calibri"/>
-                <a:ea typeface="Calibri"/>
-                <a:cs typeface="Calibri"/>
-                <a:sym typeface="Calibri"/>
-              </a:rPr>
-              <a:t> Non-overlapping</a:t>
-            </a:r>
-            <a:endParaRPr b="0" i="0" sz="1400" u="none" cap="none" strike="noStrike">
-              <a:solidFill>
-                <a:srgbClr val="000000"/>
-              </a:solidFill>
-              <a:latin typeface="Arial"/>
-              <a:ea typeface="Arial"/>
-              <a:cs typeface="Arial"/>
-              <a:sym typeface="Arial"/>
-            </a:endParaRPr>
-          </a:p>
-          <a:p>
-            <a:pPr indent="-233363" lvl="0" marL="466726" marR="0" rtl="0" algn="l">
-              <a:lnSpc>
-                <a:spcPct val="100000"/>
-              </a:lnSpc>
-              <a:spcBef>
-                <a:spcPts val="0"/>
-              </a:spcBef>
-              <a:spcAft>
-                <a:spcPts val="0"/>
-              </a:spcAft>
-              <a:buClr>
-                <a:srgbClr val="2F5496"/>
-              </a:buClr>
-              <a:buSzPts val="1800"/>
-              <a:buFont typeface="Calibri"/>
-              <a:buChar char="•"/>
-            </a:pPr>
-            <a:r>
-              <a:rPr b="0" i="0" lang="en-US" sz="1800" u="none" cap="none" strike="noStrike">
-                <a:solidFill>
-                  <a:srgbClr val="2F5496"/>
-                </a:solidFill>
-                <a:latin typeface="Calibri"/>
-                <a:ea typeface="Calibri"/>
-                <a:cs typeface="Calibri"/>
-                <a:sym typeface="Calibri"/>
-              </a:rPr>
-              <a:t> Complete</a:t>
-            </a:r>
-            <a:endParaRPr b="0" i="0" sz="1400" u="none" cap="none" strike="noStrike">
-              <a:solidFill>
-                <a:srgbClr val="000000"/>
-              </a:solidFill>
-              <a:latin typeface="Arial"/>
-              <a:ea typeface="Arial"/>
-              <a:cs typeface="Arial"/>
-              <a:sym typeface="Arial"/>
-            </a:endParaRPr>
-          </a:p>
-          <a:p>
-            <a:pPr indent="-233363" lvl="0" marL="466726" marR="0" rtl="0" algn="l">
-              <a:lnSpc>
-                <a:spcPct val="100000"/>
-              </a:lnSpc>
-              <a:spcBef>
-                <a:spcPts val="0"/>
-              </a:spcBef>
-              <a:spcAft>
-                <a:spcPts val="0"/>
-              </a:spcAft>
-              <a:buClr>
-                <a:srgbClr val="2F5496"/>
-              </a:buClr>
-              <a:buSzPts val="1800"/>
-              <a:buFont typeface="Calibri"/>
-              <a:buChar char="•"/>
-            </a:pPr>
-            <a:r>
-              <a:rPr b="0" i="0" lang="en-US" sz="1800" u="none" cap="none" strike="noStrike">
-                <a:solidFill>
-                  <a:srgbClr val="2F5496"/>
-                </a:solidFill>
-                <a:latin typeface="Calibri"/>
-                <a:ea typeface="Calibri"/>
-                <a:cs typeface="Calibri"/>
-                <a:sym typeface="Calibri"/>
-              </a:rPr>
-              <a:t> Testable</a:t>
-            </a:r>
-            <a:endParaRPr b="0" i="0" sz="1400" u="none" cap="none" strike="noStrike">
-              <a:solidFill>
-                <a:srgbClr val="000000"/>
-              </a:solidFill>
-              <a:latin typeface="Arial"/>
-              <a:ea typeface="Arial"/>
-              <a:cs typeface="Arial"/>
-              <a:sym typeface="Arial"/>
-            </a:endParaRPr>
-          </a:p>
-          <a:p>
-            <a:pPr indent="-233363" lvl="0" marL="466726" marR="0" rtl="0" algn="l">
-              <a:lnSpc>
-                <a:spcPct val="100000"/>
-              </a:lnSpc>
-              <a:spcBef>
-                <a:spcPts val="0"/>
-              </a:spcBef>
-              <a:spcAft>
-                <a:spcPts val="0"/>
-              </a:spcAft>
-              <a:buClr>
-                <a:srgbClr val="2F5496"/>
-              </a:buClr>
-              <a:buSzPts val="1800"/>
-              <a:buFont typeface="Calibri"/>
-              <a:buChar char="•"/>
-            </a:pPr>
-            <a:r>
-              <a:rPr b="0" i="0" lang="en-US" sz="1800" u="none" cap="none" strike="noStrike">
-                <a:solidFill>
-                  <a:srgbClr val="2F5496"/>
-                </a:solidFill>
-                <a:latin typeface="Calibri"/>
-                <a:ea typeface="Calibri"/>
-                <a:cs typeface="Calibri"/>
-                <a:sym typeface="Calibri"/>
-              </a:rPr>
-              <a:t> Clearly stated</a:t>
-            </a:r>
-            <a:endParaRPr b="0" i="0" sz="1400" u="none" cap="none" strike="noStrike">
-              <a:solidFill>
-                <a:srgbClr val="000000"/>
-              </a:solidFill>
-              <a:latin typeface="Arial"/>
-              <a:ea typeface="Arial"/>
-              <a:cs typeface="Arial"/>
-              <a:sym typeface="Arial"/>
-            </a:endParaRPr>
-          </a:p>
-          <a:p>
-            <a:pPr indent="-233363" lvl="0" marL="466726" marR="0" rtl="0" algn="l">
-              <a:lnSpc>
-                <a:spcPct val="100000"/>
-              </a:lnSpc>
-              <a:spcBef>
-                <a:spcPts val="0"/>
-              </a:spcBef>
-              <a:spcAft>
-                <a:spcPts val="0"/>
-              </a:spcAft>
-              <a:buClr>
-                <a:srgbClr val="2F5496"/>
-              </a:buClr>
-              <a:buSzPts val="1800"/>
-              <a:buFont typeface="Calibri"/>
-              <a:buChar char="•"/>
-            </a:pPr>
-            <a:r>
-              <a:rPr b="0" i="0" lang="en-US" sz="1800" u="none" cap="none" strike="noStrike">
-                <a:solidFill>
-                  <a:srgbClr val="2F5496"/>
-                </a:solidFill>
-                <a:latin typeface="Calibri"/>
-                <a:ea typeface="Calibri"/>
-                <a:cs typeface="Calibri"/>
-                <a:sym typeface="Calibri"/>
-              </a:rPr>
-              <a:t> Consistent</a:t>
-            </a:r>
-            <a:endParaRPr b="0" i="0" sz="1400" u="none" cap="none" strike="noStrike">
-              <a:solidFill>
-                <a:srgbClr val="000000"/>
-              </a:solidFill>
-              <a:latin typeface="Arial"/>
-              <a:ea typeface="Arial"/>
-              <a:cs typeface="Arial"/>
-              <a:sym typeface="Arial"/>
-            </a:endParaRPr>
-          </a:p>
-          <a:p>
-            <a:pPr indent="-233363" lvl="0" marL="466726" marR="0" rtl="0" algn="l">
-              <a:lnSpc>
-                <a:spcPct val="100000"/>
-              </a:lnSpc>
-              <a:spcBef>
-                <a:spcPts val="0"/>
-              </a:spcBef>
-              <a:spcAft>
-                <a:spcPts val="0"/>
-              </a:spcAft>
-              <a:buClr>
-                <a:srgbClr val="2F5496"/>
-              </a:buClr>
-              <a:buSzPts val="1800"/>
-              <a:buFont typeface="Calibri"/>
-              <a:buChar char="•"/>
-            </a:pPr>
-            <a:r>
-              <a:rPr b="0" i="0" lang="en-US" sz="1800" u="none" cap="none" strike="noStrike">
-                <a:solidFill>
-                  <a:srgbClr val="2F5496"/>
-                </a:solidFill>
-                <a:latin typeface="Calibri"/>
-                <a:ea typeface="Calibri"/>
-                <a:cs typeface="Calibri"/>
-                <a:sym typeface="Calibri"/>
-              </a:rPr>
-              <a:t> Correct</a:t>
-            </a:r>
-            <a:endParaRPr b="0" i="0" sz="1400" u="none" cap="none" strike="noStrike">
-              <a:solidFill>
-                <a:srgbClr val="000000"/>
-              </a:solidFill>
-              <a:latin typeface="Arial"/>
-              <a:ea typeface="Arial"/>
-              <a:cs typeface="Arial"/>
-              <a:sym typeface="Arial"/>
-            </a:endParaRPr>
-          </a:p>
-          <a:p>
-            <a:pPr indent="-233363" lvl="0" marL="466726" marR="0" rtl="0" algn="l">
-              <a:lnSpc>
-                <a:spcPct val="100000"/>
-              </a:lnSpc>
-              <a:spcBef>
-                <a:spcPts val="0"/>
-              </a:spcBef>
-              <a:spcAft>
-                <a:spcPts val="0"/>
-              </a:spcAft>
-              <a:buClr>
-                <a:srgbClr val="2F5496"/>
-              </a:buClr>
-              <a:buSzPts val="1800"/>
-              <a:buFont typeface="Calibri"/>
-              <a:buChar char="•"/>
-            </a:pPr>
-            <a:r>
-              <a:rPr b="0" i="0" lang="en-US" sz="1800" u="none" cap="none" strike="noStrike">
-                <a:solidFill>
-                  <a:srgbClr val="2F5496"/>
-                </a:solidFill>
-                <a:latin typeface="Calibri"/>
-                <a:ea typeface="Calibri"/>
-                <a:cs typeface="Calibri"/>
-                <a:sym typeface="Calibri"/>
-              </a:rPr>
-              <a:t> Modifiable</a:t>
-            </a:r>
-            <a:endParaRPr b="0" i="0" sz="1400" u="none" cap="none" strike="noStrike">
-              <a:solidFill>
-                <a:srgbClr val="000000"/>
-              </a:solidFill>
-              <a:latin typeface="Arial"/>
-              <a:ea typeface="Arial"/>
-              <a:cs typeface="Arial"/>
-              <a:sym typeface="Arial"/>
-            </a:endParaRPr>
-          </a:p>
-          <a:p>
-            <a:pPr indent="-233363" lvl="0" marL="466726" marR="0" rtl="0" algn="l">
-              <a:lnSpc>
-                <a:spcPct val="100000"/>
-              </a:lnSpc>
-              <a:spcBef>
-                <a:spcPts val="0"/>
-              </a:spcBef>
-              <a:spcAft>
-                <a:spcPts val="0"/>
-              </a:spcAft>
-              <a:buClr>
-                <a:srgbClr val="2F5496"/>
-              </a:buClr>
-              <a:buSzPts val="1800"/>
-              <a:buFont typeface="Calibri"/>
-              <a:buChar char="•"/>
-            </a:pPr>
-            <a:r>
-              <a:rPr b="0" i="0" lang="en-US" sz="1800" u="none" cap="none" strike="noStrike">
-                <a:solidFill>
-                  <a:srgbClr val="2F5496"/>
-                </a:solidFill>
-                <a:latin typeface="Calibri"/>
-                <a:ea typeface="Calibri"/>
-                <a:cs typeface="Calibri"/>
-                <a:sym typeface="Calibri"/>
-              </a:rPr>
-              <a:t> Prioritized</a:t>
-            </a:r>
-            <a:endParaRPr b="0" i="0" sz="1400" u="none" cap="none" strike="noStrike">
-              <a:solidFill>
-                <a:srgbClr val="000000"/>
-              </a:solidFill>
-              <a:latin typeface="Arial"/>
-              <a:ea typeface="Arial"/>
-              <a:cs typeface="Arial"/>
-              <a:sym typeface="Arial"/>
-            </a:endParaRPr>
-          </a:p>
-          <a:p>
-            <a:pPr indent="-233363" lvl="0" marL="466726" marR="0" rtl="0" algn="l">
-              <a:lnSpc>
-                <a:spcPct val="100000"/>
-              </a:lnSpc>
-              <a:spcBef>
-                <a:spcPts val="0"/>
-              </a:spcBef>
-              <a:spcAft>
-                <a:spcPts val="0"/>
-              </a:spcAft>
-              <a:buClr>
-                <a:srgbClr val="2F5496"/>
-              </a:buClr>
-              <a:buSzPts val="1800"/>
-              <a:buFont typeface="Calibri"/>
-              <a:buChar char="•"/>
-            </a:pPr>
-            <a:r>
-              <a:rPr b="0" i="0" lang="en-US" sz="1800" u="none" cap="none" strike="noStrike">
-                <a:solidFill>
-                  <a:srgbClr val="2F5496"/>
-                </a:solidFill>
-                <a:latin typeface="Calibri"/>
-                <a:ea typeface="Calibri"/>
-                <a:cs typeface="Calibri"/>
-                <a:sym typeface="Calibri"/>
-              </a:rPr>
-              <a:t> Traceable &amp; Traced</a:t>
-            </a:r>
-            <a:endParaRPr b="0" i="0" sz="1400" u="none" cap="none" strike="noStrike">
-              <a:solidFill>
-                <a:srgbClr val="000000"/>
-              </a:solidFill>
-              <a:latin typeface="Arial"/>
-              <a:ea typeface="Arial"/>
-              <a:cs typeface="Arial"/>
-              <a:sym typeface="Arial"/>
-            </a:endParaRPr>
-          </a:p>
-          <a:p>
-            <a:pPr indent="-233363" lvl="0" marL="466726" marR="0" rtl="0" algn="l">
-              <a:lnSpc>
-                <a:spcPct val="100000"/>
-              </a:lnSpc>
-              <a:spcBef>
-                <a:spcPts val="0"/>
-              </a:spcBef>
-              <a:spcAft>
-                <a:spcPts val="0"/>
-              </a:spcAft>
-              <a:buClr>
-                <a:srgbClr val="2F5496"/>
-              </a:buClr>
-              <a:buSzPts val="1800"/>
-              <a:buFont typeface="Calibri"/>
-              <a:buChar char="•"/>
-            </a:pPr>
-            <a:r>
-              <a:rPr b="0" i="0" lang="en-US" sz="1800" u="none" cap="none" strike="noStrike">
-                <a:solidFill>
-                  <a:srgbClr val="2F5496"/>
-                </a:solidFill>
-                <a:latin typeface="Calibri"/>
-                <a:ea typeface="Calibri"/>
-                <a:cs typeface="Calibri"/>
-                <a:sym typeface="Calibri"/>
-              </a:rPr>
-              <a:t> Uniquely identified</a:t>
-            </a:r>
-            <a:endParaRPr b="0" i="0" sz="1400" u="none" cap="none" strike="noStrike">
-              <a:solidFill>
-                <a:srgbClr val="000000"/>
-              </a:solidFill>
-              <a:latin typeface="Arial"/>
-              <a:ea typeface="Arial"/>
-              <a:cs typeface="Arial"/>
-              <a:sym typeface="Arial"/>
-            </a:endParaRPr>
-          </a:p>
-          <a:p>
-            <a:pPr indent="-233363" lvl="0" marL="466726" marR="0" rtl="0" algn="l">
-              <a:lnSpc>
-                <a:spcPct val="100000"/>
-              </a:lnSpc>
-              <a:spcBef>
-                <a:spcPts val="0"/>
-              </a:spcBef>
-              <a:spcAft>
-                <a:spcPts val="0"/>
-              </a:spcAft>
-              <a:buClr>
-                <a:srgbClr val="2F5496"/>
-              </a:buClr>
-              <a:buSzPts val="1800"/>
-              <a:buFont typeface="Calibri"/>
-              <a:buChar char="•"/>
-            </a:pPr>
-            <a:r>
-              <a:rPr b="0" i="0" lang="en-US" sz="1800" u="none" cap="none" strike="noStrike">
-                <a:solidFill>
-                  <a:srgbClr val="2F5496"/>
-                </a:solidFill>
-                <a:latin typeface="Calibri"/>
-                <a:ea typeface="Calibri"/>
-                <a:cs typeface="Calibri"/>
-                <a:sym typeface="Calibri"/>
-              </a:rPr>
-              <a:t> Design-Free</a:t>
-            </a:r>
-            <a:endParaRPr b="0" i="0" sz="1400" u="none" cap="none" strike="noStrike">
-              <a:solidFill>
-                <a:srgbClr val="000000"/>
-              </a:solidFill>
-              <a:latin typeface="Arial"/>
-              <a:ea typeface="Arial"/>
-              <a:cs typeface="Arial"/>
-              <a:sym typeface="Arial"/>
-            </a:endParaRPr>
-          </a:p>
-        </p:txBody>
-      </p:sp>
-      <p:grpSp>
-        <p:nvGrpSpPr>
-          <p:cNvPr id="118" name="Google Shape;118;p4"/>
-          <p:cNvGrpSpPr/>
-          <p:nvPr/>
-        </p:nvGrpSpPr>
-        <p:grpSpPr>
-          <a:xfrm>
-            <a:off x="164814" y="92935"/>
-            <a:ext cx="335559" cy="369332"/>
-            <a:chOff x="369116" y="375299"/>
-            <a:chExt cx="335559" cy="369332"/>
-          </a:xfrm>
-        </p:grpSpPr>
-        <p:sp>
-          <p:nvSpPr>
-            <p:cNvPr id="119" name="Google Shape;119;p4"/>
-            <p:cNvSpPr/>
-            <p:nvPr/>
-          </p:nvSpPr>
-          <p:spPr>
-            <a:xfrm>
-              <a:off x="369116" y="411061"/>
-              <a:ext cx="335559" cy="297809"/>
-            </a:xfrm>
-            <a:prstGeom prst="ellipse">
-              <a:avLst/>
-            </a:prstGeom>
-            <a:solidFill>
-              <a:schemeClr val="lt1"/>
-            </a:solidFill>
-            <a:ln cap="flat" cmpd="sng" w="12700">
-              <a:solidFill>
-                <a:srgbClr val="31538F"/>
-              </a:solidFill>
-              <a:prstDash val="solid"/>
-              <a:miter lim="800000"/>
-              <a:headEnd len="sm" w="sm" type="none"/>
-              <a:tailEnd len="sm" w="sm" type="none"/>
-            </a:ln>
-          </p:spPr>
-          <p:txBody>
-            <a:bodyPr anchorCtr="0" anchor="ctr" bIns="45700" lIns="91425" spcFirstLastPara="1" rIns="91425" wrap="square" tIns="45700">
-              <a:noAutofit/>
-            </a:bodyPr>
-            <a:lstStyle/>
-            <a:p>
-              <a:pPr indent="0" lvl="0" marL="0" marR="0" rtl="0" algn="ctr">
-                <a:lnSpc>
-                  <a:spcPct val="100000"/>
-                </a:lnSpc>
-                <a:spcBef>
-                  <a:spcPts val="0"/>
-                </a:spcBef>
-                <a:spcAft>
-                  <a:spcPts val="0"/>
-                </a:spcAft>
-                <a:buClr>
-                  <a:srgbClr val="000000"/>
-                </a:buClr>
-                <a:buSzPts val="1800"/>
-                <a:buFont typeface="Arial"/>
-                <a:buNone/>
-              </a:pPr>
-              <a:r>
-                <a:t/>
-              </a:r>
-              <a:endParaRPr b="0" i="0" sz="1800" u="none" cap="none" strike="noStrike">
-                <a:solidFill>
-                  <a:schemeClr val="lt1"/>
-                </a:solidFill>
-                <a:latin typeface="Calibri"/>
-                <a:ea typeface="Calibri"/>
-                <a:cs typeface="Calibri"/>
-                <a:sym typeface="Calibri"/>
-              </a:endParaRPr>
-            </a:p>
-          </p:txBody>
-        </p:sp>
-        <p:sp>
-          <p:nvSpPr>
-            <p:cNvPr id="120" name="Google Shape;120;p4"/>
-            <p:cNvSpPr txBox="1"/>
-            <p:nvPr/>
-          </p:nvSpPr>
-          <p:spPr>
-            <a:xfrm>
-              <a:off x="394601" y="375299"/>
-              <a:ext cx="301686" cy="369332"/>
-            </a:xfrm>
-            <a:prstGeom prst="rect">
-              <a:avLst/>
-            </a:prstGeom>
-            <a:noFill/>
-            <a:ln>
-              <a:noFill/>
-            </a:ln>
-          </p:spPr>
-          <p:txBody>
-            <a:bodyPr anchorCtr="0" anchor="t" bIns="45700" lIns="91425" spcFirstLastPara="1" rIns="91425" wrap="square" tIns="45700">
-              <a:spAutoFit/>
-            </a:bodyPr>
-            <a:lstStyle/>
-            <a:p>
-              <a:pPr indent="0" lvl="0" marL="0" marR="0" rtl="0" algn="l">
-                <a:lnSpc>
-                  <a:spcPct val="100000"/>
-                </a:lnSpc>
-                <a:spcBef>
-                  <a:spcPts val="0"/>
-                </a:spcBef>
-                <a:spcAft>
-                  <a:spcPts val="0"/>
-                </a:spcAft>
-                <a:buClr>
-                  <a:srgbClr val="000000"/>
-                </a:buClr>
-                <a:buSzPts val="1800"/>
-                <a:buFont typeface="Arial"/>
-                <a:buNone/>
-              </a:pPr>
-              <a:r>
-                <a:rPr b="0" i="0" lang="en-US" sz="1800" u="none" cap="none" strike="noStrike">
-                  <a:solidFill>
-                    <a:schemeClr val="dk1"/>
-                  </a:solidFill>
-                  <a:latin typeface="Calibri"/>
-                  <a:ea typeface="Calibri"/>
-                  <a:cs typeface="Calibri"/>
-                  <a:sym typeface="Calibri"/>
-                </a:rPr>
-                <a:t>2</a:t>
-              </a:r>
-              <a:endParaRPr b="0" i="0" sz="1400" u="none" cap="none" strike="noStrike">
-                <a:solidFill>
-                  <a:srgbClr val="000000"/>
-                </a:solidFill>
-                <a:latin typeface="Arial"/>
-                <a:ea typeface="Arial"/>
-                <a:cs typeface="Arial"/>
-                <a:sym typeface="Arial"/>
-              </a:endParaRPr>
-            </a:p>
-          </p:txBody>
-        </p:sp>
-      </p:grpSp>
-    </p:spTree>
-  </p:cSld>
-  <p:clrMapOvr>
-    <a:masterClrMapping/>
-  </p:clrMapOvr>
-</p:sld>
-</file>
-
-<file path=ppt/slides/slide6.xml><?xml version="1.0" encoding="utf-8"?>
-<p:sld xmlns:a="http://schemas.openxmlformats.org/drawingml/2006/main" xmlns:r="http://schemas.openxmlformats.org/officeDocument/2006/relationships" xmlns:mc="http://schemas.openxmlformats.org/markup-compatibility/2006" xmlns:mv="urn:schemas-microsoft-com:mac:vml" xmlns:p="http://schemas.openxmlformats.org/presentationml/2006/main" xmlns:c="http://schemas.openxmlformats.org/drawingml/2006/chart" xmlns:dgm="http://schemas.openxmlformats.org/drawingml/2006/diagram" xmlns:o="urn:schemas-microsoft-com:office:office" xmlns:v="urn:schemas-microsoft-com:vml" xmlns:pvml="urn:schemas-microsoft-com:office:powerpoint" xmlns:com="http://schemas.openxmlformats.org/drawingml/2006/compatibility" xmlns:p14="http://schemas.microsoft.com/office/powerpoint/2010/main" xmlns:p15="http://schemas.microsoft.com/office/powerpoint/2012/main" xmlns:ahyp="http://schemas.microsoft.com/office/drawing/2018/hyperlinkcolor">
-  <p:cSld>
-    <p:spTree>
-      <p:nvGrpSpPr>
-        <p:cNvPr id="124" name="Shape 124"/>
-        <p:cNvGrpSpPr/>
-        <p:nvPr/>
-      </p:nvGrpSpPr>
-      <p:grpSpPr>
-        <a:xfrm>
-          <a:off x="0" y="0"/>
-          <a:ext cx="0" cy="0"/>
-          <a:chOff x="0" y="0"/>
-          <a:chExt cx="0" cy="0"/>
-        </a:xfrm>
-      </p:grpSpPr>
-      <p:pic>
-        <p:nvPicPr>
-          <p:cNvPr id="125" name="Google Shape;125;p3"/>
-          <p:cNvPicPr preferRelativeResize="0"/>
-          <p:nvPr/>
-        </p:nvPicPr>
-        <p:blipFill rotWithShape="1">
-          <a:blip r:embed="rId3">
-            <a:alphaModFix/>
-          </a:blip>
-          <a:srcRect b="0" l="0" r="0" t="0"/>
-          <a:stretch/>
-        </p:blipFill>
-        <p:spPr>
-          <a:xfrm>
-            <a:off x="1520640" y="0"/>
-            <a:ext cx="9150719" cy="6858000"/>
-          </a:xfrm>
-          <a:prstGeom prst="rect">
-            <a:avLst/>
-          </a:prstGeom>
-          <a:noFill/>
-          <a:ln>
-            <a:noFill/>
-          </a:ln>
-        </p:spPr>
-      </p:pic>
-      <p:grpSp>
-        <p:nvGrpSpPr>
-          <p:cNvPr id="126" name="Google Shape;126;p3"/>
-          <p:cNvGrpSpPr/>
-          <p:nvPr/>
-        </p:nvGrpSpPr>
-        <p:grpSpPr>
-          <a:xfrm>
-            <a:off x="169800" y="91156"/>
-            <a:ext cx="335559" cy="369332"/>
-            <a:chOff x="369116" y="375299"/>
-            <a:chExt cx="335559" cy="369332"/>
-          </a:xfrm>
-        </p:grpSpPr>
-        <p:sp>
-          <p:nvSpPr>
-            <p:cNvPr id="127" name="Google Shape;127;p3"/>
-            <p:cNvSpPr/>
-            <p:nvPr/>
-          </p:nvSpPr>
-          <p:spPr>
-            <a:xfrm>
-              <a:off x="369116" y="411061"/>
-              <a:ext cx="335559" cy="297809"/>
-            </a:xfrm>
-            <a:prstGeom prst="ellipse">
-              <a:avLst/>
-            </a:prstGeom>
-            <a:solidFill>
-              <a:schemeClr val="lt1"/>
-            </a:solidFill>
-            <a:ln cap="flat" cmpd="sng" w="12700">
-              <a:solidFill>
-                <a:srgbClr val="31538F"/>
-              </a:solidFill>
-              <a:prstDash val="solid"/>
-              <a:miter lim="800000"/>
-              <a:headEnd len="sm" w="sm" type="none"/>
-              <a:tailEnd len="sm" w="sm" type="none"/>
-            </a:ln>
-          </p:spPr>
-          <p:txBody>
-            <a:bodyPr anchorCtr="0" anchor="ctr" bIns="45700" lIns="91425" spcFirstLastPara="1" rIns="91425" wrap="square" tIns="45700">
-              <a:noAutofit/>
-            </a:bodyPr>
-            <a:lstStyle/>
-            <a:p>
-              <a:pPr indent="0" lvl="0" marL="0" marR="0" rtl="0" algn="ctr">
-                <a:lnSpc>
-                  <a:spcPct val="100000"/>
-                </a:lnSpc>
-                <a:spcBef>
-                  <a:spcPts val="0"/>
-                </a:spcBef>
-                <a:spcAft>
-                  <a:spcPts val="0"/>
-                </a:spcAft>
-                <a:buClr>
-                  <a:srgbClr val="000000"/>
-                </a:buClr>
-                <a:buSzPts val="1800"/>
-                <a:buFont typeface="Arial"/>
-                <a:buNone/>
-              </a:pPr>
-              <a:r>
-                <a:t/>
-              </a:r>
-              <a:endParaRPr b="0" i="0" sz="1800" u="none" cap="none" strike="noStrike">
-                <a:solidFill>
-                  <a:schemeClr val="lt1"/>
-                </a:solidFill>
-                <a:latin typeface="Calibri"/>
-                <a:ea typeface="Calibri"/>
-                <a:cs typeface="Calibri"/>
-                <a:sym typeface="Calibri"/>
-              </a:endParaRPr>
-            </a:p>
-          </p:txBody>
-        </p:sp>
-        <p:sp>
-          <p:nvSpPr>
-            <p:cNvPr id="128" name="Google Shape;128;p3"/>
-            <p:cNvSpPr txBox="1"/>
-            <p:nvPr/>
-          </p:nvSpPr>
-          <p:spPr>
-            <a:xfrm>
-              <a:off x="394601" y="375299"/>
-              <a:ext cx="301686" cy="369332"/>
-            </a:xfrm>
-            <a:prstGeom prst="rect">
-              <a:avLst/>
-            </a:prstGeom>
-            <a:noFill/>
-            <a:ln>
-              <a:noFill/>
-            </a:ln>
-          </p:spPr>
-          <p:txBody>
-            <a:bodyPr anchorCtr="0" anchor="t" bIns="45700" lIns="91425" spcFirstLastPara="1" rIns="91425" wrap="square" tIns="45700">
-              <a:spAutoFit/>
-            </a:bodyPr>
-            <a:lstStyle/>
-            <a:p>
-              <a:pPr indent="0" lvl="0" marL="0" marR="0" rtl="0" algn="l">
-                <a:lnSpc>
-                  <a:spcPct val="100000"/>
-                </a:lnSpc>
-                <a:spcBef>
-                  <a:spcPts val="0"/>
-                </a:spcBef>
-                <a:spcAft>
-                  <a:spcPts val="0"/>
-                </a:spcAft>
-                <a:buClr>
-                  <a:srgbClr val="000000"/>
-                </a:buClr>
-                <a:buSzPts val="1800"/>
-                <a:buFont typeface="Arial"/>
-                <a:buNone/>
-              </a:pPr>
-              <a:r>
-                <a:rPr b="0" i="0" lang="en-US" sz="1800" u="none" cap="none" strike="noStrike">
-                  <a:solidFill>
-                    <a:schemeClr val="dk1"/>
-                  </a:solidFill>
-                  <a:latin typeface="Calibri"/>
-                  <a:ea typeface="Calibri"/>
-                  <a:cs typeface="Calibri"/>
-                  <a:sym typeface="Calibri"/>
-                </a:rPr>
-                <a:t>1</a:t>
-              </a:r>
-              <a:endParaRPr b="0" i="0" sz="1400" u="none" cap="none" strike="noStrike">
-                <a:solidFill>
-                  <a:srgbClr val="000000"/>
-                </a:solidFill>
-                <a:latin typeface="Arial"/>
-                <a:ea typeface="Arial"/>
-                <a:cs typeface="Arial"/>
-                <a:sym typeface="Arial"/>
-              </a:endParaRPr>
-            </a:p>
-          </p:txBody>
-        </p:sp>
-      </p:grpSp>
-      <p:sp>
-        <p:nvSpPr>
-          <p:cNvPr id="129" name="Google Shape;129;p3"/>
-          <p:cNvSpPr txBox="1"/>
-          <p:nvPr/>
-        </p:nvSpPr>
-        <p:spPr>
-          <a:xfrm>
-            <a:off x="5647498" y="350375"/>
-            <a:ext cx="5784481" cy="923330"/>
-          </a:xfrm>
-          <a:prstGeom prst="rect">
-            <a:avLst/>
-          </a:prstGeom>
-          <a:noFill/>
-          <a:ln>
-            <a:noFill/>
-          </a:ln>
-        </p:spPr>
-        <p:txBody>
-          <a:bodyPr anchorCtr="0" anchor="t" bIns="45700" lIns="91425" spcFirstLastPara="1" rIns="91425" wrap="square" tIns="45700">
-            <a:spAutoFit/>
-          </a:bodyPr>
-          <a:lstStyle/>
-          <a:p>
-            <a:pPr indent="0" lvl="0" marL="0" marR="0" rtl="0" algn="l">
-              <a:lnSpc>
-                <a:spcPct val="100000"/>
-              </a:lnSpc>
-              <a:spcBef>
-                <a:spcPts val="0"/>
-              </a:spcBef>
-              <a:spcAft>
-                <a:spcPts val="0"/>
-              </a:spcAft>
-              <a:buClr>
-                <a:srgbClr val="000000"/>
-              </a:buClr>
-              <a:buSzPts val="1800"/>
-              <a:buFont typeface="Arial"/>
-              <a:buNone/>
-            </a:pPr>
-            <a:r>
-              <a:rPr b="0" i="0" lang="en-US" sz="1800" u="none" cap="none" strike="noStrike">
-                <a:solidFill>
-                  <a:srgbClr val="2F5496"/>
-                </a:solidFill>
-                <a:latin typeface="Calibri"/>
-                <a:ea typeface="Calibri"/>
-                <a:cs typeface="Calibri"/>
-                <a:sym typeface="Calibri"/>
-              </a:rPr>
-              <a:t>Taxonomy tree for the requirements space shows how various terms relate to each other. This in turn offers an insight into each term.</a:t>
-            </a:r>
-            <a:endParaRPr b="0" i="0" sz="1400" u="none" cap="none" strike="noStrike">
-              <a:solidFill>
-                <a:srgbClr val="000000"/>
-              </a:solidFill>
-              <a:latin typeface="Arial"/>
-              <a:ea typeface="Arial"/>
-              <a:cs typeface="Arial"/>
-              <a:sym typeface="Arial"/>
-            </a:endParaRPr>
-          </a:p>
-        </p:txBody>
-      </p:sp>
-    </p:spTree>
-  </p:cSld>
-  <p:clrMapOvr>
-    <a:masterClrMapping/>
-  </p:clrMapOvr>
-</p:sld>
-</file>
-
-<file path=ppt/slides/slide7.xml><?xml version="1.0" encoding="utf-8"?>
-<p:sld xmlns:a="http://schemas.openxmlformats.org/drawingml/2006/main" xmlns:r="http://schemas.openxmlformats.org/officeDocument/2006/relationships" xmlns:mc="http://schemas.openxmlformats.org/markup-compatibility/2006" xmlns:mv="urn:schemas-microsoft-com:mac:vml" xmlns:p="http://schemas.openxmlformats.org/presentationml/2006/main" xmlns:c="http://schemas.openxmlformats.org/drawingml/2006/chart" xmlns:dgm="http://schemas.openxmlformats.org/drawingml/2006/diagram" xmlns:o="urn:schemas-microsoft-com:office:office" xmlns:v="urn:schemas-microsoft-com:vml" xmlns:pvml="urn:schemas-microsoft-com:office:powerpoint" xmlns:com="http://schemas.openxmlformats.org/drawingml/2006/compatibility" xmlns:p14="http://schemas.microsoft.com/office/powerpoint/2010/main" xmlns:p15="http://schemas.microsoft.com/office/powerpoint/2012/main" xmlns:ahyp="http://schemas.microsoft.com/office/drawing/2018/hyperlinkcolor">
-  <p:cSld>
-    <p:spTree>
-      <p:nvGrpSpPr>
-        <p:cNvPr id="133" name="Shape 133"/>
-        <p:cNvGrpSpPr/>
-        <p:nvPr/>
-      </p:nvGrpSpPr>
-      <p:grpSpPr>
-        <a:xfrm>
-          <a:off x="0" y="0"/>
-          <a:ext cx="0" cy="0"/>
-          <a:chOff x="0" y="0"/>
-          <a:chExt cx="0" cy="0"/>
-        </a:xfrm>
-      </p:grpSpPr>
-      <p:sp>
-        <p:nvSpPr>
-          <p:cNvPr id="134" name="Google Shape;134;p2"/>
-          <p:cNvSpPr/>
-          <p:nvPr/>
-        </p:nvSpPr>
-        <p:spPr>
-          <a:xfrm>
-            <a:off x="4805570" y="2406597"/>
-            <a:ext cx="2509630" cy="2077279"/>
-          </a:xfrm>
-          <a:prstGeom prst="hexagon">
-            <a:avLst>
-              <a:gd fmla="val 25000" name="adj"/>
-              <a:gd fmla="val 115470" name="vf"/>
-            </a:avLst>
-          </a:prstGeom>
-          <a:noFill/>
-          <a:ln cap="flat" cmpd="sng" w="57150">
-            <a:solidFill>
-              <a:srgbClr val="31538F"/>
-            </a:solidFill>
-            <a:prstDash val="solid"/>
-            <a:miter lim="800000"/>
-            <a:headEnd len="sm" w="sm" type="none"/>
-            <a:tailEnd len="sm" w="sm" type="none"/>
-          </a:ln>
-        </p:spPr>
-        <p:txBody>
-          <a:bodyPr anchorCtr="0" anchor="ctr" bIns="45700" lIns="91425" spcFirstLastPara="1" rIns="91425" wrap="square" tIns="45700">
-            <a:noAutofit/>
-          </a:bodyPr>
-          <a:lstStyle/>
-          <a:p>
-            <a:pPr indent="0" lvl="0" marL="0" marR="0" rtl="0" algn="ctr">
-              <a:lnSpc>
-                <a:spcPct val="100000"/>
-              </a:lnSpc>
-              <a:spcBef>
-                <a:spcPts val="0"/>
-              </a:spcBef>
-              <a:spcAft>
-                <a:spcPts val="0"/>
-              </a:spcAft>
-              <a:buClr>
-                <a:srgbClr val="000000"/>
-              </a:buClr>
-              <a:buSzPts val="1800"/>
-              <a:buFont typeface="Arial"/>
-              <a:buNone/>
-            </a:pPr>
-            <a:r>
-              <a:t/>
-            </a:r>
-            <a:endParaRPr b="0" i="0" sz="1800" u="none" cap="none" strike="noStrike">
-              <a:solidFill>
-                <a:schemeClr val="lt1"/>
-              </a:solidFill>
-              <a:latin typeface="Calibri"/>
-              <a:ea typeface="Calibri"/>
-              <a:cs typeface="Calibri"/>
-              <a:sym typeface="Calibri"/>
-            </a:endParaRPr>
-          </a:p>
-        </p:txBody>
-      </p:sp>
-      <p:sp>
-        <p:nvSpPr>
-          <p:cNvPr id="135" name="Google Shape;135;p2"/>
-          <p:cNvSpPr/>
-          <p:nvPr/>
-        </p:nvSpPr>
-        <p:spPr>
-          <a:xfrm>
-            <a:off x="4805570" y="329318"/>
-            <a:ext cx="2509630" cy="2077279"/>
-          </a:xfrm>
-          <a:prstGeom prst="hexagon">
-            <a:avLst>
-              <a:gd fmla="val 25000" name="adj"/>
-              <a:gd fmla="val 115470" name="vf"/>
-            </a:avLst>
-          </a:prstGeom>
-          <a:noFill/>
-          <a:ln cap="flat" cmpd="sng" w="19050">
-            <a:solidFill>
-              <a:srgbClr val="31538F"/>
-            </a:solidFill>
-            <a:prstDash val="solid"/>
-            <a:miter lim="800000"/>
-            <a:headEnd len="sm" w="sm" type="none"/>
-            <a:tailEnd len="sm" w="sm" type="none"/>
-          </a:ln>
-        </p:spPr>
-        <p:txBody>
-          <a:bodyPr anchorCtr="0" anchor="ctr" bIns="45700" lIns="91425" spcFirstLastPara="1" rIns="91425" wrap="square" tIns="45700">
-            <a:noAutofit/>
-          </a:bodyPr>
-          <a:lstStyle/>
-          <a:p>
-            <a:pPr indent="0" lvl="0" marL="0" marR="0" rtl="0" algn="ctr">
-              <a:lnSpc>
-                <a:spcPct val="100000"/>
-              </a:lnSpc>
-              <a:spcBef>
-                <a:spcPts val="0"/>
-              </a:spcBef>
-              <a:spcAft>
-                <a:spcPts val="0"/>
-              </a:spcAft>
-              <a:buClr>
-                <a:srgbClr val="000000"/>
-              </a:buClr>
-              <a:buSzPts val="1800"/>
-              <a:buFont typeface="Arial"/>
-              <a:buNone/>
-            </a:pPr>
-            <a:r>
-              <a:t/>
-            </a:r>
-            <a:endParaRPr b="0" i="0" sz="1800" u="none" cap="none" strike="noStrike">
-              <a:solidFill>
-                <a:schemeClr val="lt1"/>
-              </a:solidFill>
-              <a:latin typeface="Calibri"/>
-              <a:ea typeface="Calibri"/>
-              <a:cs typeface="Calibri"/>
-              <a:sym typeface="Calibri"/>
-            </a:endParaRPr>
-          </a:p>
-        </p:txBody>
-      </p:sp>
-      <p:sp>
-        <p:nvSpPr>
-          <p:cNvPr id="136" name="Google Shape;136;p2"/>
-          <p:cNvSpPr/>
-          <p:nvPr/>
-        </p:nvSpPr>
-        <p:spPr>
-          <a:xfrm>
-            <a:off x="6816588" y="1362985"/>
-            <a:ext cx="2509630" cy="2077279"/>
-          </a:xfrm>
-          <a:prstGeom prst="hexagon">
-            <a:avLst>
-              <a:gd fmla="val 25000" name="adj"/>
-              <a:gd fmla="val 115470" name="vf"/>
-            </a:avLst>
-          </a:prstGeom>
-          <a:noFill/>
-          <a:ln cap="flat" cmpd="sng" w="19050">
-            <a:solidFill>
-              <a:srgbClr val="31538F"/>
-            </a:solidFill>
-            <a:prstDash val="solid"/>
-            <a:miter lim="800000"/>
-            <a:headEnd len="sm" w="sm" type="none"/>
-            <a:tailEnd len="sm" w="sm" type="none"/>
-          </a:ln>
-        </p:spPr>
-        <p:txBody>
-          <a:bodyPr anchorCtr="0" anchor="ctr" bIns="45700" lIns="91425" spcFirstLastPara="1" rIns="91425" wrap="square" tIns="45700">
-            <a:noAutofit/>
-          </a:bodyPr>
-          <a:lstStyle/>
-          <a:p>
-            <a:pPr indent="0" lvl="0" marL="0" marR="0" rtl="0" algn="ctr">
-              <a:lnSpc>
-                <a:spcPct val="100000"/>
-              </a:lnSpc>
-              <a:spcBef>
-                <a:spcPts val="0"/>
-              </a:spcBef>
-              <a:spcAft>
-                <a:spcPts val="0"/>
-              </a:spcAft>
-              <a:buClr>
-                <a:srgbClr val="000000"/>
-              </a:buClr>
-              <a:buSzPts val="1800"/>
-              <a:buFont typeface="Arial"/>
-              <a:buNone/>
-            </a:pPr>
-            <a:r>
-              <a:t/>
-            </a:r>
-            <a:endParaRPr b="0" i="0" sz="1800" u="none" cap="none" strike="noStrike">
-              <a:solidFill>
-                <a:schemeClr val="lt1"/>
-              </a:solidFill>
-              <a:latin typeface="Calibri"/>
-              <a:ea typeface="Calibri"/>
-              <a:cs typeface="Calibri"/>
-              <a:sym typeface="Calibri"/>
-            </a:endParaRPr>
-          </a:p>
-        </p:txBody>
-      </p:sp>
-      <p:sp>
-        <p:nvSpPr>
-          <p:cNvPr id="137" name="Google Shape;137;p2"/>
-          <p:cNvSpPr/>
-          <p:nvPr/>
-        </p:nvSpPr>
-        <p:spPr>
-          <a:xfrm>
-            <a:off x="2824370" y="1362986"/>
-            <a:ext cx="2509630" cy="2077279"/>
-          </a:xfrm>
-          <a:prstGeom prst="hexagon">
-            <a:avLst>
-              <a:gd fmla="val 25000" name="adj"/>
-              <a:gd fmla="val 115470" name="vf"/>
-            </a:avLst>
-          </a:prstGeom>
-          <a:noFill/>
-          <a:ln cap="flat" cmpd="sng" w="19050">
-            <a:solidFill>
-              <a:srgbClr val="31538F"/>
-            </a:solidFill>
-            <a:prstDash val="solid"/>
-            <a:miter lim="800000"/>
-            <a:headEnd len="sm" w="sm" type="none"/>
-            <a:tailEnd len="sm" w="sm" type="none"/>
-          </a:ln>
-        </p:spPr>
-        <p:txBody>
-          <a:bodyPr anchorCtr="0" anchor="ctr" bIns="45700" lIns="91425" spcFirstLastPara="1" rIns="91425" wrap="square" tIns="45700">
-            <a:noAutofit/>
-          </a:bodyPr>
-          <a:lstStyle/>
-          <a:p>
-            <a:pPr indent="0" lvl="0" marL="0" marR="0" rtl="0" algn="ctr">
-              <a:lnSpc>
-                <a:spcPct val="100000"/>
-              </a:lnSpc>
-              <a:spcBef>
-                <a:spcPts val="0"/>
-              </a:spcBef>
-              <a:spcAft>
-                <a:spcPts val="0"/>
-              </a:spcAft>
-              <a:buClr>
-                <a:srgbClr val="000000"/>
-              </a:buClr>
-              <a:buSzPts val="1800"/>
-              <a:buFont typeface="Arial"/>
-              <a:buNone/>
-            </a:pPr>
-            <a:r>
-              <a:t/>
-            </a:r>
-            <a:endParaRPr b="0" i="0" sz="1800" u="none" cap="none" strike="noStrike">
-              <a:solidFill>
-                <a:schemeClr val="lt1"/>
-              </a:solidFill>
-              <a:latin typeface="Calibri"/>
-              <a:ea typeface="Calibri"/>
-              <a:cs typeface="Calibri"/>
-              <a:sym typeface="Calibri"/>
-            </a:endParaRPr>
-          </a:p>
-        </p:txBody>
-      </p:sp>
-      <p:sp>
-        <p:nvSpPr>
-          <p:cNvPr id="138" name="Google Shape;138;p2"/>
-          <p:cNvSpPr/>
-          <p:nvPr/>
-        </p:nvSpPr>
-        <p:spPr>
-          <a:xfrm>
-            <a:off x="2819400" y="3440266"/>
-            <a:ext cx="2509630" cy="2077279"/>
-          </a:xfrm>
-          <a:prstGeom prst="hexagon">
-            <a:avLst>
-              <a:gd fmla="val 25000" name="adj"/>
-              <a:gd fmla="val 115470" name="vf"/>
-            </a:avLst>
-          </a:prstGeom>
-          <a:noFill/>
-          <a:ln cap="flat" cmpd="sng" w="19050">
-            <a:solidFill>
-              <a:srgbClr val="31538F"/>
-            </a:solidFill>
-            <a:prstDash val="solid"/>
-            <a:miter lim="800000"/>
-            <a:headEnd len="sm" w="sm" type="none"/>
-            <a:tailEnd len="sm" w="sm" type="none"/>
-          </a:ln>
-        </p:spPr>
-        <p:txBody>
-          <a:bodyPr anchorCtr="0" anchor="ctr" bIns="45700" lIns="91425" spcFirstLastPara="1" rIns="91425" wrap="square" tIns="45700">
-            <a:noAutofit/>
-          </a:bodyPr>
-          <a:lstStyle/>
-          <a:p>
-            <a:pPr indent="0" lvl="0" marL="0" marR="0" rtl="0" algn="ctr">
-              <a:lnSpc>
-                <a:spcPct val="100000"/>
-              </a:lnSpc>
-              <a:spcBef>
-                <a:spcPts val="0"/>
-              </a:spcBef>
-              <a:spcAft>
-                <a:spcPts val="0"/>
-              </a:spcAft>
-              <a:buClr>
-                <a:srgbClr val="000000"/>
-              </a:buClr>
-              <a:buSzPts val="1800"/>
-              <a:buFont typeface="Arial"/>
-              <a:buNone/>
-            </a:pPr>
-            <a:r>
-              <a:t/>
-            </a:r>
-            <a:endParaRPr b="0" i="0" sz="1800" u="none" cap="none" strike="noStrike">
-              <a:solidFill>
-                <a:schemeClr val="lt1"/>
-              </a:solidFill>
-              <a:latin typeface="Calibri"/>
-              <a:ea typeface="Calibri"/>
-              <a:cs typeface="Calibri"/>
-              <a:sym typeface="Calibri"/>
-            </a:endParaRPr>
-          </a:p>
-        </p:txBody>
-      </p:sp>
-      <p:sp>
-        <p:nvSpPr>
-          <p:cNvPr id="139" name="Google Shape;139;p2"/>
-          <p:cNvSpPr/>
-          <p:nvPr/>
-        </p:nvSpPr>
-        <p:spPr>
-          <a:xfrm>
-            <a:off x="6811618" y="3440266"/>
-            <a:ext cx="2509630" cy="2077279"/>
-          </a:xfrm>
-          <a:prstGeom prst="hexagon">
-            <a:avLst>
-              <a:gd fmla="val 25000" name="adj"/>
-              <a:gd fmla="val 115470" name="vf"/>
-            </a:avLst>
-          </a:prstGeom>
-          <a:noFill/>
-          <a:ln cap="flat" cmpd="sng" w="19050">
-            <a:solidFill>
-              <a:srgbClr val="31538F"/>
-            </a:solidFill>
-            <a:prstDash val="solid"/>
-            <a:miter lim="800000"/>
-            <a:headEnd len="sm" w="sm" type="none"/>
-            <a:tailEnd len="sm" w="sm" type="none"/>
-          </a:ln>
-        </p:spPr>
-        <p:txBody>
-          <a:bodyPr anchorCtr="0" anchor="ctr" bIns="45700" lIns="91425" spcFirstLastPara="1" rIns="91425" wrap="square" tIns="45700">
-            <a:noAutofit/>
-          </a:bodyPr>
-          <a:lstStyle/>
-          <a:p>
-            <a:pPr indent="0" lvl="0" marL="0" marR="0" rtl="0" algn="ctr">
-              <a:lnSpc>
-                <a:spcPct val="100000"/>
-              </a:lnSpc>
-              <a:spcBef>
-                <a:spcPts val="0"/>
-              </a:spcBef>
-              <a:spcAft>
-                <a:spcPts val="0"/>
-              </a:spcAft>
-              <a:buClr>
-                <a:srgbClr val="000000"/>
-              </a:buClr>
-              <a:buSzPts val="1800"/>
-              <a:buFont typeface="Arial"/>
-              <a:buNone/>
-            </a:pPr>
-            <a:r>
-              <a:t/>
-            </a:r>
-            <a:endParaRPr b="0" i="0" sz="1800" u="none" cap="none" strike="noStrike">
-              <a:solidFill>
-                <a:schemeClr val="lt1"/>
-              </a:solidFill>
-              <a:latin typeface="Calibri"/>
-              <a:ea typeface="Calibri"/>
-              <a:cs typeface="Calibri"/>
-              <a:sym typeface="Calibri"/>
-            </a:endParaRPr>
-          </a:p>
-        </p:txBody>
-      </p:sp>
-      <p:sp>
-        <p:nvSpPr>
-          <p:cNvPr id="140" name="Google Shape;140;p2"/>
-          <p:cNvSpPr/>
-          <p:nvPr/>
-        </p:nvSpPr>
-        <p:spPr>
-          <a:xfrm>
-            <a:off x="4805570" y="4478906"/>
-            <a:ext cx="2509630" cy="2077279"/>
-          </a:xfrm>
-          <a:prstGeom prst="hexagon">
-            <a:avLst>
-              <a:gd fmla="val 25000" name="adj"/>
-              <a:gd fmla="val 115470" name="vf"/>
-            </a:avLst>
-          </a:prstGeom>
-          <a:noFill/>
-          <a:ln cap="flat" cmpd="sng" w="19050">
-            <a:solidFill>
-              <a:srgbClr val="31538F"/>
-            </a:solidFill>
-            <a:prstDash val="solid"/>
-            <a:miter lim="800000"/>
-            <a:headEnd len="sm" w="sm" type="none"/>
-            <a:tailEnd len="sm" w="sm" type="none"/>
-          </a:ln>
-        </p:spPr>
-        <p:txBody>
-          <a:bodyPr anchorCtr="0" anchor="ctr" bIns="45700" lIns="91425" spcFirstLastPara="1" rIns="91425" wrap="square" tIns="45700">
-            <a:noAutofit/>
-          </a:bodyPr>
-          <a:lstStyle/>
-          <a:p>
-            <a:pPr indent="0" lvl="0" marL="0" marR="0" rtl="0" algn="ctr">
-              <a:lnSpc>
-                <a:spcPct val="100000"/>
-              </a:lnSpc>
-              <a:spcBef>
-                <a:spcPts val="0"/>
-              </a:spcBef>
-              <a:spcAft>
-                <a:spcPts val="0"/>
-              </a:spcAft>
-              <a:buClr>
-                <a:srgbClr val="000000"/>
-              </a:buClr>
-              <a:buSzPts val="1800"/>
-              <a:buFont typeface="Arial"/>
-              <a:buNone/>
-            </a:pPr>
-            <a:r>
-              <a:t/>
-            </a:r>
-            <a:endParaRPr b="0" i="0" sz="1800" u="none" cap="none" strike="noStrike">
-              <a:solidFill>
-                <a:schemeClr val="lt1"/>
-              </a:solidFill>
-              <a:latin typeface="Calibri"/>
-              <a:ea typeface="Calibri"/>
-              <a:cs typeface="Calibri"/>
-              <a:sym typeface="Calibri"/>
-            </a:endParaRPr>
-          </a:p>
-        </p:txBody>
-      </p:sp>
-      <p:sp>
-        <p:nvSpPr>
-          <p:cNvPr id="141" name="Google Shape;141;p2"/>
-          <p:cNvSpPr txBox="1"/>
-          <p:nvPr/>
-        </p:nvSpPr>
-        <p:spPr>
-          <a:xfrm>
-            <a:off x="5037963" y="2846904"/>
-            <a:ext cx="2137125" cy="1446550"/>
-          </a:xfrm>
-          <a:prstGeom prst="rect">
-            <a:avLst/>
-          </a:prstGeom>
-          <a:noFill/>
-          <a:ln>
-            <a:noFill/>
-          </a:ln>
-        </p:spPr>
-        <p:txBody>
-          <a:bodyPr anchorCtr="0" anchor="t" bIns="45700" lIns="91425" spcFirstLastPara="1" rIns="91425" wrap="square" tIns="45700">
-            <a:spAutoFit/>
-          </a:bodyPr>
-          <a:lstStyle/>
-          <a:p>
-            <a:pPr indent="0" lvl="0" marL="0" marR="0" rtl="0" algn="ctr">
-              <a:lnSpc>
-                <a:spcPct val="100000"/>
-              </a:lnSpc>
-              <a:spcBef>
-                <a:spcPts val="0"/>
-              </a:spcBef>
-              <a:spcAft>
-                <a:spcPts val="0"/>
-              </a:spcAft>
-              <a:buClr>
-                <a:srgbClr val="000000"/>
-              </a:buClr>
-              <a:buSzPts val="4400"/>
-              <a:buFont typeface="Arial"/>
-              <a:buNone/>
-            </a:pPr>
-            <a:r>
-              <a:rPr b="1" i="0" lang="en-US" sz="4400" u="none" cap="none" strike="noStrike">
-                <a:solidFill>
-                  <a:srgbClr val="2F5496"/>
-                </a:solidFill>
-                <a:latin typeface="Calibri"/>
-                <a:ea typeface="Calibri"/>
-                <a:cs typeface="Calibri"/>
-                <a:sym typeface="Calibri"/>
-              </a:rPr>
-              <a:t>Module </a:t>
-            </a:r>
-            <a:endParaRPr b="0" i="0" sz="1400" u="none" cap="none" strike="noStrike">
-              <a:solidFill>
-                <a:srgbClr val="000000"/>
-              </a:solidFill>
-              <a:latin typeface="Arial"/>
-              <a:ea typeface="Arial"/>
-              <a:cs typeface="Arial"/>
-              <a:sym typeface="Arial"/>
-            </a:endParaRPr>
-          </a:p>
-          <a:p>
-            <a:pPr indent="0" lvl="0" marL="0" marR="0" rtl="0" algn="ctr">
-              <a:lnSpc>
-                <a:spcPct val="100000"/>
-              </a:lnSpc>
-              <a:spcBef>
-                <a:spcPts val="0"/>
-              </a:spcBef>
-              <a:spcAft>
-                <a:spcPts val="0"/>
-              </a:spcAft>
-              <a:buClr>
-                <a:srgbClr val="000000"/>
-              </a:buClr>
-              <a:buSzPts val="4400"/>
-              <a:buFont typeface="Arial"/>
-              <a:buNone/>
-            </a:pPr>
-            <a:r>
-              <a:rPr b="1" i="0" lang="en-US" sz="4400" u="none" cap="none" strike="noStrike">
-                <a:solidFill>
-                  <a:srgbClr val="2F5496"/>
-                </a:solidFill>
-                <a:latin typeface="Calibri"/>
-                <a:ea typeface="Calibri"/>
-                <a:cs typeface="Calibri"/>
-                <a:sym typeface="Calibri"/>
-              </a:rPr>
-              <a:t># 1</a:t>
-            </a:r>
-            <a:endParaRPr b="0" i="0" sz="1400" u="none" cap="none" strike="noStrike">
-              <a:solidFill>
-                <a:srgbClr val="000000"/>
-              </a:solidFill>
-              <a:latin typeface="Arial"/>
-              <a:ea typeface="Arial"/>
-              <a:cs typeface="Arial"/>
-              <a:sym typeface="Arial"/>
-            </a:endParaRPr>
-          </a:p>
-        </p:txBody>
-      </p:sp>
-      <p:sp>
-        <p:nvSpPr>
-          <p:cNvPr id="142" name="Google Shape;142;p2"/>
-          <p:cNvSpPr/>
-          <p:nvPr/>
-        </p:nvSpPr>
-        <p:spPr>
-          <a:xfrm>
-            <a:off x="5379404" y="889907"/>
-            <a:ext cx="1454244" cy="923330"/>
-          </a:xfrm>
-          <a:prstGeom prst="rect">
-            <a:avLst/>
-          </a:prstGeom>
-          <a:noFill/>
-          <a:ln>
-            <a:noFill/>
-          </a:ln>
-        </p:spPr>
-        <p:txBody>
-          <a:bodyPr anchorCtr="0" anchor="t" bIns="45700" lIns="91425" spcFirstLastPara="1" rIns="91425" wrap="square" tIns="45700">
-            <a:spAutoFit/>
-          </a:bodyPr>
-          <a:lstStyle/>
-          <a:p>
-            <a:pPr indent="0" lvl="0" marL="0" marR="0" rtl="0" algn="l">
-              <a:lnSpc>
-                <a:spcPct val="100000"/>
-              </a:lnSpc>
-              <a:spcBef>
-                <a:spcPts val="0"/>
-              </a:spcBef>
-              <a:spcAft>
-                <a:spcPts val="0"/>
-              </a:spcAft>
-              <a:buClr>
-                <a:srgbClr val="000000"/>
-              </a:buClr>
-              <a:buSzPts val="1800"/>
-              <a:buFont typeface="Arial"/>
-              <a:buNone/>
-            </a:pPr>
-            <a:r>
-              <a:rPr b="0" i="0" lang="en-US" sz="1800" u="none" cap="none" strike="noStrike">
-                <a:solidFill>
-                  <a:srgbClr val="1F3864"/>
-                </a:solidFill>
-                <a:latin typeface="Times New Roman"/>
-                <a:ea typeface="Times New Roman"/>
-                <a:cs typeface="Times New Roman"/>
-                <a:sym typeface="Times New Roman"/>
-              </a:rPr>
-              <a:t>A pictorial </a:t>
-            </a:r>
-            <a:endParaRPr b="0" i="0" sz="1400" u="none" cap="none" strike="noStrike">
-              <a:solidFill>
-                <a:srgbClr val="000000"/>
-              </a:solidFill>
-              <a:latin typeface="Arial"/>
-              <a:ea typeface="Arial"/>
-              <a:cs typeface="Arial"/>
-              <a:sym typeface="Arial"/>
-            </a:endParaRPr>
-          </a:p>
-          <a:p>
-            <a:pPr indent="0" lvl="0" marL="0" marR="0" rtl="0" algn="l">
-              <a:lnSpc>
-                <a:spcPct val="100000"/>
-              </a:lnSpc>
-              <a:spcBef>
-                <a:spcPts val="0"/>
-              </a:spcBef>
-              <a:spcAft>
-                <a:spcPts val="0"/>
-              </a:spcAft>
-              <a:buClr>
-                <a:srgbClr val="000000"/>
-              </a:buClr>
-              <a:buSzPts val="1800"/>
-              <a:buFont typeface="Arial"/>
-              <a:buNone/>
-            </a:pPr>
-            <a:r>
-              <a:rPr b="0" i="0" lang="en-US" sz="1800" u="none" cap="none" strike="noStrike">
-                <a:solidFill>
-                  <a:srgbClr val="1F3864"/>
-                </a:solidFill>
-                <a:latin typeface="Times New Roman"/>
-                <a:ea typeface="Times New Roman"/>
-                <a:cs typeface="Times New Roman"/>
-                <a:sym typeface="Times New Roman"/>
-              </a:rPr>
-              <a:t>illustrating </a:t>
-            </a:r>
-            <a:endParaRPr b="0" i="0" sz="1400" u="none" cap="none" strike="noStrike">
-              <a:solidFill>
-                <a:srgbClr val="000000"/>
-              </a:solidFill>
-              <a:latin typeface="Arial"/>
-              <a:ea typeface="Arial"/>
-              <a:cs typeface="Arial"/>
-              <a:sym typeface="Arial"/>
-            </a:endParaRPr>
-          </a:p>
-          <a:p>
-            <a:pPr indent="0" lvl="0" marL="0" marR="0" rtl="0" algn="l">
-              <a:lnSpc>
-                <a:spcPct val="100000"/>
-              </a:lnSpc>
-              <a:spcBef>
-                <a:spcPts val="0"/>
-              </a:spcBef>
-              <a:spcAft>
-                <a:spcPts val="0"/>
-              </a:spcAft>
-              <a:buClr>
-                <a:srgbClr val="000000"/>
-              </a:buClr>
-              <a:buSzPts val="1800"/>
-              <a:buFont typeface="Arial"/>
-              <a:buNone/>
-            </a:pPr>
-            <a:r>
-              <a:rPr b="0" i="0" lang="en-US" sz="1800" u="none" cap="none" strike="noStrike">
-                <a:solidFill>
-                  <a:srgbClr val="1F3864"/>
-                </a:solidFill>
-                <a:latin typeface="Times New Roman"/>
-                <a:ea typeface="Times New Roman"/>
-                <a:cs typeface="Times New Roman"/>
-                <a:sym typeface="Times New Roman"/>
-              </a:rPr>
-              <a:t>a key concept</a:t>
-            </a:r>
-            <a:endParaRPr b="0" i="0" sz="1400" u="none" cap="none" strike="noStrike">
-              <a:solidFill>
-                <a:srgbClr val="000000"/>
-              </a:solidFill>
-              <a:latin typeface="Arial"/>
-              <a:ea typeface="Arial"/>
-              <a:cs typeface="Arial"/>
-              <a:sym typeface="Arial"/>
-            </a:endParaRPr>
-          </a:p>
-        </p:txBody>
-      </p:sp>
-      <p:sp>
-        <p:nvSpPr>
-          <p:cNvPr id="143" name="Google Shape;143;p2"/>
-          <p:cNvSpPr/>
-          <p:nvPr/>
-        </p:nvSpPr>
-        <p:spPr>
-          <a:xfrm>
-            <a:off x="3111667" y="2078461"/>
-            <a:ext cx="2013180" cy="646331"/>
-          </a:xfrm>
-          <a:prstGeom prst="rect">
-            <a:avLst/>
-          </a:prstGeom>
-          <a:noFill/>
-          <a:ln>
-            <a:noFill/>
-          </a:ln>
-        </p:spPr>
-        <p:txBody>
-          <a:bodyPr anchorCtr="0" anchor="t" bIns="45700" lIns="91425" spcFirstLastPara="1" rIns="91425" wrap="square" tIns="45700">
-            <a:spAutoFit/>
-          </a:bodyPr>
-          <a:lstStyle/>
-          <a:p>
-            <a:pPr indent="0" lvl="0" marL="0" marR="0" rtl="0" algn="ctr">
-              <a:lnSpc>
-                <a:spcPct val="100000"/>
-              </a:lnSpc>
-              <a:spcBef>
-                <a:spcPts val="0"/>
-              </a:spcBef>
-              <a:spcAft>
-                <a:spcPts val="0"/>
-              </a:spcAft>
-              <a:buClr>
-                <a:srgbClr val="000000"/>
-              </a:buClr>
-              <a:buSzPts val="1800"/>
-              <a:buFont typeface="Arial"/>
-              <a:buNone/>
-            </a:pPr>
-            <a:r>
-              <a:rPr b="0" i="0" lang="en-US" sz="1800" u="none" cap="none" strike="noStrike">
-                <a:solidFill>
-                  <a:srgbClr val="1F3864"/>
-                </a:solidFill>
-                <a:latin typeface="Calibri"/>
-                <a:ea typeface="Calibri"/>
-                <a:cs typeface="Calibri"/>
-                <a:sym typeface="Calibri"/>
-              </a:rPr>
-              <a:t>Summary </a:t>
-            </a:r>
-            <a:endParaRPr b="0" i="0" sz="1400" u="none" cap="none" strike="noStrike">
-              <a:solidFill>
-                <a:srgbClr val="000000"/>
-              </a:solidFill>
-              <a:latin typeface="Arial"/>
-              <a:ea typeface="Arial"/>
-              <a:cs typeface="Arial"/>
-              <a:sym typeface="Arial"/>
-            </a:endParaRPr>
-          </a:p>
-          <a:p>
-            <a:pPr indent="0" lvl="0" marL="0" marR="0" rtl="0" algn="ctr">
-              <a:lnSpc>
-                <a:spcPct val="100000"/>
-              </a:lnSpc>
-              <a:spcBef>
-                <a:spcPts val="0"/>
-              </a:spcBef>
-              <a:spcAft>
-                <a:spcPts val="0"/>
-              </a:spcAft>
-              <a:buClr>
-                <a:srgbClr val="000000"/>
-              </a:buClr>
-              <a:buSzPts val="1800"/>
-              <a:buFont typeface="Arial"/>
-              <a:buNone/>
-            </a:pPr>
-            <a:r>
-              <a:rPr b="0" i="0" lang="en-US" sz="1800" u="none" cap="none" strike="noStrike">
-                <a:solidFill>
-                  <a:srgbClr val="1F3864"/>
-                </a:solidFill>
-                <a:latin typeface="Calibri"/>
-                <a:ea typeface="Calibri"/>
-                <a:cs typeface="Calibri"/>
-                <a:sym typeface="Calibri"/>
-              </a:rPr>
-              <a:t>of essential notions</a:t>
-            </a:r>
-            <a:endParaRPr b="0" i="0" sz="1800" u="none" cap="none" strike="noStrike">
-              <a:solidFill>
-                <a:srgbClr val="1F3864"/>
-              </a:solidFill>
-              <a:latin typeface="Calibri"/>
-              <a:ea typeface="Calibri"/>
-              <a:cs typeface="Calibri"/>
-              <a:sym typeface="Calibri"/>
-            </a:endParaRPr>
-          </a:p>
-        </p:txBody>
-      </p:sp>
-      <p:sp>
-        <p:nvSpPr>
-          <p:cNvPr id="144" name="Google Shape;144;p2"/>
-          <p:cNvSpPr/>
-          <p:nvPr/>
-        </p:nvSpPr>
-        <p:spPr>
-          <a:xfrm>
-            <a:off x="3497422" y="4150767"/>
-            <a:ext cx="1133708" cy="646331"/>
-          </a:xfrm>
-          <a:prstGeom prst="rect">
-            <a:avLst/>
-          </a:prstGeom>
-          <a:noFill/>
-          <a:ln>
-            <a:noFill/>
-          </a:ln>
-        </p:spPr>
-        <p:txBody>
-          <a:bodyPr anchorCtr="0" anchor="t" bIns="45700" lIns="91425" spcFirstLastPara="1" rIns="91425" wrap="square" tIns="45700">
-            <a:spAutoFit/>
-          </a:bodyPr>
-          <a:lstStyle/>
-          <a:p>
-            <a:pPr indent="0" lvl="0" marL="0" marR="0" rtl="0" algn="l">
-              <a:lnSpc>
-                <a:spcPct val="100000"/>
-              </a:lnSpc>
-              <a:spcBef>
-                <a:spcPts val="0"/>
-              </a:spcBef>
-              <a:spcAft>
-                <a:spcPts val="0"/>
-              </a:spcAft>
-              <a:buClr>
-                <a:srgbClr val="000000"/>
-              </a:buClr>
-              <a:buSzPts val="1800"/>
-              <a:buFont typeface="Arial"/>
-              <a:buNone/>
-            </a:pPr>
-            <a:r>
-              <a:rPr b="0" i="0" lang="en-US" sz="1800" u="none" cap="none" strike="noStrike">
-                <a:solidFill>
-                  <a:srgbClr val="1F3864"/>
-                </a:solidFill>
-                <a:latin typeface="Times New Roman"/>
-                <a:ea typeface="Times New Roman"/>
-                <a:cs typeface="Times New Roman"/>
-                <a:sym typeface="Times New Roman"/>
-              </a:rPr>
-              <a:t>Guiding </a:t>
-            </a:r>
-            <a:endParaRPr b="0" i="0" sz="1400" u="none" cap="none" strike="noStrike">
-              <a:solidFill>
-                <a:srgbClr val="000000"/>
-              </a:solidFill>
-              <a:latin typeface="Arial"/>
-              <a:ea typeface="Arial"/>
-              <a:cs typeface="Arial"/>
-              <a:sym typeface="Arial"/>
-            </a:endParaRPr>
-          </a:p>
-          <a:p>
-            <a:pPr indent="0" lvl="0" marL="0" marR="0" rtl="0" algn="l">
-              <a:lnSpc>
-                <a:spcPct val="100000"/>
-              </a:lnSpc>
-              <a:spcBef>
-                <a:spcPts val="0"/>
-              </a:spcBef>
-              <a:spcAft>
-                <a:spcPts val="0"/>
-              </a:spcAft>
-              <a:buClr>
-                <a:srgbClr val="000000"/>
-              </a:buClr>
-              <a:buSzPts val="1800"/>
-              <a:buFont typeface="Arial"/>
-              <a:buNone/>
-            </a:pPr>
-            <a:r>
-              <a:rPr b="0" i="0" lang="en-US" sz="1800" u="none" cap="none" strike="noStrike">
-                <a:solidFill>
-                  <a:srgbClr val="1F3864"/>
-                </a:solidFill>
-                <a:latin typeface="Times New Roman"/>
-                <a:ea typeface="Times New Roman"/>
-                <a:cs typeface="Times New Roman"/>
-                <a:sym typeface="Times New Roman"/>
-              </a:rPr>
-              <a:t>principles</a:t>
-            </a:r>
-            <a:endParaRPr b="0" i="0" sz="1400" u="none" cap="none" strike="noStrike">
-              <a:solidFill>
-                <a:srgbClr val="000000"/>
-              </a:solidFill>
-              <a:latin typeface="Arial"/>
-              <a:ea typeface="Arial"/>
-              <a:cs typeface="Arial"/>
-              <a:sym typeface="Arial"/>
-            </a:endParaRPr>
-          </a:p>
-        </p:txBody>
-      </p:sp>
-      <p:sp>
-        <p:nvSpPr>
-          <p:cNvPr id="145" name="Google Shape;145;p2"/>
-          <p:cNvSpPr/>
-          <p:nvPr/>
-        </p:nvSpPr>
-        <p:spPr>
-          <a:xfrm>
-            <a:off x="5307169" y="5254155"/>
-            <a:ext cx="1800493" cy="646331"/>
-          </a:xfrm>
-          <a:prstGeom prst="rect">
-            <a:avLst/>
-          </a:prstGeom>
-          <a:noFill/>
-          <a:ln>
-            <a:noFill/>
-          </a:ln>
-        </p:spPr>
-        <p:txBody>
-          <a:bodyPr anchorCtr="0" anchor="t" bIns="45700" lIns="91425" spcFirstLastPara="1" rIns="91425" wrap="square" tIns="45700">
-            <a:spAutoFit/>
-          </a:bodyPr>
-          <a:lstStyle/>
-          <a:p>
-            <a:pPr indent="0" lvl="0" marL="0" marR="0" rtl="0" algn="l">
-              <a:lnSpc>
-                <a:spcPct val="100000"/>
-              </a:lnSpc>
-              <a:spcBef>
-                <a:spcPts val="0"/>
-              </a:spcBef>
-              <a:spcAft>
-                <a:spcPts val="0"/>
-              </a:spcAft>
-              <a:buClr>
-                <a:srgbClr val="000000"/>
-              </a:buClr>
-              <a:buSzPts val="1800"/>
-              <a:buFont typeface="Arial"/>
-              <a:buNone/>
-            </a:pPr>
-            <a:r>
-              <a:rPr b="0" i="0" lang="en-US" sz="1800" u="none" cap="none" strike="noStrike">
-                <a:solidFill>
-                  <a:srgbClr val="1F3864"/>
-                </a:solidFill>
-                <a:latin typeface="Times New Roman"/>
-                <a:ea typeface="Times New Roman"/>
-                <a:cs typeface="Times New Roman"/>
-                <a:sym typeface="Times New Roman"/>
-              </a:rPr>
-              <a:t>Common pitfalls </a:t>
-            </a:r>
-            <a:endParaRPr b="0" i="0" sz="1400" u="none" cap="none" strike="noStrike">
-              <a:solidFill>
-                <a:srgbClr val="000000"/>
-              </a:solidFill>
-              <a:latin typeface="Arial"/>
-              <a:ea typeface="Arial"/>
-              <a:cs typeface="Arial"/>
-              <a:sym typeface="Arial"/>
-            </a:endParaRPr>
-          </a:p>
-          <a:p>
-            <a:pPr indent="0" lvl="0" marL="0" marR="0" rtl="0" algn="l">
-              <a:lnSpc>
-                <a:spcPct val="100000"/>
-              </a:lnSpc>
-              <a:spcBef>
-                <a:spcPts val="0"/>
-              </a:spcBef>
-              <a:spcAft>
-                <a:spcPts val="0"/>
-              </a:spcAft>
-              <a:buClr>
-                <a:srgbClr val="000000"/>
-              </a:buClr>
-              <a:buSzPts val="1800"/>
-              <a:buFont typeface="Arial"/>
-              <a:buNone/>
-            </a:pPr>
-            <a:r>
-              <a:rPr b="0" i="0" lang="en-US" sz="1800" u="none" cap="none" strike="noStrike">
-                <a:solidFill>
-                  <a:srgbClr val="1F3864"/>
-                </a:solidFill>
-                <a:latin typeface="Times New Roman"/>
-                <a:ea typeface="Times New Roman"/>
-                <a:cs typeface="Times New Roman"/>
-                <a:sym typeface="Times New Roman"/>
-              </a:rPr>
-              <a:t>(“do-nots”)</a:t>
-            </a:r>
-            <a:endParaRPr b="0" i="0" sz="1400" u="none" cap="none" strike="noStrike">
-              <a:solidFill>
-                <a:srgbClr val="000000"/>
-              </a:solidFill>
-              <a:latin typeface="Arial"/>
-              <a:ea typeface="Arial"/>
-              <a:cs typeface="Arial"/>
-              <a:sym typeface="Arial"/>
-            </a:endParaRPr>
-          </a:p>
-        </p:txBody>
-      </p:sp>
-      <p:sp>
-        <p:nvSpPr>
-          <p:cNvPr id="146" name="Google Shape;146;p2"/>
-          <p:cNvSpPr/>
-          <p:nvPr/>
-        </p:nvSpPr>
-        <p:spPr>
-          <a:xfrm>
-            <a:off x="7669497" y="4249508"/>
-            <a:ext cx="633507" cy="369332"/>
-          </a:xfrm>
-          <a:prstGeom prst="rect">
-            <a:avLst/>
-          </a:prstGeom>
-          <a:noFill/>
-          <a:ln>
-            <a:noFill/>
-          </a:ln>
-        </p:spPr>
-        <p:txBody>
-          <a:bodyPr anchorCtr="0" anchor="t" bIns="45700" lIns="91425" spcFirstLastPara="1" rIns="91425" wrap="square" tIns="45700">
-            <a:spAutoFit/>
-          </a:bodyPr>
-          <a:lstStyle/>
-          <a:p>
-            <a:pPr indent="0" lvl="0" marL="0" marR="0" rtl="0" algn="l">
-              <a:lnSpc>
-                <a:spcPct val="100000"/>
-              </a:lnSpc>
-              <a:spcBef>
-                <a:spcPts val="0"/>
-              </a:spcBef>
-              <a:spcAft>
-                <a:spcPts val="0"/>
-              </a:spcAft>
-              <a:buClr>
-                <a:srgbClr val="000000"/>
-              </a:buClr>
-              <a:buSzPts val="1800"/>
-              <a:buFont typeface="Arial"/>
-              <a:buNone/>
-            </a:pPr>
-            <a:r>
-              <a:rPr b="0" i="0" lang="en-US" sz="1800" u="none" cap="none" strike="noStrike">
-                <a:solidFill>
-                  <a:srgbClr val="1F3864"/>
-                </a:solidFill>
-                <a:latin typeface="Times New Roman"/>
-                <a:ea typeface="Times New Roman"/>
-                <a:cs typeface="Times New Roman"/>
-                <a:sym typeface="Times New Roman"/>
-              </a:rPr>
-              <a:t>Quiz</a:t>
-            </a:r>
-            <a:endParaRPr b="0" i="0" sz="1400" u="none" cap="none" strike="noStrike">
-              <a:solidFill>
-                <a:srgbClr val="000000"/>
-              </a:solidFill>
-              <a:latin typeface="Arial"/>
-              <a:ea typeface="Arial"/>
-              <a:cs typeface="Arial"/>
-              <a:sym typeface="Arial"/>
-            </a:endParaRPr>
-          </a:p>
-        </p:txBody>
-      </p:sp>
-      <p:sp>
-        <p:nvSpPr>
-          <p:cNvPr id="147" name="Google Shape;147;p2"/>
-          <p:cNvSpPr/>
-          <p:nvPr/>
-        </p:nvSpPr>
-        <p:spPr>
-          <a:xfrm>
-            <a:off x="7244984" y="1932620"/>
-            <a:ext cx="1836015" cy="923330"/>
-          </a:xfrm>
-          <a:prstGeom prst="rect">
-            <a:avLst/>
-          </a:prstGeom>
-          <a:noFill/>
-          <a:ln>
-            <a:noFill/>
-          </a:ln>
-        </p:spPr>
-        <p:txBody>
-          <a:bodyPr anchorCtr="0" anchor="t" bIns="45700" lIns="91425" spcFirstLastPara="1" rIns="91425" wrap="square" tIns="45700">
-            <a:spAutoFit/>
-          </a:bodyPr>
-          <a:lstStyle/>
-          <a:p>
-            <a:pPr indent="0" lvl="0" marL="0" marR="0" rtl="0" algn="l">
-              <a:lnSpc>
-                <a:spcPct val="100000"/>
-              </a:lnSpc>
-              <a:spcBef>
-                <a:spcPts val="0"/>
-              </a:spcBef>
-              <a:spcAft>
-                <a:spcPts val="0"/>
-              </a:spcAft>
-              <a:buClr>
-                <a:srgbClr val="000000"/>
-              </a:buClr>
-              <a:buSzPts val="1800"/>
-              <a:buFont typeface="Arial"/>
-              <a:buNone/>
-            </a:pPr>
-            <a:r>
-              <a:rPr b="0" i="0" lang="en-US" sz="1800" u="none" cap="none" strike="noStrike">
-                <a:solidFill>
-                  <a:srgbClr val="1F3864"/>
-                </a:solidFill>
-                <a:latin typeface="Calibri"/>
-                <a:ea typeface="Calibri"/>
-                <a:cs typeface="Calibri"/>
-                <a:sym typeface="Calibri"/>
-              </a:rPr>
-              <a:t>Frequently asked </a:t>
-            </a:r>
-            <a:endParaRPr b="0" i="0" sz="1400" u="none" cap="none" strike="noStrike">
-              <a:solidFill>
-                <a:srgbClr val="000000"/>
-              </a:solidFill>
-              <a:latin typeface="Arial"/>
-              <a:ea typeface="Arial"/>
-              <a:cs typeface="Arial"/>
-              <a:sym typeface="Arial"/>
-            </a:endParaRPr>
-          </a:p>
-          <a:p>
-            <a:pPr indent="0" lvl="0" marL="0" marR="0" rtl="0" algn="l">
-              <a:lnSpc>
-                <a:spcPct val="100000"/>
-              </a:lnSpc>
-              <a:spcBef>
-                <a:spcPts val="0"/>
-              </a:spcBef>
-              <a:spcAft>
-                <a:spcPts val="0"/>
-              </a:spcAft>
-              <a:buClr>
-                <a:srgbClr val="000000"/>
-              </a:buClr>
-              <a:buSzPts val="1800"/>
-              <a:buFont typeface="Arial"/>
-              <a:buNone/>
-            </a:pPr>
-            <a:r>
-              <a:rPr b="0" i="0" lang="en-US" sz="1800" u="none" cap="none" strike="noStrike">
-                <a:solidFill>
-                  <a:srgbClr val="1F3864"/>
-                </a:solidFill>
-                <a:latin typeface="Calibri"/>
-                <a:ea typeface="Calibri"/>
-                <a:cs typeface="Calibri"/>
-                <a:sym typeface="Calibri"/>
-              </a:rPr>
-              <a:t>questions raised </a:t>
-            </a:r>
-            <a:endParaRPr b="0" i="0" sz="1400" u="none" cap="none" strike="noStrike">
-              <a:solidFill>
-                <a:srgbClr val="000000"/>
-              </a:solidFill>
-              <a:latin typeface="Arial"/>
-              <a:ea typeface="Arial"/>
-              <a:cs typeface="Arial"/>
-              <a:sym typeface="Arial"/>
-            </a:endParaRPr>
-          </a:p>
-          <a:p>
-            <a:pPr indent="0" lvl="0" marL="0" marR="0" rtl="0" algn="l">
-              <a:lnSpc>
-                <a:spcPct val="100000"/>
-              </a:lnSpc>
-              <a:spcBef>
-                <a:spcPts val="0"/>
-              </a:spcBef>
-              <a:spcAft>
-                <a:spcPts val="0"/>
-              </a:spcAft>
-              <a:buClr>
-                <a:srgbClr val="000000"/>
-              </a:buClr>
-              <a:buSzPts val="1800"/>
-              <a:buFont typeface="Arial"/>
-              <a:buNone/>
-            </a:pPr>
-            <a:r>
-              <a:rPr b="0" i="0" lang="en-US" sz="1800" u="none" cap="none" strike="noStrike">
-                <a:solidFill>
-                  <a:srgbClr val="1F3864"/>
-                </a:solidFill>
-                <a:latin typeface="Calibri"/>
-                <a:ea typeface="Calibri"/>
-                <a:cs typeface="Calibri"/>
-                <a:sym typeface="Calibri"/>
-              </a:rPr>
-              <a:t>by students</a:t>
-            </a:r>
-            <a:endParaRPr b="0" i="0" sz="1800" u="none" cap="none" strike="noStrike">
-              <a:solidFill>
-                <a:srgbClr val="1F3864"/>
-              </a:solidFill>
-              <a:latin typeface="Calibri"/>
-              <a:ea typeface="Calibri"/>
-              <a:cs typeface="Calibri"/>
-              <a:sym typeface="Calibri"/>
-            </a:endParaRPr>
-          </a:p>
-        </p:txBody>
-      </p:sp>
-      <p:grpSp>
-        <p:nvGrpSpPr>
-          <p:cNvPr id="148" name="Google Shape;148;p2"/>
-          <p:cNvGrpSpPr/>
-          <p:nvPr/>
-        </p:nvGrpSpPr>
-        <p:grpSpPr>
-          <a:xfrm>
-            <a:off x="5161250" y="183435"/>
-            <a:ext cx="335559" cy="369332"/>
-            <a:chOff x="369116" y="375299"/>
-            <a:chExt cx="335559" cy="369332"/>
-          </a:xfrm>
-        </p:grpSpPr>
-        <p:sp>
-          <p:nvSpPr>
-            <p:cNvPr id="149" name="Google Shape;149;p2"/>
-            <p:cNvSpPr/>
-            <p:nvPr/>
-          </p:nvSpPr>
-          <p:spPr>
-            <a:xfrm>
-              <a:off x="369116" y="411061"/>
-              <a:ext cx="335559" cy="297809"/>
-            </a:xfrm>
-            <a:prstGeom prst="ellipse">
-              <a:avLst/>
-            </a:prstGeom>
-            <a:solidFill>
-              <a:schemeClr val="lt1"/>
-            </a:solidFill>
-            <a:ln cap="flat" cmpd="sng" w="12700">
-              <a:solidFill>
-                <a:srgbClr val="31538F"/>
-              </a:solidFill>
-              <a:prstDash val="solid"/>
-              <a:miter lim="800000"/>
-              <a:headEnd len="sm" w="sm" type="none"/>
-              <a:tailEnd len="sm" w="sm" type="none"/>
-            </a:ln>
-          </p:spPr>
-          <p:txBody>
-            <a:bodyPr anchorCtr="0" anchor="ctr" bIns="45700" lIns="91425" spcFirstLastPara="1" rIns="91425" wrap="square" tIns="45700">
-              <a:noAutofit/>
-            </a:bodyPr>
-            <a:lstStyle/>
-            <a:p>
-              <a:pPr indent="0" lvl="0" marL="0" marR="0" rtl="0" algn="ctr">
-                <a:lnSpc>
-                  <a:spcPct val="100000"/>
-                </a:lnSpc>
-                <a:spcBef>
-                  <a:spcPts val="0"/>
-                </a:spcBef>
-                <a:spcAft>
-                  <a:spcPts val="0"/>
-                </a:spcAft>
-                <a:buClr>
-                  <a:srgbClr val="000000"/>
-                </a:buClr>
-                <a:buSzPts val="1800"/>
-                <a:buFont typeface="Arial"/>
-                <a:buNone/>
-              </a:pPr>
-              <a:r>
-                <a:t/>
-              </a:r>
-              <a:endParaRPr b="0" i="0" sz="1800" u="none" cap="none" strike="noStrike">
-                <a:solidFill>
-                  <a:schemeClr val="lt1"/>
-                </a:solidFill>
-                <a:latin typeface="Calibri"/>
-                <a:ea typeface="Calibri"/>
-                <a:cs typeface="Calibri"/>
-                <a:sym typeface="Calibri"/>
-              </a:endParaRPr>
-            </a:p>
-          </p:txBody>
-        </p:sp>
-        <p:sp>
-          <p:nvSpPr>
-            <p:cNvPr id="150" name="Google Shape;150;p2"/>
-            <p:cNvSpPr txBox="1"/>
-            <p:nvPr/>
-          </p:nvSpPr>
-          <p:spPr>
-            <a:xfrm>
-              <a:off x="394601" y="375299"/>
-              <a:ext cx="301686" cy="369332"/>
-            </a:xfrm>
-            <a:prstGeom prst="rect">
-              <a:avLst/>
-            </a:prstGeom>
-            <a:noFill/>
-            <a:ln>
-              <a:noFill/>
-            </a:ln>
-          </p:spPr>
-          <p:txBody>
-            <a:bodyPr anchorCtr="0" anchor="t" bIns="45700" lIns="91425" spcFirstLastPara="1" rIns="91425" wrap="square" tIns="45700">
-              <a:spAutoFit/>
-            </a:bodyPr>
-            <a:lstStyle/>
-            <a:p>
-              <a:pPr indent="0" lvl="0" marL="0" marR="0" rtl="0" algn="l">
-                <a:lnSpc>
-                  <a:spcPct val="100000"/>
-                </a:lnSpc>
-                <a:spcBef>
-                  <a:spcPts val="0"/>
-                </a:spcBef>
-                <a:spcAft>
-                  <a:spcPts val="0"/>
-                </a:spcAft>
-                <a:buClr>
-                  <a:srgbClr val="000000"/>
-                </a:buClr>
-                <a:buSzPts val="1800"/>
-                <a:buFont typeface="Arial"/>
-                <a:buNone/>
-              </a:pPr>
-              <a:r>
-                <a:rPr b="0" i="0" lang="en-US" sz="1800" u="none" cap="none" strike="noStrike">
-                  <a:solidFill>
-                    <a:schemeClr val="dk1"/>
-                  </a:solidFill>
-                  <a:latin typeface="Calibri"/>
-                  <a:ea typeface="Calibri"/>
-                  <a:cs typeface="Calibri"/>
-                  <a:sym typeface="Calibri"/>
-                </a:rPr>
-                <a:t>1</a:t>
-              </a:r>
-              <a:endParaRPr b="0" i="0" sz="1400" u="none" cap="none" strike="noStrike">
-                <a:solidFill>
-                  <a:srgbClr val="000000"/>
-                </a:solidFill>
-                <a:latin typeface="Arial"/>
-                <a:ea typeface="Arial"/>
-                <a:cs typeface="Arial"/>
-                <a:sym typeface="Arial"/>
-              </a:endParaRPr>
-            </a:p>
-          </p:txBody>
-        </p:sp>
-      </p:grpSp>
-      <p:grpSp>
-        <p:nvGrpSpPr>
-          <p:cNvPr id="151" name="Google Shape;151;p2"/>
-          <p:cNvGrpSpPr/>
-          <p:nvPr/>
-        </p:nvGrpSpPr>
-        <p:grpSpPr>
-          <a:xfrm>
-            <a:off x="3226795" y="1166726"/>
-            <a:ext cx="335559" cy="369332"/>
-            <a:chOff x="369116" y="375299"/>
-            <a:chExt cx="335559" cy="369332"/>
-          </a:xfrm>
-        </p:grpSpPr>
-        <p:sp>
-          <p:nvSpPr>
-            <p:cNvPr id="152" name="Google Shape;152;p2"/>
-            <p:cNvSpPr/>
-            <p:nvPr/>
-          </p:nvSpPr>
-          <p:spPr>
-            <a:xfrm>
-              <a:off x="369116" y="411061"/>
-              <a:ext cx="335559" cy="297809"/>
-            </a:xfrm>
-            <a:prstGeom prst="ellipse">
-              <a:avLst/>
-            </a:prstGeom>
-            <a:solidFill>
-              <a:schemeClr val="lt1"/>
-            </a:solidFill>
-            <a:ln cap="flat" cmpd="sng" w="12700">
-              <a:solidFill>
-                <a:srgbClr val="31538F"/>
-              </a:solidFill>
-              <a:prstDash val="solid"/>
-              <a:miter lim="800000"/>
-              <a:headEnd len="sm" w="sm" type="none"/>
-              <a:tailEnd len="sm" w="sm" type="none"/>
-            </a:ln>
-          </p:spPr>
-          <p:txBody>
-            <a:bodyPr anchorCtr="0" anchor="ctr" bIns="45700" lIns="91425" spcFirstLastPara="1" rIns="91425" wrap="square" tIns="45700">
-              <a:noAutofit/>
-            </a:bodyPr>
-            <a:lstStyle/>
-            <a:p>
-              <a:pPr indent="0" lvl="0" marL="0" marR="0" rtl="0" algn="ctr">
-                <a:lnSpc>
-                  <a:spcPct val="100000"/>
-                </a:lnSpc>
-                <a:spcBef>
-                  <a:spcPts val="0"/>
-                </a:spcBef>
-                <a:spcAft>
-                  <a:spcPts val="0"/>
-                </a:spcAft>
-                <a:buClr>
-                  <a:srgbClr val="000000"/>
-                </a:buClr>
-                <a:buSzPts val="1800"/>
-                <a:buFont typeface="Arial"/>
-                <a:buNone/>
-              </a:pPr>
-              <a:r>
-                <a:t/>
-              </a:r>
-              <a:endParaRPr b="0" i="0" sz="1800" u="none" cap="none" strike="noStrike">
-                <a:solidFill>
-                  <a:schemeClr val="lt1"/>
-                </a:solidFill>
-                <a:latin typeface="Calibri"/>
-                <a:ea typeface="Calibri"/>
-                <a:cs typeface="Calibri"/>
-                <a:sym typeface="Calibri"/>
-              </a:endParaRPr>
-            </a:p>
-          </p:txBody>
-        </p:sp>
-        <p:sp>
-          <p:nvSpPr>
-            <p:cNvPr id="153" name="Google Shape;153;p2"/>
-            <p:cNvSpPr txBox="1"/>
-            <p:nvPr/>
-          </p:nvSpPr>
-          <p:spPr>
-            <a:xfrm>
-              <a:off x="394601" y="375299"/>
-              <a:ext cx="301686" cy="369332"/>
-            </a:xfrm>
-            <a:prstGeom prst="rect">
-              <a:avLst/>
-            </a:prstGeom>
-            <a:noFill/>
-            <a:ln>
-              <a:noFill/>
-            </a:ln>
-          </p:spPr>
-          <p:txBody>
-            <a:bodyPr anchorCtr="0" anchor="t" bIns="45700" lIns="91425" spcFirstLastPara="1" rIns="91425" wrap="square" tIns="45700">
-              <a:spAutoFit/>
-            </a:bodyPr>
-            <a:lstStyle/>
-            <a:p>
-              <a:pPr indent="0" lvl="0" marL="0" marR="0" rtl="0" algn="l">
-                <a:lnSpc>
-                  <a:spcPct val="100000"/>
-                </a:lnSpc>
-                <a:spcBef>
-                  <a:spcPts val="0"/>
-                </a:spcBef>
-                <a:spcAft>
-                  <a:spcPts val="0"/>
-                </a:spcAft>
-                <a:buClr>
-                  <a:srgbClr val="000000"/>
-                </a:buClr>
-                <a:buSzPts val="1800"/>
-                <a:buFont typeface="Arial"/>
-                <a:buNone/>
-              </a:pPr>
-              <a:r>
-                <a:rPr b="0" i="0" lang="en-US" sz="1800" u="none" cap="none" strike="noStrike">
-                  <a:solidFill>
-                    <a:schemeClr val="dk1"/>
-                  </a:solidFill>
-                  <a:latin typeface="Calibri"/>
-                  <a:ea typeface="Calibri"/>
-                  <a:cs typeface="Calibri"/>
-                  <a:sym typeface="Calibri"/>
-                </a:rPr>
-                <a:t>2</a:t>
-              </a:r>
-              <a:endParaRPr b="0" i="0" sz="1400" u="none" cap="none" strike="noStrike">
-                <a:solidFill>
-                  <a:srgbClr val="000000"/>
-                </a:solidFill>
-                <a:latin typeface="Arial"/>
-                <a:ea typeface="Arial"/>
-                <a:cs typeface="Arial"/>
-                <a:sym typeface="Arial"/>
-              </a:endParaRPr>
-            </a:p>
-          </p:txBody>
-        </p:sp>
-      </p:grpSp>
-      <p:grpSp>
-        <p:nvGrpSpPr>
-          <p:cNvPr id="154" name="Google Shape;154;p2"/>
-          <p:cNvGrpSpPr/>
-          <p:nvPr/>
-        </p:nvGrpSpPr>
-        <p:grpSpPr>
-          <a:xfrm>
-            <a:off x="2598996" y="4289267"/>
-            <a:ext cx="335559" cy="369332"/>
-            <a:chOff x="369116" y="375299"/>
-            <a:chExt cx="335559" cy="369332"/>
-          </a:xfrm>
-        </p:grpSpPr>
-        <p:sp>
-          <p:nvSpPr>
-            <p:cNvPr id="155" name="Google Shape;155;p2"/>
-            <p:cNvSpPr/>
-            <p:nvPr/>
-          </p:nvSpPr>
-          <p:spPr>
-            <a:xfrm>
-              <a:off x="369116" y="411061"/>
-              <a:ext cx="335559" cy="297809"/>
-            </a:xfrm>
-            <a:prstGeom prst="ellipse">
-              <a:avLst/>
-            </a:prstGeom>
-            <a:solidFill>
-              <a:schemeClr val="lt1"/>
-            </a:solidFill>
-            <a:ln cap="flat" cmpd="sng" w="12700">
-              <a:solidFill>
-                <a:srgbClr val="31538F"/>
-              </a:solidFill>
-              <a:prstDash val="solid"/>
-              <a:miter lim="800000"/>
-              <a:headEnd len="sm" w="sm" type="none"/>
-              <a:tailEnd len="sm" w="sm" type="none"/>
-            </a:ln>
-          </p:spPr>
-          <p:txBody>
-            <a:bodyPr anchorCtr="0" anchor="ctr" bIns="45700" lIns="91425" spcFirstLastPara="1" rIns="91425" wrap="square" tIns="45700">
-              <a:noAutofit/>
-            </a:bodyPr>
-            <a:lstStyle/>
-            <a:p>
-              <a:pPr indent="0" lvl="0" marL="0" marR="0" rtl="0" algn="ctr">
-                <a:lnSpc>
-                  <a:spcPct val="100000"/>
-                </a:lnSpc>
-                <a:spcBef>
-                  <a:spcPts val="0"/>
-                </a:spcBef>
-                <a:spcAft>
-                  <a:spcPts val="0"/>
-                </a:spcAft>
-                <a:buClr>
-                  <a:srgbClr val="000000"/>
-                </a:buClr>
-                <a:buSzPts val="1800"/>
-                <a:buFont typeface="Arial"/>
-                <a:buNone/>
-              </a:pPr>
-              <a:r>
-                <a:t/>
-              </a:r>
-              <a:endParaRPr b="0" i="0" sz="1800" u="none" cap="none" strike="noStrike">
-                <a:solidFill>
-                  <a:schemeClr val="lt1"/>
-                </a:solidFill>
-                <a:latin typeface="Calibri"/>
-                <a:ea typeface="Calibri"/>
-                <a:cs typeface="Calibri"/>
-                <a:sym typeface="Calibri"/>
-              </a:endParaRPr>
-            </a:p>
-          </p:txBody>
-        </p:sp>
-        <p:sp>
-          <p:nvSpPr>
-            <p:cNvPr id="156" name="Google Shape;156;p2"/>
-            <p:cNvSpPr txBox="1"/>
-            <p:nvPr/>
-          </p:nvSpPr>
-          <p:spPr>
-            <a:xfrm>
-              <a:off x="394601" y="375299"/>
-              <a:ext cx="301686" cy="369332"/>
-            </a:xfrm>
-            <a:prstGeom prst="rect">
-              <a:avLst/>
-            </a:prstGeom>
-            <a:noFill/>
-            <a:ln>
-              <a:noFill/>
-            </a:ln>
-          </p:spPr>
-          <p:txBody>
-            <a:bodyPr anchorCtr="0" anchor="t" bIns="45700" lIns="91425" spcFirstLastPara="1" rIns="91425" wrap="square" tIns="45700">
-              <a:spAutoFit/>
-            </a:bodyPr>
-            <a:lstStyle/>
-            <a:p>
-              <a:pPr indent="0" lvl="0" marL="0" marR="0" rtl="0" algn="l">
-                <a:lnSpc>
-                  <a:spcPct val="100000"/>
-                </a:lnSpc>
-                <a:spcBef>
-                  <a:spcPts val="0"/>
-                </a:spcBef>
-                <a:spcAft>
-                  <a:spcPts val="0"/>
-                </a:spcAft>
-                <a:buClr>
-                  <a:srgbClr val="000000"/>
-                </a:buClr>
-                <a:buSzPts val="1800"/>
-                <a:buFont typeface="Arial"/>
-                <a:buNone/>
-              </a:pPr>
-              <a:r>
-                <a:rPr b="0" i="0" lang="en-US" sz="1800" u="none" cap="none" strike="noStrike">
-                  <a:solidFill>
-                    <a:schemeClr val="dk1"/>
-                  </a:solidFill>
-                  <a:latin typeface="Calibri"/>
-                  <a:ea typeface="Calibri"/>
-                  <a:cs typeface="Calibri"/>
-                  <a:sym typeface="Calibri"/>
-                </a:rPr>
-                <a:t>3</a:t>
-              </a:r>
-              <a:endParaRPr b="0" i="0" sz="1400" u="none" cap="none" strike="noStrike">
-                <a:solidFill>
-                  <a:srgbClr val="000000"/>
-                </a:solidFill>
-                <a:latin typeface="Arial"/>
-                <a:ea typeface="Arial"/>
-                <a:cs typeface="Arial"/>
-                <a:sym typeface="Arial"/>
-              </a:endParaRPr>
-            </a:p>
-          </p:txBody>
-        </p:sp>
-      </p:grpSp>
-      <p:grpSp>
-        <p:nvGrpSpPr>
-          <p:cNvPr id="157" name="Google Shape;157;p2"/>
-          <p:cNvGrpSpPr/>
-          <p:nvPr/>
-        </p:nvGrpSpPr>
-        <p:grpSpPr>
-          <a:xfrm>
-            <a:off x="5211624" y="6372305"/>
-            <a:ext cx="335559" cy="369332"/>
-            <a:chOff x="369116" y="375299"/>
-            <a:chExt cx="335559" cy="369332"/>
-          </a:xfrm>
-        </p:grpSpPr>
-        <p:sp>
-          <p:nvSpPr>
-            <p:cNvPr id="158" name="Google Shape;158;p2"/>
-            <p:cNvSpPr/>
-            <p:nvPr/>
-          </p:nvSpPr>
-          <p:spPr>
-            <a:xfrm>
-              <a:off x="369116" y="411061"/>
-              <a:ext cx="335559" cy="297809"/>
-            </a:xfrm>
-            <a:prstGeom prst="ellipse">
-              <a:avLst/>
-            </a:prstGeom>
-            <a:solidFill>
-              <a:schemeClr val="lt1"/>
-            </a:solidFill>
-            <a:ln cap="flat" cmpd="sng" w="12700">
-              <a:solidFill>
-                <a:srgbClr val="31538F"/>
-              </a:solidFill>
-              <a:prstDash val="solid"/>
-              <a:miter lim="800000"/>
-              <a:headEnd len="sm" w="sm" type="none"/>
-              <a:tailEnd len="sm" w="sm" type="none"/>
-            </a:ln>
-          </p:spPr>
-          <p:txBody>
-            <a:bodyPr anchorCtr="0" anchor="ctr" bIns="45700" lIns="91425" spcFirstLastPara="1" rIns="91425" wrap="square" tIns="45700">
-              <a:noAutofit/>
-            </a:bodyPr>
-            <a:lstStyle/>
-            <a:p>
-              <a:pPr indent="0" lvl="0" marL="0" marR="0" rtl="0" algn="ctr">
-                <a:lnSpc>
-                  <a:spcPct val="100000"/>
-                </a:lnSpc>
-                <a:spcBef>
-                  <a:spcPts val="0"/>
-                </a:spcBef>
-                <a:spcAft>
-                  <a:spcPts val="0"/>
-                </a:spcAft>
-                <a:buClr>
-                  <a:srgbClr val="000000"/>
-                </a:buClr>
-                <a:buSzPts val="1800"/>
-                <a:buFont typeface="Arial"/>
-                <a:buNone/>
-              </a:pPr>
-              <a:r>
-                <a:t/>
-              </a:r>
-              <a:endParaRPr b="0" i="0" sz="1800" u="none" cap="none" strike="noStrike">
-                <a:solidFill>
-                  <a:schemeClr val="lt1"/>
-                </a:solidFill>
-                <a:latin typeface="Calibri"/>
-                <a:ea typeface="Calibri"/>
-                <a:cs typeface="Calibri"/>
-                <a:sym typeface="Calibri"/>
-              </a:endParaRPr>
-            </a:p>
-          </p:txBody>
-        </p:sp>
-        <p:sp>
-          <p:nvSpPr>
-            <p:cNvPr id="159" name="Google Shape;159;p2"/>
-            <p:cNvSpPr txBox="1"/>
-            <p:nvPr/>
-          </p:nvSpPr>
-          <p:spPr>
-            <a:xfrm>
-              <a:off x="394601" y="375299"/>
-              <a:ext cx="301686" cy="369332"/>
-            </a:xfrm>
-            <a:prstGeom prst="rect">
-              <a:avLst/>
-            </a:prstGeom>
-            <a:noFill/>
-            <a:ln>
-              <a:noFill/>
-            </a:ln>
-          </p:spPr>
-          <p:txBody>
-            <a:bodyPr anchorCtr="0" anchor="t" bIns="45700" lIns="91425" spcFirstLastPara="1" rIns="91425" wrap="square" tIns="45700">
-              <a:spAutoFit/>
-            </a:bodyPr>
-            <a:lstStyle/>
-            <a:p>
-              <a:pPr indent="0" lvl="0" marL="0" marR="0" rtl="0" algn="l">
-                <a:lnSpc>
-                  <a:spcPct val="100000"/>
-                </a:lnSpc>
-                <a:spcBef>
-                  <a:spcPts val="0"/>
-                </a:spcBef>
-                <a:spcAft>
-                  <a:spcPts val="0"/>
-                </a:spcAft>
-                <a:buClr>
-                  <a:srgbClr val="000000"/>
-                </a:buClr>
-                <a:buSzPts val="1800"/>
-                <a:buFont typeface="Arial"/>
-                <a:buNone/>
-              </a:pPr>
-              <a:r>
-                <a:rPr b="0" i="0" lang="en-US" sz="1800" u="none" cap="none" strike="noStrike">
-                  <a:solidFill>
-                    <a:schemeClr val="dk1"/>
-                  </a:solidFill>
-                  <a:latin typeface="Calibri"/>
-                  <a:ea typeface="Calibri"/>
-                  <a:cs typeface="Calibri"/>
-                  <a:sym typeface="Calibri"/>
-                </a:rPr>
-                <a:t>4</a:t>
-              </a:r>
-              <a:endParaRPr b="0" i="0" sz="1400" u="none" cap="none" strike="noStrike">
-                <a:solidFill>
-                  <a:srgbClr val="000000"/>
-                </a:solidFill>
-                <a:latin typeface="Arial"/>
-                <a:ea typeface="Arial"/>
-                <a:cs typeface="Arial"/>
-                <a:sym typeface="Arial"/>
-              </a:endParaRPr>
-            </a:p>
-          </p:txBody>
-        </p:sp>
-      </p:grpSp>
-      <p:grpSp>
-        <p:nvGrpSpPr>
-          <p:cNvPr id="160" name="Google Shape;160;p2"/>
-          <p:cNvGrpSpPr/>
-          <p:nvPr/>
-        </p:nvGrpSpPr>
-        <p:grpSpPr>
-          <a:xfrm>
-            <a:off x="8620821" y="5332879"/>
-            <a:ext cx="335559" cy="369332"/>
-            <a:chOff x="369116" y="375299"/>
-            <a:chExt cx="335559" cy="369332"/>
-          </a:xfrm>
-        </p:grpSpPr>
-        <p:sp>
-          <p:nvSpPr>
-            <p:cNvPr id="161" name="Google Shape;161;p2"/>
-            <p:cNvSpPr/>
-            <p:nvPr/>
-          </p:nvSpPr>
-          <p:spPr>
-            <a:xfrm>
-              <a:off x="369116" y="411061"/>
-              <a:ext cx="335559" cy="297809"/>
-            </a:xfrm>
-            <a:prstGeom prst="ellipse">
-              <a:avLst/>
-            </a:prstGeom>
-            <a:solidFill>
-              <a:schemeClr val="lt1"/>
-            </a:solidFill>
-            <a:ln cap="flat" cmpd="sng" w="12700">
-              <a:solidFill>
-                <a:srgbClr val="31538F"/>
-              </a:solidFill>
-              <a:prstDash val="solid"/>
-              <a:miter lim="800000"/>
-              <a:headEnd len="sm" w="sm" type="none"/>
-              <a:tailEnd len="sm" w="sm" type="none"/>
-            </a:ln>
-          </p:spPr>
-          <p:txBody>
-            <a:bodyPr anchorCtr="0" anchor="ctr" bIns="45700" lIns="91425" spcFirstLastPara="1" rIns="91425" wrap="square" tIns="45700">
-              <a:noAutofit/>
-            </a:bodyPr>
-            <a:lstStyle/>
-            <a:p>
-              <a:pPr indent="0" lvl="0" marL="0" marR="0" rtl="0" algn="ctr">
-                <a:lnSpc>
-                  <a:spcPct val="100000"/>
-                </a:lnSpc>
-                <a:spcBef>
-                  <a:spcPts val="0"/>
-                </a:spcBef>
-                <a:spcAft>
-                  <a:spcPts val="0"/>
-                </a:spcAft>
-                <a:buClr>
-                  <a:srgbClr val="000000"/>
-                </a:buClr>
-                <a:buSzPts val="1800"/>
-                <a:buFont typeface="Arial"/>
-                <a:buNone/>
-              </a:pPr>
-              <a:r>
-                <a:t/>
-              </a:r>
-              <a:endParaRPr b="0" i="0" sz="1800" u="none" cap="none" strike="noStrike">
-                <a:solidFill>
-                  <a:schemeClr val="lt1"/>
-                </a:solidFill>
-                <a:latin typeface="Calibri"/>
-                <a:ea typeface="Calibri"/>
-                <a:cs typeface="Calibri"/>
-                <a:sym typeface="Calibri"/>
-              </a:endParaRPr>
-            </a:p>
-          </p:txBody>
-        </p:sp>
-        <p:sp>
-          <p:nvSpPr>
-            <p:cNvPr id="162" name="Google Shape;162;p2"/>
-            <p:cNvSpPr txBox="1"/>
-            <p:nvPr/>
-          </p:nvSpPr>
-          <p:spPr>
-            <a:xfrm>
-              <a:off x="394601" y="375299"/>
-              <a:ext cx="301686" cy="369332"/>
-            </a:xfrm>
-            <a:prstGeom prst="rect">
-              <a:avLst/>
-            </a:prstGeom>
-            <a:noFill/>
-            <a:ln>
-              <a:noFill/>
-            </a:ln>
-          </p:spPr>
-          <p:txBody>
-            <a:bodyPr anchorCtr="0" anchor="t" bIns="45700" lIns="91425" spcFirstLastPara="1" rIns="91425" wrap="square" tIns="45700">
-              <a:spAutoFit/>
-            </a:bodyPr>
-            <a:lstStyle/>
-            <a:p>
-              <a:pPr indent="0" lvl="0" marL="0" marR="0" rtl="0" algn="l">
-                <a:lnSpc>
-                  <a:spcPct val="100000"/>
-                </a:lnSpc>
-                <a:spcBef>
-                  <a:spcPts val="0"/>
-                </a:spcBef>
-                <a:spcAft>
-                  <a:spcPts val="0"/>
-                </a:spcAft>
-                <a:buClr>
-                  <a:srgbClr val="000000"/>
-                </a:buClr>
-                <a:buSzPts val="1800"/>
-                <a:buFont typeface="Arial"/>
-                <a:buNone/>
-              </a:pPr>
-              <a:r>
-                <a:rPr b="0" i="0" lang="en-US" sz="1800" u="none" cap="none" strike="noStrike">
-                  <a:solidFill>
-                    <a:schemeClr val="dk1"/>
-                  </a:solidFill>
-                  <a:latin typeface="Calibri"/>
-                  <a:ea typeface="Calibri"/>
-                  <a:cs typeface="Calibri"/>
-                  <a:sym typeface="Calibri"/>
-                </a:rPr>
-                <a:t>5</a:t>
-              </a:r>
-              <a:endParaRPr b="0" i="0" sz="1400" u="none" cap="none" strike="noStrike">
-                <a:solidFill>
-                  <a:srgbClr val="000000"/>
-                </a:solidFill>
-                <a:latin typeface="Arial"/>
-                <a:ea typeface="Arial"/>
-                <a:cs typeface="Arial"/>
-                <a:sym typeface="Arial"/>
-              </a:endParaRPr>
-            </a:p>
-          </p:txBody>
-        </p:sp>
-      </p:grpSp>
-      <p:grpSp>
-        <p:nvGrpSpPr>
-          <p:cNvPr id="163" name="Google Shape;163;p2"/>
-          <p:cNvGrpSpPr/>
-          <p:nvPr/>
-        </p:nvGrpSpPr>
-        <p:grpSpPr>
-          <a:xfrm>
-            <a:off x="9163408" y="2160538"/>
-            <a:ext cx="335559" cy="369332"/>
-            <a:chOff x="369116" y="375299"/>
-            <a:chExt cx="335559" cy="369332"/>
-          </a:xfrm>
-        </p:grpSpPr>
-        <p:sp>
-          <p:nvSpPr>
-            <p:cNvPr id="164" name="Google Shape;164;p2"/>
-            <p:cNvSpPr/>
-            <p:nvPr/>
-          </p:nvSpPr>
-          <p:spPr>
-            <a:xfrm>
-              <a:off x="369116" y="411061"/>
-              <a:ext cx="335559" cy="297809"/>
-            </a:xfrm>
-            <a:prstGeom prst="ellipse">
-              <a:avLst/>
-            </a:prstGeom>
-            <a:solidFill>
-              <a:schemeClr val="lt1"/>
-            </a:solidFill>
-            <a:ln cap="flat" cmpd="sng" w="12700">
-              <a:solidFill>
-                <a:srgbClr val="31538F"/>
-              </a:solidFill>
-              <a:prstDash val="solid"/>
-              <a:miter lim="800000"/>
-              <a:headEnd len="sm" w="sm" type="none"/>
-              <a:tailEnd len="sm" w="sm" type="none"/>
-            </a:ln>
-          </p:spPr>
-          <p:txBody>
-            <a:bodyPr anchorCtr="0" anchor="ctr" bIns="45700" lIns="91425" spcFirstLastPara="1" rIns="91425" wrap="square" tIns="45700">
-              <a:noAutofit/>
-            </a:bodyPr>
-            <a:lstStyle/>
-            <a:p>
-              <a:pPr indent="0" lvl="0" marL="0" marR="0" rtl="0" algn="ctr">
-                <a:lnSpc>
-                  <a:spcPct val="100000"/>
-                </a:lnSpc>
-                <a:spcBef>
-                  <a:spcPts val="0"/>
-                </a:spcBef>
-                <a:spcAft>
-                  <a:spcPts val="0"/>
-                </a:spcAft>
-                <a:buClr>
-                  <a:srgbClr val="000000"/>
-                </a:buClr>
-                <a:buSzPts val="1800"/>
-                <a:buFont typeface="Arial"/>
-                <a:buNone/>
-              </a:pPr>
-              <a:r>
-                <a:t/>
-              </a:r>
-              <a:endParaRPr b="0" i="0" sz="1800" u="none" cap="none" strike="noStrike">
-                <a:solidFill>
-                  <a:schemeClr val="lt1"/>
-                </a:solidFill>
-                <a:latin typeface="Calibri"/>
-                <a:ea typeface="Calibri"/>
-                <a:cs typeface="Calibri"/>
-                <a:sym typeface="Calibri"/>
-              </a:endParaRPr>
-            </a:p>
-          </p:txBody>
-        </p:sp>
-        <p:sp>
-          <p:nvSpPr>
-            <p:cNvPr id="165" name="Google Shape;165;p2"/>
+            <p:cNvPr id="129" name="Google Shape;129;p8"/>
             <p:cNvSpPr txBox="1"/>
             <p:nvPr/>
           </p:nvSpPr>
